--- a/tutor-time/it-was-just-a-joke/downloads/It_Was_Just_a_Joke.pptx
+++ b/tutor-time/it-was-just-a-joke/downloads/It_Was_Just_a_Joke.pptx
@@ -4812,7 +4812,7 @@
                 </a:solidFill>
                 <a:latin typeface="Karla"/>
               </a:rPr>
-              <a:t>It gives them the true half back, and it is the sentence that makes question four possible.</a:t>
+              <a:t>It accepts they did not mean it, and it counts as asking them to stop, which question four needs.</a:t>
             </a:r>
           </a:p>
         </p:txBody>
@@ -7856,7 +7856,7 @@
                 </a:solidFill>
                 <a:latin typeface="Libre Caslon Display"/>
               </a:rPr>
-              <a:t>Does it let both people out of it?</a:t>
+              <a:t>Can both people move on from it?</a:t>
             </a:r>
           </a:p>
         </p:txBody>
@@ -10708,7 +10708,7 @@
                 </a:solidFill>
                 <a:latin typeface="Karla"/>
               </a:rPr>
-              <a:t>What those five words are actually doing.</a:t>
+              <a:t>What “It was just a joke” is actually doing.</a:t>
             </a:r>
           </a:p>
         </p:txBody>
@@ -11974,7 +11974,7 @@
                 </a:solidFill>
                 <a:latin typeface="Karla"/>
               </a:rPr>
-              <a:t>A group uses a nickname that somebody else gave them in Year 7.</a:t>
+              <a:t>A group uses a nickname that somebody else gave the person in Year 7.</a:t>
             </a:r>
           </a:p>
         </p:txBody>
@@ -12530,7 +12530,7 @@
                 </a:solidFill>
                 <a:latin typeface="Karla"/>
               </a:rPr>
-              <a:t>One of them went both ways and ended there. The other one carried on all week.</a:t>
+              <a:t>In one, you both had a go and it ended there. The other one carried on all week.</a:t>
             </a:r>
           </a:p>
         </p:txBody>
@@ -12938,7 +12938,7 @@
                 </a:solidFill>
                 <a:latin typeface="Karla"/>
               </a:rPr>
-              <a:t>A nickname you made up for yourself is yours. One somebody else gave you three years ago is not.</a:t>
+              <a:t>A nickname you made up for yourself is yours. One somebody else gave you is not.</a:t>
             </a:r>
           </a:p>
         </p:txBody>
@@ -12978,7 +12978,7 @@
                 </a:solidFill>
                 <a:latin typeface="Karla"/>
               </a:rPr>
-              <a:t>The words hardly change inside a pair. Everything you sorted them by was somewhere else.</a:t>
+              <a:t>The words hardly change inside a pair. What changes is everything around them.</a:t>
             </a:r>
           </a:p>
         </p:txBody>

--- a/tutor-time/it-was-just-a-joke/downloads/It_Was_Just_a_Joke.pptx
+++ b/tutor-time/it-was-just-a-joke/downloads/It_Was_Just_a_Joke.pptx
@@ -3198,11 +3198,11 @@
           <a:p>
             <a:pPr algn="ctr"/>
             <a:r>
-              <a:rPr sz="3600" b="1">
+              <a:rPr sz="3600" b="0">
                 <a:solidFill>
                   <a:srgbClr val="B03E72"/>
                 </a:solidFill>
-                <a:latin typeface="Libre Caslon Display"/>
+                <a:latin typeface="Georgia"/>
               </a:rPr>
               <a:t>It Was Just a Joke</a:t>
             </a:r>
@@ -3286,7 +3286,7 @@
                 <a:solidFill>
                   <a:srgbClr val="6B6167"/>
                 </a:solidFill>
-                <a:latin typeface="Karla"/>
+                <a:latin typeface="Calibri"/>
               </a:rPr>
               <a:t>The words are the same in each pair. Something else changes.</a:t>
             </a:r>
@@ -3322,7 +3322,7 @@
                 <a:solidFill>
                   <a:srgbClr val="A79EA2"/>
                 </a:solidFill>
-                <a:latin typeface="Karla"/>
+                <a:latin typeface="Calibri"/>
               </a:rPr>
               <a:t>One lesson</a:t>
             </a:r>
@@ -3382,7 +3382,7 @@
                 <a:solidFill>
                   <a:srgbClr val="A79EA2"/>
                 </a:solidFill>
-                <a:latin typeface="Karla"/>
+                <a:latin typeface="Calibri"/>
               </a:rPr>
               <a:t>The Pastoral Guide</a:t>
             </a:r>
@@ -3418,7 +3418,7 @@
                 <a:solidFill>
                   <a:srgbClr val="A79EA2"/>
                 </a:solidFill>
-                <a:latin typeface="Karla"/>
+                <a:latin typeface="Calibri"/>
               </a:rPr>
               <a:t>1 / 18</a:t>
             </a:r>
@@ -3516,91 +3516,9 @@
                 <a:solidFill>
                   <a:srgbClr val="B1517B"/>
                 </a:solidFill>
-                <a:latin typeface="Karla"/>
+                <a:latin typeface="Calibri"/>
               </a:rPr>
               <a:t>IF YOU SAID IT</a:t>
-            </a:r>
-          </a:p>
-        </p:txBody>
-      </p:sp>
-      <p:sp>
-        <p:nvSpPr>
-          <p:cNvPr id="4" name="Rounded Rectangle 3"/>
-          <p:cNvSpPr/>
-          <p:nvPr/>
-        </p:nvSpPr>
-        <p:spPr>
-          <a:xfrm>
-            <a:off x="7543800" y="530352"/>
-            <a:ext cx="914400" cy="347472"/>
-          </a:xfrm>
-          <a:prstGeom prst="roundRect">
-            <a:avLst>
-              <a:gd name="adj" fmla="val 50000"/>
-            </a:avLst>
-          </a:prstGeom>
-          <a:solidFill>
-            <a:srgbClr val="FBEDF3"/>
-          </a:solidFill>
-          <a:ln>
-            <a:noFill/>
-          </a:ln>
-          <a:effectLst/>
-        </p:spPr>
-        <p:style>
-          <a:lnRef idx="1">
-            <a:schemeClr val="accent1"/>
-          </a:lnRef>
-          <a:fillRef idx="3">
-            <a:schemeClr val="accent1"/>
-          </a:fillRef>
-          <a:effectRef idx="2">
-            <a:schemeClr val="accent1"/>
-          </a:effectRef>
-          <a:fontRef idx="minor">
-            <a:schemeClr val="lt1"/>
-          </a:fontRef>
-        </p:style>
-        <p:txBody>
-          <a:bodyPr rtlCol="0" anchor="ctr"/>
-          <a:lstStyle/>
-          <a:p>
-            <a:pPr algn="ctr"/>
-          </a:p>
-        </p:txBody>
-      </p:sp>
-      <p:sp>
-        <p:nvSpPr>
-          <p:cNvPr id="5" name="TextBox 4"/>
-          <p:cNvSpPr txBox="1"/>
-          <p:nvPr/>
-        </p:nvSpPr>
-        <p:spPr>
-          <a:xfrm>
-            <a:off x="7543800" y="594360"/>
-            <a:ext cx="914400" cy="237744"/>
-          </a:xfrm>
-          <a:prstGeom prst="rect">
-            <a:avLst/>
-          </a:prstGeom>
-          <a:noFill/>
-          <a:effectLst/>
-        </p:spPr>
-        <p:txBody>
-          <a:bodyPr wrap="square" lIns="0" rIns="0" tIns="0" bIns="0" anchor="t">
-            <a:spAutoFit/>
-          </a:bodyPr>
-          <a:lstStyle/>
-          <a:p>
-            <a:pPr algn="ctr"/>
-            <a:r>
-              <a:rPr sz="1000" b="1" spc="100">
-                <a:solidFill>
-                  <a:srgbClr val="B03E72"/>
-                </a:solidFill>
-                <a:latin typeface="Karla"/>
-              </a:rPr>
-              <a:t>TEACH</a:t>
             </a:r>
           </a:p>
         </p:txBody>
@@ -3630,11 +3548,11 @@
           <a:p>
             <a:pPr algn="l"/>
             <a:r>
-              <a:rPr sz="3100" b="1">
+              <a:rPr sz="3100" b="0">
                 <a:solidFill>
                   <a:srgbClr val="33292E"/>
                 </a:solidFill>
-                <a:latin typeface="Libre Caslon Display"/>
+                <a:latin typeface="Georgia"/>
               </a:rPr>
               <a:t>Three that work</a:t>
             </a:r>
@@ -3756,11 +3674,11 @@
           <a:p>
             <a:pPr algn="ctr"/>
             <a:r>
-              <a:rPr sz="1800" b="1">
+              <a:rPr sz="1800" b="0">
                 <a:solidFill>
                   <a:srgbClr val="FFFDF7"/>
                 </a:solidFill>
-                <a:latin typeface="Libre Caslon Display"/>
+                <a:latin typeface="Georgia"/>
               </a:rPr>
               <a:t>1</a:t>
             </a:r>
@@ -3796,11 +3714,11 @@
               </a:lnSpc>
             </a:pPr>
             <a:r>
-              <a:rPr sz="1300" b="1">
+              <a:rPr sz="1300" b="0">
                 <a:solidFill>
                   <a:srgbClr val="B03E72"/>
                 </a:solidFill>
-                <a:latin typeface="Libre Caslon Display"/>
+                <a:latin typeface="Georgia"/>
               </a:rPr>
               <a:t>“That came out worse than I meant it to. Sorry.”</a:t>
             </a:r>
@@ -3840,7 +3758,7 @@
                 <a:solidFill>
                   <a:srgbClr val="6B6167"/>
                 </a:solidFill>
-                <a:latin typeface="Karla"/>
+                <a:latin typeface="Calibri"/>
               </a:rPr>
               <a:t>It keeps the true half of the sentence and drops the half that ends the conversation.</a:t>
             </a:r>
@@ -3962,11 +3880,11 @@
           <a:p>
             <a:pPr algn="ctr"/>
             <a:r>
-              <a:rPr sz="1800" b="1">
+              <a:rPr sz="1800" b="0">
                 <a:solidFill>
                   <a:srgbClr val="FFFDF7"/>
                 </a:solidFill>
-                <a:latin typeface="Libre Caslon Display"/>
+                <a:latin typeface="Georgia"/>
               </a:rPr>
               <a:t>2</a:t>
             </a:r>
@@ -4002,11 +3920,11 @@
               </a:lnSpc>
             </a:pPr>
             <a:r>
-              <a:rPr sz="1300" b="1">
+              <a:rPr sz="1300" b="0">
                 <a:solidFill>
                   <a:srgbClr val="B03E72"/>
                 </a:solidFill>
-                <a:latin typeface="Libre Caslon Display"/>
+                <a:latin typeface="Georgia"/>
               </a:rPr>
               <a:t>“Fair enough, I will leave it.”</a:t>
             </a:r>
@@ -4046,7 +3964,7 @@
                 <a:solidFill>
                   <a:srgbClr val="6B6167"/>
                 </a:solidFill>
-                <a:latin typeface="Karla"/>
+                <a:latin typeface="Calibri"/>
               </a:rPr>
               <a:t>Nobody has to admit anything, which is why it usually works in front of other people.</a:t>
             </a:r>
@@ -4168,11 +4086,11 @@
           <a:p>
             <a:pPr algn="ctr"/>
             <a:r>
-              <a:rPr sz="1800" b="1">
+              <a:rPr sz="1800" b="0">
                 <a:solidFill>
                   <a:srgbClr val="FFFDF7"/>
                 </a:solidFill>
-                <a:latin typeface="Libre Caslon Display"/>
+                <a:latin typeface="Georgia"/>
               </a:rPr>
               <a:t>3</a:t>
             </a:r>
@@ -4208,11 +4126,11 @@
               </a:lnSpc>
             </a:pPr>
             <a:r>
-              <a:rPr sz="1300" b="1">
+              <a:rPr sz="1300" b="0">
                 <a:solidFill>
                   <a:srgbClr val="B03E72"/>
                 </a:solidFill>
-                <a:latin typeface="Libre Caslon Display"/>
+                <a:latin typeface="Georgia"/>
               </a:rPr>
               <a:t>“You are right. I will stop.”</a:t>
             </a:r>
@@ -4252,7 +4170,7 @@
                 <a:solidFill>
                   <a:srgbClr val="6B6167"/>
                 </a:solidFill>
-                <a:latin typeface="Karla"/>
+                <a:latin typeface="Calibri"/>
               </a:rPr>
               <a:t>It answers the only question that matters at the time, which is whether it carries on.</a:t>
             </a:r>
@@ -4292,7 +4210,7 @@
                 <a:solidFill>
                   <a:srgbClr val="6B6167"/>
                 </a:solidFill>
-                <a:latin typeface="Karla"/>
+                <a:latin typeface="Calibri"/>
               </a:rPr>
               <a:t>None of them is a speech, and none of them needs anybody else to be listening.</a:t>
             </a:r>
@@ -4352,7 +4270,7 @@
                 <a:solidFill>
                   <a:srgbClr val="A79EA2"/>
                 </a:solidFill>
-                <a:latin typeface="Karla"/>
+                <a:latin typeface="Calibri"/>
               </a:rPr>
               <a:t>The Pastoral Guide</a:t>
             </a:r>
@@ -4388,7 +4306,7 @@
                 <a:solidFill>
                   <a:srgbClr val="A79EA2"/>
                 </a:solidFill>
-                <a:latin typeface="Karla"/>
+                <a:latin typeface="Calibri"/>
               </a:rPr>
               <a:t>10 / 18</a:t>
             </a:r>
@@ -4486,91 +4404,9 @@
                 <a:solidFill>
                   <a:srgbClr val="B1517B"/>
                 </a:solidFill>
-                <a:latin typeface="Karla"/>
+                <a:latin typeface="Calibri"/>
               </a:rPr>
               <a:t>THE OTHER SIDE OF IT</a:t>
-            </a:r>
-          </a:p>
-        </p:txBody>
-      </p:sp>
-      <p:sp>
-        <p:nvSpPr>
-          <p:cNvPr id="4" name="Rounded Rectangle 3"/>
-          <p:cNvSpPr/>
-          <p:nvPr/>
-        </p:nvSpPr>
-        <p:spPr>
-          <a:xfrm>
-            <a:off x="7543800" y="530352"/>
-            <a:ext cx="914400" cy="347472"/>
-          </a:xfrm>
-          <a:prstGeom prst="roundRect">
-            <a:avLst>
-              <a:gd name="adj" fmla="val 50000"/>
-            </a:avLst>
-          </a:prstGeom>
-          <a:solidFill>
-            <a:srgbClr val="FBEDF3"/>
-          </a:solidFill>
-          <a:ln>
-            <a:noFill/>
-          </a:ln>
-          <a:effectLst/>
-        </p:spPr>
-        <p:style>
-          <a:lnRef idx="1">
-            <a:schemeClr val="accent1"/>
-          </a:lnRef>
-          <a:fillRef idx="3">
-            <a:schemeClr val="accent1"/>
-          </a:fillRef>
-          <a:effectRef idx="2">
-            <a:schemeClr val="accent1"/>
-          </a:effectRef>
-          <a:fontRef idx="minor">
-            <a:schemeClr val="lt1"/>
-          </a:fontRef>
-        </p:style>
-        <p:txBody>
-          <a:bodyPr rtlCol="0" anchor="ctr"/>
-          <a:lstStyle/>
-          <a:p>
-            <a:pPr algn="ctr"/>
-          </a:p>
-        </p:txBody>
-      </p:sp>
-      <p:sp>
-        <p:nvSpPr>
-          <p:cNvPr id="5" name="TextBox 4"/>
-          <p:cNvSpPr txBox="1"/>
-          <p:nvPr/>
-        </p:nvSpPr>
-        <p:spPr>
-          <a:xfrm>
-            <a:off x="7543800" y="594360"/>
-            <a:ext cx="914400" cy="237744"/>
-          </a:xfrm>
-          <a:prstGeom prst="rect">
-            <a:avLst/>
-          </a:prstGeom>
-          <a:noFill/>
-          <a:effectLst/>
-        </p:spPr>
-        <p:txBody>
-          <a:bodyPr wrap="square" lIns="0" rIns="0" tIns="0" bIns="0" anchor="t">
-            <a:spAutoFit/>
-          </a:bodyPr>
-          <a:lstStyle/>
-          <a:p>
-            <a:pPr algn="ctr"/>
-            <a:r>
-              <a:rPr sz="1000" b="1" spc="100">
-                <a:solidFill>
-                  <a:srgbClr val="B03E72"/>
-                </a:solidFill>
-                <a:latin typeface="Karla"/>
-              </a:rPr>
-              <a:t>TEACH</a:t>
             </a:r>
           </a:p>
         </p:txBody>
@@ -4600,11 +4436,11 @@
           <a:p>
             <a:pPr algn="l"/>
             <a:r>
-              <a:rPr sz="3100" b="1">
+              <a:rPr sz="3100" b="0">
                 <a:solidFill>
                   <a:srgbClr val="33292E"/>
                 </a:solidFill>
-                <a:latin typeface="Libre Caslon Display"/>
+                <a:latin typeface="Georgia"/>
               </a:rPr>
               <a:t>When it is about you</a:t>
             </a:r>
@@ -4726,11 +4562,11 @@
           <a:p>
             <a:pPr algn="ctr"/>
             <a:r>
-              <a:rPr sz="1800" b="1">
+              <a:rPr sz="1800" b="0">
                 <a:solidFill>
                   <a:srgbClr val="FFFDF7"/>
                 </a:solidFill>
-                <a:latin typeface="Libre Caslon Display"/>
+                <a:latin typeface="Georgia"/>
               </a:rPr>
               <a:t>1</a:t>
             </a:r>
@@ -4766,11 +4602,11 @@
               </a:lnSpc>
             </a:pPr>
             <a:r>
-              <a:rPr sz="1300" b="1">
+              <a:rPr sz="1300" b="0">
                 <a:solidFill>
                   <a:srgbClr val="B03E72"/>
                 </a:solidFill>
-                <a:latin typeface="Libre Caslon Display"/>
+                <a:latin typeface="Georgia"/>
               </a:rPr>
               <a:t>“I know you did not mean it, but I do not like it.”</a:t>
             </a:r>
@@ -4810,7 +4646,7 @@
                 <a:solidFill>
                   <a:srgbClr val="6B6167"/>
                 </a:solidFill>
-                <a:latin typeface="Karla"/>
+                <a:latin typeface="Calibri"/>
               </a:rPr>
               <a:t>It accepts they did not mean it, and it counts as asking them to stop, which question four needs.</a:t>
             </a:r>
@@ -4932,11 +4768,11 @@
           <a:p>
             <a:pPr algn="ctr"/>
             <a:r>
-              <a:rPr sz="1800" b="1">
+              <a:rPr sz="1800" b="0">
                 <a:solidFill>
                   <a:srgbClr val="FFFDF7"/>
                 </a:solidFill>
-                <a:latin typeface="Libre Caslon Display"/>
+                <a:latin typeface="Georgia"/>
               </a:rPr>
               <a:t>2</a:t>
             </a:r>
@@ -4972,11 +4808,11 @@
               </a:lnSpc>
             </a:pPr>
             <a:r>
-              <a:rPr sz="1300" b="1">
+              <a:rPr sz="1300" b="0">
                 <a:solidFill>
                   <a:srgbClr val="B03E72"/>
                 </a:solidFill>
-                <a:latin typeface="Libre Caslon Display"/>
+                <a:latin typeface="Georgia"/>
               </a:rPr>
               <a:t>“Leave it, yeah?”</a:t>
             </a:r>
@@ -5016,7 +4852,7 @@
                 <a:solidFill>
                   <a:srgbClr val="6B6167"/>
                 </a:solidFill>
-                <a:latin typeface="Karla"/>
+                <a:latin typeface="Calibri"/>
               </a:rPr>
               <a:t>Short, no scene, and most people stop.</a:t>
             </a:r>
@@ -5138,11 +4974,11 @@
           <a:p>
             <a:pPr algn="ctr"/>
             <a:r>
-              <a:rPr sz="1800" b="1">
+              <a:rPr sz="1800" b="0">
                 <a:solidFill>
                   <a:srgbClr val="FFFDF7"/>
                 </a:solidFill>
-                <a:latin typeface="Libre Caslon Display"/>
+                <a:latin typeface="Georgia"/>
               </a:rPr>
               <a:t>3</a:t>
             </a:r>
@@ -5178,11 +5014,11 @@
               </a:lnSpc>
             </a:pPr>
             <a:r>
-              <a:rPr sz="1300" b="1">
+              <a:rPr sz="1300" b="0">
                 <a:solidFill>
                   <a:srgbClr val="B03E72"/>
                 </a:solidFill>
-                <a:latin typeface="Libre Caslon Display"/>
+                <a:latin typeface="Georgia"/>
               </a:rPr>
               <a:t>Say it later, on their own.</a:t>
             </a:r>
@@ -5222,7 +5058,7 @@
                 <a:solidFill>
                   <a:srgbClr val="6B6167"/>
                 </a:solidFill>
-                <a:latin typeface="Karla"/>
+                <a:latin typeface="Calibri"/>
               </a:rPr>
               <a:t>Away from the audience it is a different conversation, and it usually goes better.</a:t>
             </a:r>
@@ -5262,7 +5098,7 @@
                 <a:solidFill>
                   <a:srgbClr val="B03E72"/>
                 </a:solidFill>
-                <a:latin typeface="Karla"/>
+                <a:latin typeface="Calibri"/>
               </a:rPr>
               <a:t>Question four only works if somebody asks, and these are the ways of asking.</a:t>
             </a:r>
@@ -5322,7 +5158,7 @@
                 <a:solidFill>
                   <a:srgbClr val="A79EA2"/>
                 </a:solidFill>
-                <a:latin typeface="Karla"/>
+                <a:latin typeface="Calibri"/>
               </a:rPr>
               <a:t>The Pastoral Guide</a:t>
             </a:r>
@@ -5358,7 +5194,7 @@
                 <a:solidFill>
                   <a:srgbClr val="A79EA2"/>
                 </a:solidFill>
-                <a:latin typeface="Karla"/>
+                <a:latin typeface="Calibri"/>
               </a:rPr>
               <a:t>11 / 18</a:t>
             </a:r>
@@ -5456,7 +5292,7 @@
                 <a:solidFill>
                   <a:srgbClr val="B1517B"/>
                 </a:solidFill>
-                <a:latin typeface="Karla"/>
+                <a:latin typeface="Calibri"/>
               </a:rPr>
               <a:t>NOW ONE OUT LOUD</a:t>
             </a:r>
@@ -5465,18 +5301,136 @@
       </p:sp>
       <p:sp>
         <p:nvSpPr>
-          <p:cNvPr id="4" name="Rounded Rectangle 3"/>
+          <p:cNvPr id="6" name="TextBox 5"/>
+          <p:cNvSpPr txBox="1"/>
+          <p:nvPr/>
+        </p:nvSpPr>
+        <p:spPr>
+          <a:xfrm>
+            <a:off x="685800" y="841248"/>
+            <a:ext cx="6309360" cy="566928"/>
+          </a:xfrm>
+          <a:prstGeom prst="rect">
+            <a:avLst/>
+          </a:prstGeom>
+          <a:noFill/>
+          <a:effectLst/>
+        </p:spPr>
+        <p:txBody>
+          <a:bodyPr wrap="square" lIns="0" rIns="0" tIns="0" bIns="0" anchor="t">
+            <a:spAutoFit/>
+          </a:bodyPr>
+          <a:lstStyle/>
+          <a:p>
+            <a:pPr algn="l"/>
+            <a:r>
+              <a:rPr sz="3100" b="0">
+                <a:solidFill>
+                  <a:srgbClr val="33292E"/>
+                </a:solidFill>
+                <a:latin typeface="Georgia"/>
+              </a:rPr>
+              <a:t>Try it on this one</a:t>
+            </a:r>
+          </a:p>
+        </p:txBody>
+      </p:sp>
+      <p:sp>
+        <p:nvSpPr>
+          <p:cNvPr id="7" name="Rounded Rectangle 6"/>
           <p:cNvSpPr/>
           <p:nvPr/>
         </p:nvSpPr>
         <p:spPr>
           <a:xfrm>
-            <a:off x="7543800" y="530352"/>
-            <a:ext cx="914400" cy="347472"/>
+            <a:off x="685800" y="1481328"/>
+            <a:ext cx="7772400" cy="603504"/>
           </a:xfrm>
           <a:prstGeom prst="roundRect">
             <a:avLst>
-              <a:gd name="adj" fmla="val 50000"/>
+              <a:gd name="adj" fmla="val 13636"/>
+            </a:avLst>
+          </a:prstGeom>
+          <a:solidFill>
+            <a:srgbClr val="FFFDF7"/>
+          </a:solidFill>
+          <a:ln>
+            <a:noFill/>
+          </a:ln>
+          <a:effectLst/>
+        </p:spPr>
+        <p:style>
+          <a:lnRef idx="1">
+            <a:schemeClr val="accent1"/>
+          </a:lnRef>
+          <a:fillRef idx="3">
+            <a:schemeClr val="accent1"/>
+          </a:fillRef>
+          <a:effectRef idx="2">
+            <a:schemeClr val="accent1"/>
+          </a:effectRef>
+          <a:fontRef idx="minor">
+            <a:schemeClr val="lt1"/>
+          </a:fontRef>
+        </p:style>
+        <p:txBody>
+          <a:bodyPr rtlCol="0" anchor="ctr"/>
+          <a:lstStyle/>
+          <a:p>
+            <a:pPr algn="ctr"/>
+          </a:p>
+        </p:txBody>
+      </p:sp>
+      <p:sp>
+        <p:nvSpPr>
+          <p:cNvPr id="8" name="TextBox 7"/>
+          <p:cNvSpPr txBox="1"/>
+          <p:nvPr/>
+        </p:nvSpPr>
+        <p:spPr>
+          <a:xfrm>
+            <a:off x="1051560" y="1645920"/>
+            <a:ext cx="7040880" cy="365760"/>
+          </a:xfrm>
+          <a:prstGeom prst="rect">
+            <a:avLst/>
+          </a:prstGeom>
+          <a:noFill/>
+          <a:effectLst/>
+        </p:spPr>
+        <p:txBody>
+          <a:bodyPr wrap="square" lIns="0" rIns="0" tIns="0" bIns="0" anchor="t">
+            <a:spAutoFit/>
+          </a:bodyPr>
+          <a:lstStyle/>
+          <a:p>
+            <a:pPr algn="l"/>
+            <a:r>
+              <a:rPr sz="1300" b="0">
+                <a:solidFill>
+                  <a:srgbClr val="33292E"/>
+                </a:solidFill>
+                <a:latin typeface="Georgia"/>
+              </a:rPr>
+              <a:t>Somebody reads a mistake out of a classmate’s book to the table, and the table laughs.</a:t>
+            </a:r>
+          </a:p>
+        </p:txBody>
+      </p:sp>
+      <p:sp>
+        <p:nvSpPr>
+          <p:cNvPr id="9" name="Rounded Rectangle 8"/>
+          <p:cNvSpPr/>
+          <p:nvPr/>
+        </p:nvSpPr>
+        <p:spPr>
+          <a:xfrm>
+            <a:off x="685800" y="2249424"/>
+            <a:ext cx="7772400" cy="640080"/>
+          </a:xfrm>
+          <a:prstGeom prst="roundRect">
+            <a:avLst>
+              <a:gd name="adj" fmla="val 12857"/>
             </a:avLst>
           </a:prstGeom>
           <a:solidFill>
@@ -5511,94 +5465,20 @@
       </p:sp>
       <p:sp>
         <p:nvSpPr>
-          <p:cNvPr id="5" name="TextBox 4"/>
-          <p:cNvSpPr txBox="1"/>
-          <p:nvPr/>
-        </p:nvSpPr>
-        <p:spPr>
-          <a:xfrm>
-            <a:off x="7543800" y="594360"/>
-            <a:ext cx="914400" cy="237744"/>
-          </a:xfrm>
-          <a:prstGeom prst="rect">
-            <a:avLst/>
-          </a:prstGeom>
-          <a:noFill/>
-          <a:effectLst/>
-        </p:spPr>
-        <p:txBody>
-          <a:bodyPr wrap="square" lIns="0" rIns="0" tIns="0" bIns="0" anchor="t">
-            <a:spAutoFit/>
-          </a:bodyPr>
-          <a:lstStyle/>
-          <a:p>
-            <a:pPr algn="ctr"/>
-            <a:r>
-              <a:rPr sz="1000" b="1" spc="100">
-                <a:solidFill>
-                  <a:srgbClr val="B03E72"/>
-                </a:solidFill>
-                <a:latin typeface="Karla"/>
-              </a:rPr>
-              <a:t>TOGETHER</a:t>
-            </a:r>
-          </a:p>
-        </p:txBody>
-      </p:sp>
-      <p:sp>
-        <p:nvSpPr>
-          <p:cNvPr id="6" name="TextBox 5"/>
-          <p:cNvSpPr txBox="1"/>
-          <p:nvPr/>
-        </p:nvSpPr>
-        <p:spPr>
-          <a:xfrm>
-            <a:off x="685800" y="841248"/>
-            <a:ext cx="6309360" cy="566928"/>
-          </a:xfrm>
-          <a:prstGeom prst="rect">
-            <a:avLst/>
-          </a:prstGeom>
-          <a:noFill/>
-          <a:effectLst/>
-        </p:spPr>
-        <p:txBody>
-          <a:bodyPr wrap="square" lIns="0" rIns="0" tIns="0" bIns="0" anchor="t">
-            <a:spAutoFit/>
-          </a:bodyPr>
-          <a:lstStyle/>
-          <a:p>
-            <a:pPr algn="l"/>
-            <a:r>
-              <a:rPr sz="3100" b="1">
-                <a:solidFill>
-                  <a:srgbClr val="33292E"/>
-                </a:solidFill>
-                <a:latin typeface="Libre Caslon Display"/>
-              </a:rPr>
-              <a:t>Try it on this one</a:t>
-            </a:r>
-          </a:p>
-        </p:txBody>
-      </p:sp>
-      <p:sp>
-        <p:nvSpPr>
-          <p:cNvPr id="7" name="Rounded Rectangle 6"/>
+          <p:cNvPr id="10" name="Oval 9"/>
           <p:cNvSpPr/>
           <p:nvPr/>
         </p:nvSpPr>
         <p:spPr>
           <a:xfrm>
-            <a:off x="685800" y="1481328"/>
-            <a:ext cx="7772400" cy="603504"/>
-          </a:xfrm>
-          <a:prstGeom prst="roundRect">
-            <a:avLst>
-              <a:gd name="adj" fmla="val 13636"/>
-            </a:avLst>
+            <a:off x="941832" y="2368296"/>
+            <a:ext cx="402336" cy="402336"/>
+          </a:xfrm>
+          <a:prstGeom prst="ellipse">
+            <a:avLst/>
           </a:prstGeom>
           <a:solidFill>
-            <a:srgbClr val="FFFDF7"/>
+            <a:srgbClr val="B03E72"/>
           </a:solidFill>
           <a:ln>
             <a:noFill/>
@@ -5629,49 +5509,89 @@
       </p:sp>
       <p:sp>
         <p:nvSpPr>
-          <p:cNvPr id="8" name="TextBox 7"/>
-          <p:cNvSpPr txBox="1"/>
-          <p:nvPr/>
-        </p:nvSpPr>
-        <p:spPr>
-          <a:xfrm>
-            <a:off x="1051560" y="1645920"/>
-            <a:ext cx="7040880" cy="365760"/>
-          </a:xfrm>
-          <a:prstGeom prst="rect">
-            <a:avLst/>
-          </a:prstGeom>
-          <a:noFill/>
-          <a:effectLst/>
-        </p:spPr>
-        <p:txBody>
-          <a:bodyPr wrap="square" lIns="0" rIns="0" tIns="0" bIns="0" anchor="t">
-            <a:spAutoFit/>
-          </a:bodyPr>
-          <a:lstStyle/>
-          <a:p>
-            <a:pPr algn="l"/>
-            <a:r>
-              <a:rPr sz="1300" b="0">
-                <a:solidFill>
-                  <a:srgbClr val="33292E"/>
-                </a:solidFill>
-                <a:latin typeface="Libre Caslon Display"/>
-              </a:rPr>
-              <a:t>Somebody reads a mistake out of a classmate’s book to the table, and the table laughs.</a:t>
-            </a:r>
-          </a:p>
-        </p:txBody>
-      </p:sp>
-      <p:sp>
-        <p:nvSpPr>
-          <p:cNvPr id="9" name="Rounded Rectangle 8"/>
+          <p:cNvPr id="11" name="TextBox 10"/>
+          <p:cNvSpPr txBox="1"/>
+          <p:nvPr/>
+        </p:nvSpPr>
+        <p:spPr>
+          <a:xfrm>
+            <a:off x="941832" y="2468879"/>
+            <a:ext cx="402336" cy="402336"/>
+          </a:xfrm>
+          <a:prstGeom prst="rect">
+            <a:avLst/>
+          </a:prstGeom>
+          <a:noFill/>
+          <a:effectLst/>
+        </p:spPr>
+        <p:txBody>
+          <a:bodyPr wrap="square" lIns="0" rIns="0" tIns="0" bIns="0" anchor="t">
+            <a:spAutoFit/>
+          </a:bodyPr>
+          <a:lstStyle/>
+          <a:p>
+            <a:pPr algn="ctr"/>
+            <a:r>
+              <a:rPr sz="1400" b="0">
+                <a:solidFill>
+                  <a:srgbClr val="FFFDF7"/>
+                </a:solidFill>
+                <a:latin typeface="Georgia"/>
+              </a:rPr>
+              <a:t>1</a:t>
+            </a:r>
+          </a:p>
+        </p:txBody>
+      </p:sp>
+      <p:sp>
+        <p:nvSpPr>
+          <p:cNvPr id="12" name="TextBox 11"/>
+          <p:cNvSpPr txBox="1"/>
+          <p:nvPr/>
+        </p:nvSpPr>
+        <p:spPr>
+          <a:xfrm>
+            <a:off x="1572768" y="2340864"/>
+            <a:ext cx="6583680" cy="457199"/>
+          </a:xfrm>
+          <a:prstGeom prst="rect">
+            <a:avLst/>
+          </a:prstGeom>
+          <a:noFill/>
+          <a:effectLst/>
+        </p:spPr>
+        <p:txBody>
+          <a:bodyPr wrap="square" lIns="0" rIns="0" tIns="0" bIns="0" anchor="ctr">
+            <a:spAutoFit/>
+          </a:bodyPr>
+          <a:lstStyle/>
+          <a:p>
+            <a:pPr algn="l">
+              <a:lnSpc>
+                <a:spcPct val="110000"/>
+              </a:lnSpc>
+            </a:pPr>
+            <a:r>
+              <a:rPr sz="1400" b="0">
+                <a:solidFill>
+                  <a:srgbClr val="B03E72"/>
+                </a:solidFill>
+                <a:latin typeface="Georgia"/>
+              </a:rPr>
+              <a:t>Which of the four questions does it fail?</a:t>
+            </a:r>
+          </a:p>
+        </p:txBody>
+      </p:sp>
+      <p:sp>
+        <p:nvSpPr>
+          <p:cNvPr id="13" name="Rounded Rectangle 12"/>
           <p:cNvSpPr/>
           <p:nvPr/>
         </p:nvSpPr>
         <p:spPr>
           <a:xfrm>
-            <a:off x="685800" y="2249424"/>
+            <a:off x="685800" y="2962656"/>
             <a:ext cx="7772400" cy="640080"/>
           </a:xfrm>
           <a:prstGeom prst="roundRect">
@@ -5711,13 +5631,13 @@
       </p:sp>
       <p:sp>
         <p:nvSpPr>
-          <p:cNvPr id="10" name="Oval 9"/>
+          <p:cNvPr id="14" name="Oval 13"/>
           <p:cNvSpPr/>
           <p:nvPr/>
         </p:nvSpPr>
         <p:spPr>
           <a:xfrm>
-            <a:off x="941832" y="2368296"/>
+            <a:off x="941832" y="3081528"/>
             <a:ext cx="402336" cy="402336"/>
           </a:xfrm>
           <a:prstGeom prst="ellipse">
@@ -5755,13 +5675,13 @@
       </p:sp>
       <p:sp>
         <p:nvSpPr>
-          <p:cNvPr id="11" name="TextBox 10"/>
-          <p:cNvSpPr txBox="1"/>
-          <p:nvPr/>
-        </p:nvSpPr>
-        <p:spPr>
-          <a:xfrm>
-            <a:off x="941832" y="2468879"/>
+          <p:cNvPr id="15" name="TextBox 14"/>
+          <p:cNvSpPr txBox="1"/>
+          <p:nvPr/>
+        </p:nvSpPr>
+        <p:spPr>
+          <a:xfrm>
+            <a:off x="941832" y="3182112"/>
             <a:ext cx="402336" cy="402336"/>
           </a:xfrm>
           <a:prstGeom prst="rect">
@@ -5778,26 +5698,26 @@
           <a:p>
             <a:pPr algn="ctr"/>
             <a:r>
-              <a:rPr sz="1400" b="1">
+              <a:rPr sz="1400" b="0">
                 <a:solidFill>
                   <a:srgbClr val="FFFDF7"/>
                 </a:solidFill>
-                <a:latin typeface="Libre Caslon Display"/>
-              </a:rPr>
-              <a:t>1</a:t>
-            </a:r>
-          </a:p>
-        </p:txBody>
-      </p:sp>
-      <p:sp>
-        <p:nvSpPr>
-          <p:cNvPr id="12" name="TextBox 11"/>
-          <p:cNvSpPr txBox="1"/>
-          <p:nvPr/>
-        </p:nvSpPr>
-        <p:spPr>
-          <a:xfrm>
-            <a:off x="1572768" y="2340864"/>
+                <a:latin typeface="Georgia"/>
+              </a:rPr>
+              <a:t>2</a:t>
+            </a:r>
+          </a:p>
+        </p:txBody>
+      </p:sp>
+      <p:sp>
+        <p:nvSpPr>
+          <p:cNvPr id="16" name="TextBox 15"/>
+          <p:cNvSpPr txBox="1"/>
+          <p:nvPr/>
+        </p:nvSpPr>
+        <p:spPr>
+          <a:xfrm>
+            <a:off x="1572768" y="3054096"/>
             <a:ext cx="6583680" cy="457199"/>
           </a:xfrm>
           <a:prstGeom prst="rect">
@@ -5818,26 +5738,26 @@
               </a:lnSpc>
             </a:pPr>
             <a:r>
-              <a:rPr sz="1400" b="1">
+              <a:rPr sz="1400" b="0">
                 <a:solidFill>
                   <a:srgbClr val="B03E72"/>
                 </a:solidFill>
-                <a:latin typeface="Libre Caslon Display"/>
-              </a:rPr>
-              <a:t>Which of the four questions does it fail?</a:t>
-            </a:r>
-          </a:p>
-        </p:txBody>
-      </p:sp>
-      <p:sp>
-        <p:nvSpPr>
-          <p:cNvPr id="13" name="Rounded Rectangle 12"/>
+                <a:latin typeface="Georgia"/>
+              </a:rPr>
+              <a:t>What should the person who read it out say?</a:t>
+            </a:r>
+          </a:p>
+        </p:txBody>
+      </p:sp>
+      <p:sp>
+        <p:nvSpPr>
+          <p:cNvPr id="17" name="Rounded Rectangle 16"/>
           <p:cNvSpPr/>
           <p:nvPr/>
         </p:nvSpPr>
         <p:spPr>
           <a:xfrm>
-            <a:off x="685800" y="2962656"/>
+            <a:off x="685800" y="3675887"/>
             <a:ext cx="7772400" cy="640080"/>
           </a:xfrm>
           <a:prstGeom prst="roundRect">
@@ -5877,13 +5797,13 @@
       </p:sp>
       <p:sp>
         <p:nvSpPr>
-          <p:cNvPr id="14" name="Oval 13"/>
+          <p:cNvPr id="18" name="Oval 17"/>
           <p:cNvSpPr/>
           <p:nvPr/>
         </p:nvSpPr>
         <p:spPr>
           <a:xfrm>
-            <a:off x="941832" y="3081528"/>
+            <a:off x="941832" y="3794759"/>
             <a:ext cx="402336" cy="402336"/>
           </a:xfrm>
           <a:prstGeom prst="ellipse">
@@ -5921,13 +5841,13 @@
       </p:sp>
       <p:sp>
         <p:nvSpPr>
-          <p:cNvPr id="15" name="TextBox 14"/>
-          <p:cNvSpPr txBox="1"/>
-          <p:nvPr/>
-        </p:nvSpPr>
-        <p:spPr>
-          <a:xfrm>
-            <a:off x="941832" y="3182112"/>
+          <p:cNvPr id="19" name="TextBox 18"/>
+          <p:cNvSpPr txBox="1"/>
+          <p:nvPr/>
+        </p:nvSpPr>
+        <p:spPr>
+          <a:xfrm>
+            <a:off x="941832" y="3895344"/>
             <a:ext cx="402336" cy="402336"/>
           </a:xfrm>
           <a:prstGeom prst="rect">
@@ -5944,26 +5864,26 @@
           <a:p>
             <a:pPr algn="ctr"/>
             <a:r>
-              <a:rPr sz="1400" b="1">
+              <a:rPr sz="1400" b="0">
                 <a:solidFill>
                   <a:srgbClr val="FFFDF7"/>
                 </a:solidFill>
-                <a:latin typeface="Libre Caslon Display"/>
-              </a:rPr>
-              <a:t>2</a:t>
-            </a:r>
-          </a:p>
-        </p:txBody>
-      </p:sp>
-      <p:sp>
-        <p:nvSpPr>
-          <p:cNvPr id="16" name="TextBox 15"/>
-          <p:cNvSpPr txBox="1"/>
-          <p:nvPr/>
-        </p:nvSpPr>
-        <p:spPr>
-          <a:xfrm>
-            <a:off x="1572768" y="3054096"/>
+                <a:latin typeface="Georgia"/>
+              </a:rPr>
+              <a:t>3</a:t>
+            </a:r>
+          </a:p>
+        </p:txBody>
+      </p:sp>
+      <p:sp>
+        <p:nvSpPr>
+          <p:cNvPr id="20" name="TextBox 19"/>
+          <p:cNvSpPr txBox="1"/>
+          <p:nvPr/>
+        </p:nvSpPr>
+        <p:spPr>
+          <a:xfrm>
+            <a:off x="1572768" y="3767327"/>
             <a:ext cx="6583680" cy="457199"/>
           </a:xfrm>
           <a:prstGeom prst="rect">
@@ -5984,177 +5904,11 @@
               </a:lnSpc>
             </a:pPr>
             <a:r>
-              <a:rPr sz="1400" b="1">
+              <a:rPr sz="1400" b="0">
                 <a:solidFill>
                   <a:srgbClr val="B03E72"/>
                 </a:solidFill>
-                <a:latin typeface="Libre Caslon Display"/>
-              </a:rPr>
-              <a:t>What should the person who read it out say?</a:t>
-            </a:r>
-          </a:p>
-        </p:txBody>
-      </p:sp>
-      <p:sp>
-        <p:nvSpPr>
-          <p:cNvPr id="17" name="Rounded Rectangle 16"/>
-          <p:cNvSpPr/>
-          <p:nvPr/>
-        </p:nvSpPr>
-        <p:spPr>
-          <a:xfrm>
-            <a:off x="685800" y="3675887"/>
-            <a:ext cx="7772400" cy="640080"/>
-          </a:xfrm>
-          <a:prstGeom prst="roundRect">
-            <a:avLst>
-              <a:gd name="adj" fmla="val 12857"/>
-            </a:avLst>
-          </a:prstGeom>
-          <a:solidFill>
-            <a:srgbClr val="FBEDF3"/>
-          </a:solidFill>
-          <a:ln>
-            <a:noFill/>
-          </a:ln>
-          <a:effectLst/>
-        </p:spPr>
-        <p:style>
-          <a:lnRef idx="1">
-            <a:schemeClr val="accent1"/>
-          </a:lnRef>
-          <a:fillRef idx="3">
-            <a:schemeClr val="accent1"/>
-          </a:fillRef>
-          <a:effectRef idx="2">
-            <a:schemeClr val="accent1"/>
-          </a:effectRef>
-          <a:fontRef idx="minor">
-            <a:schemeClr val="lt1"/>
-          </a:fontRef>
-        </p:style>
-        <p:txBody>
-          <a:bodyPr rtlCol="0" anchor="ctr"/>
-          <a:lstStyle/>
-          <a:p>
-            <a:pPr algn="ctr"/>
-          </a:p>
-        </p:txBody>
-      </p:sp>
-      <p:sp>
-        <p:nvSpPr>
-          <p:cNvPr id="18" name="Oval 17"/>
-          <p:cNvSpPr/>
-          <p:nvPr/>
-        </p:nvSpPr>
-        <p:spPr>
-          <a:xfrm>
-            <a:off x="941832" y="3794759"/>
-            <a:ext cx="402336" cy="402336"/>
-          </a:xfrm>
-          <a:prstGeom prst="ellipse">
-            <a:avLst/>
-          </a:prstGeom>
-          <a:solidFill>
-            <a:srgbClr val="B03E72"/>
-          </a:solidFill>
-          <a:ln>
-            <a:noFill/>
-          </a:ln>
-          <a:effectLst/>
-        </p:spPr>
-        <p:style>
-          <a:lnRef idx="1">
-            <a:schemeClr val="accent1"/>
-          </a:lnRef>
-          <a:fillRef idx="3">
-            <a:schemeClr val="accent1"/>
-          </a:fillRef>
-          <a:effectRef idx="2">
-            <a:schemeClr val="accent1"/>
-          </a:effectRef>
-          <a:fontRef idx="minor">
-            <a:schemeClr val="lt1"/>
-          </a:fontRef>
-        </p:style>
-        <p:txBody>
-          <a:bodyPr rtlCol="0" anchor="ctr"/>
-          <a:lstStyle/>
-          <a:p>
-            <a:pPr algn="ctr"/>
-          </a:p>
-        </p:txBody>
-      </p:sp>
-      <p:sp>
-        <p:nvSpPr>
-          <p:cNvPr id="19" name="TextBox 18"/>
-          <p:cNvSpPr txBox="1"/>
-          <p:nvPr/>
-        </p:nvSpPr>
-        <p:spPr>
-          <a:xfrm>
-            <a:off x="941832" y="3895344"/>
-            <a:ext cx="402336" cy="402336"/>
-          </a:xfrm>
-          <a:prstGeom prst="rect">
-            <a:avLst/>
-          </a:prstGeom>
-          <a:noFill/>
-          <a:effectLst/>
-        </p:spPr>
-        <p:txBody>
-          <a:bodyPr wrap="square" lIns="0" rIns="0" tIns="0" bIns="0" anchor="t">
-            <a:spAutoFit/>
-          </a:bodyPr>
-          <a:lstStyle/>
-          <a:p>
-            <a:pPr algn="ctr"/>
-            <a:r>
-              <a:rPr sz="1400" b="1">
-                <a:solidFill>
-                  <a:srgbClr val="FFFDF7"/>
-                </a:solidFill>
-                <a:latin typeface="Libre Caslon Display"/>
-              </a:rPr>
-              <a:t>3</a:t>
-            </a:r>
-          </a:p>
-        </p:txBody>
-      </p:sp>
-      <p:sp>
-        <p:nvSpPr>
-          <p:cNvPr id="20" name="TextBox 19"/>
-          <p:cNvSpPr txBox="1"/>
-          <p:nvPr/>
-        </p:nvSpPr>
-        <p:spPr>
-          <a:xfrm>
-            <a:off x="1572768" y="3767327"/>
-            <a:ext cx="6583680" cy="457199"/>
-          </a:xfrm>
-          <a:prstGeom prst="rect">
-            <a:avLst/>
-          </a:prstGeom>
-          <a:noFill/>
-          <a:effectLst/>
-        </p:spPr>
-        <p:txBody>
-          <a:bodyPr wrap="square" lIns="0" rIns="0" tIns="0" bIns="0" anchor="ctr">
-            <a:spAutoFit/>
-          </a:bodyPr>
-          <a:lstStyle/>
-          <a:p>
-            <a:pPr algn="l">
-              <a:lnSpc>
-                <a:spcPct val="110000"/>
-              </a:lnSpc>
-            </a:pPr>
-            <a:r>
-              <a:rPr sz="1400" b="1">
-                <a:solidFill>
-                  <a:srgbClr val="B03E72"/>
-                </a:solidFill>
-                <a:latin typeface="Libre Caslon Display"/>
+                <a:latin typeface="Georgia"/>
               </a:rPr>
               <a:t>What could the person it was about say?</a:t>
             </a:r>
@@ -6194,7 +5948,7 @@
                 <a:solidFill>
                   <a:srgbClr val="B03E72"/>
                 </a:solidFill>
-                <a:latin typeface="Karla"/>
+                <a:latin typeface="Calibri"/>
               </a:rPr>
               <a:t>Say it out loud. Two or three go on the board.</a:t>
             </a:r>
@@ -6254,7 +6008,7 @@
                 <a:solidFill>
                   <a:srgbClr val="A79EA2"/>
                 </a:solidFill>
-                <a:latin typeface="Karla"/>
+                <a:latin typeface="Calibri"/>
               </a:rPr>
               <a:t>The Pastoral Guide</a:t>
             </a:r>
@@ -6290,7 +6044,7 @@
                 <a:solidFill>
                   <a:srgbClr val="A79EA2"/>
                 </a:solidFill>
-                <a:latin typeface="Karla"/>
+                <a:latin typeface="Calibri"/>
               </a:rPr>
               <a:t>12 / 18</a:t>
             </a:r>
@@ -6388,7 +6142,7 @@
                 <a:solidFill>
                   <a:srgbClr val="B1517B"/>
                 </a:solidFill>
-                <a:latin typeface="Karla"/>
+                <a:latin typeface="Calibri"/>
               </a:rPr>
               <a:t>TWELVE MINUTES, IN PAIRS</a:t>
             </a:r>
@@ -6397,18 +6151,54 @@
       </p:sp>
       <p:sp>
         <p:nvSpPr>
-          <p:cNvPr id="4" name="Rounded Rectangle 3"/>
+          <p:cNvPr id="6" name="TextBox 5"/>
+          <p:cNvSpPr txBox="1"/>
+          <p:nvPr/>
+        </p:nvSpPr>
+        <p:spPr>
+          <a:xfrm>
+            <a:off x="685800" y="841248"/>
+            <a:ext cx="6309360" cy="566928"/>
+          </a:xfrm>
+          <a:prstGeom prst="rect">
+            <a:avLst/>
+          </a:prstGeom>
+          <a:noFill/>
+          <a:effectLst/>
+        </p:spPr>
+        <p:txBody>
+          <a:bodyPr wrap="square" lIns="0" rIns="0" tIns="0" bIns="0" anchor="t">
+            <a:spAutoFit/>
+          </a:bodyPr>
+          <a:lstStyle/>
+          <a:p>
+            <a:pPr algn="l"/>
+            <a:r>
+              <a:rPr sz="3100" b="0">
+                <a:solidFill>
+                  <a:srgbClr val="33292E"/>
+                </a:solidFill>
+                <a:latin typeface="Georgia"/>
+              </a:rPr>
+              <a:t>What would you say?</a:t>
+            </a:r>
+          </a:p>
+        </p:txBody>
+      </p:sp>
+      <p:sp>
+        <p:nvSpPr>
+          <p:cNvPr id="7" name="Rounded Rectangle 6"/>
           <p:cNvSpPr/>
           <p:nvPr/>
         </p:nvSpPr>
         <p:spPr>
           <a:xfrm>
-            <a:off x="7498079" y="530352"/>
-            <a:ext cx="960119" cy="347472"/>
+            <a:off x="685800" y="1737360"/>
+            <a:ext cx="7772400" cy="640080"/>
           </a:xfrm>
           <a:prstGeom prst="roundRect">
             <a:avLst>
-              <a:gd name="adj" fmla="val 50000"/>
+              <a:gd name="adj" fmla="val 12857"/>
             </a:avLst>
           </a:prstGeom>
           <a:solidFill>
@@ -6443,85 +6233,133 @@
       </p:sp>
       <p:sp>
         <p:nvSpPr>
-          <p:cNvPr id="5" name="TextBox 4"/>
-          <p:cNvSpPr txBox="1"/>
-          <p:nvPr/>
-        </p:nvSpPr>
-        <p:spPr>
-          <a:xfrm>
-            <a:off x="7498079" y="594360"/>
-            <a:ext cx="960119" cy="237744"/>
-          </a:xfrm>
-          <a:prstGeom prst="rect">
-            <a:avLst/>
-          </a:prstGeom>
-          <a:noFill/>
-          <a:effectLst/>
-        </p:spPr>
-        <p:txBody>
-          <a:bodyPr wrap="square" lIns="0" rIns="0" tIns="0" bIns="0" anchor="t">
-            <a:spAutoFit/>
-          </a:bodyPr>
+          <p:cNvPr id="8" name="Oval 7"/>
+          <p:cNvSpPr/>
+          <p:nvPr/>
+        </p:nvSpPr>
+        <p:spPr>
+          <a:xfrm>
+            <a:off x="941832" y="1856231"/>
+            <a:ext cx="402336" cy="402336"/>
+          </a:xfrm>
+          <a:prstGeom prst="ellipse">
+            <a:avLst/>
+          </a:prstGeom>
+          <a:solidFill>
+            <a:srgbClr val="B03E72"/>
+          </a:solidFill>
+          <a:ln>
+            <a:noFill/>
+          </a:ln>
+          <a:effectLst/>
+        </p:spPr>
+        <p:style>
+          <a:lnRef idx="1">
+            <a:schemeClr val="accent1"/>
+          </a:lnRef>
+          <a:fillRef idx="3">
+            <a:schemeClr val="accent1"/>
+          </a:fillRef>
+          <a:effectRef idx="2">
+            <a:schemeClr val="accent1"/>
+          </a:effectRef>
+          <a:fontRef idx="minor">
+            <a:schemeClr val="lt1"/>
+          </a:fontRef>
+        </p:style>
+        <p:txBody>
+          <a:bodyPr rtlCol="0" anchor="ctr"/>
           <a:lstStyle/>
           <a:p>
             <a:pPr algn="ctr"/>
-            <a:r>
-              <a:rPr sz="1000" b="1" spc="100">
+          </a:p>
+        </p:txBody>
+      </p:sp>
+      <p:sp>
+        <p:nvSpPr>
+          <p:cNvPr id="9" name="TextBox 8"/>
+          <p:cNvSpPr txBox="1"/>
+          <p:nvPr/>
+        </p:nvSpPr>
+        <p:spPr>
+          <a:xfrm>
+            <a:off x="941832" y="1956815"/>
+            <a:ext cx="402336" cy="402336"/>
+          </a:xfrm>
+          <a:prstGeom prst="rect">
+            <a:avLst/>
+          </a:prstGeom>
+          <a:noFill/>
+          <a:effectLst/>
+        </p:spPr>
+        <p:txBody>
+          <a:bodyPr wrap="square" lIns="0" rIns="0" tIns="0" bIns="0" anchor="t">
+            <a:spAutoFit/>
+          </a:bodyPr>
+          <a:lstStyle/>
+          <a:p>
+            <a:pPr algn="ctr"/>
+            <a:r>
+              <a:rPr sz="1400" b="0">
+                <a:solidFill>
+                  <a:srgbClr val="FFFDF7"/>
+                </a:solidFill>
+                <a:latin typeface="Georgia"/>
+              </a:rPr>
+              <a:t>1</a:t>
+            </a:r>
+          </a:p>
+        </p:txBody>
+      </p:sp>
+      <p:sp>
+        <p:nvSpPr>
+          <p:cNvPr id="10" name="TextBox 9"/>
+          <p:cNvSpPr txBox="1"/>
+          <p:nvPr/>
+        </p:nvSpPr>
+        <p:spPr>
+          <a:xfrm>
+            <a:off x="1572768" y="1828800"/>
+            <a:ext cx="6583680" cy="457199"/>
+          </a:xfrm>
+          <a:prstGeom prst="rect">
+            <a:avLst/>
+          </a:prstGeom>
+          <a:noFill/>
+          <a:effectLst/>
+        </p:spPr>
+        <p:txBody>
+          <a:bodyPr wrap="square" lIns="0" rIns="0" tIns="0" bIns="0" anchor="ctr">
+            <a:spAutoFit/>
+          </a:bodyPr>
+          <a:lstStyle/>
+          <a:p>
+            <a:pPr algn="l">
+              <a:lnSpc>
+                <a:spcPct val="110000"/>
+              </a:lnSpc>
+            </a:pPr>
+            <a:r>
+              <a:rPr sz="1400" b="0">
                 <a:solidFill>
                   <a:srgbClr val="B03E72"/>
                 </a:solidFill>
-                <a:latin typeface="Karla"/>
-              </a:rPr>
-              <a:t>YOUR TURN</a:t>
-            </a:r>
-          </a:p>
-        </p:txBody>
-      </p:sp>
-      <p:sp>
-        <p:nvSpPr>
-          <p:cNvPr id="6" name="TextBox 5"/>
-          <p:cNvSpPr txBox="1"/>
-          <p:nvPr/>
-        </p:nvSpPr>
-        <p:spPr>
-          <a:xfrm>
-            <a:off x="685800" y="841248"/>
-            <a:ext cx="6309360" cy="566928"/>
-          </a:xfrm>
-          <a:prstGeom prst="rect">
-            <a:avLst/>
-          </a:prstGeom>
-          <a:noFill/>
-          <a:effectLst/>
-        </p:spPr>
-        <p:txBody>
-          <a:bodyPr wrap="square" lIns="0" rIns="0" tIns="0" bIns="0" anchor="t">
-            <a:spAutoFit/>
-          </a:bodyPr>
-          <a:lstStyle/>
-          <a:p>
-            <a:pPr algn="l"/>
-            <a:r>
-              <a:rPr sz="3100" b="1">
-                <a:solidFill>
-                  <a:srgbClr val="33292E"/>
-                </a:solidFill>
-                <a:latin typeface="Libre Caslon Display"/>
-              </a:rPr>
-              <a:t>What would you say?</a:t>
-            </a:r>
-          </a:p>
-        </p:txBody>
-      </p:sp>
-      <p:sp>
-        <p:nvSpPr>
-          <p:cNvPr id="7" name="Rounded Rectangle 6"/>
+                <a:latin typeface="Georgia"/>
+              </a:rPr>
+              <a:t>Take one moment card between two.</a:t>
+            </a:r>
+          </a:p>
+        </p:txBody>
+      </p:sp>
+      <p:sp>
+        <p:nvSpPr>
+          <p:cNvPr id="11" name="Rounded Rectangle 10"/>
           <p:cNvSpPr/>
           <p:nvPr/>
         </p:nvSpPr>
         <p:spPr>
           <a:xfrm>
-            <a:off x="685800" y="1737360"/>
+            <a:off x="685800" y="2487168"/>
             <a:ext cx="7772400" cy="640080"/>
           </a:xfrm>
           <a:prstGeom prst="roundRect">
@@ -6561,13 +6399,13 @@
       </p:sp>
       <p:sp>
         <p:nvSpPr>
-          <p:cNvPr id="8" name="Oval 7"/>
+          <p:cNvPr id="12" name="Oval 11"/>
           <p:cNvSpPr/>
           <p:nvPr/>
         </p:nvSpPr>
         <p:spPr>
           <a:xfrm>
-            <a:off x="941832" y="1856231"/>
+            <a:off x="941832" y="2606039"/>
             <a:ext cx="402336" cy="402336"/>
           </a:xfrm>
           <a:prstGeom prst="ellipse">
@@ -6605,13 +6443,13 @@
       </p:sp>
       <p:sp>
         <p:nvSpPr>
-          <p:cNvPr id="9" name="TextBox 8"/>
-          <p:cNvSpPr txBox="1"/>
-          <p:nvPr/>
-        </p:nvSpPr>
-        <p:spPr>
-          <a:xfrm>
-            <a:off x="941832" y="1956815"/>
+          <p:cNvPr id="13" name="TextBox 12"/>
+          <p:cNvSpPr txBox="1"/>
+          <p:nvPr/>
+        </p:nvSpPr>
+        <p:spPr>
+          <a:xfrm>
+            <a:off x="941832" y="2706623"/>
             <a:ext cx="402336" cy="402336"/>
           </a:xfrm>
           <a:prstGeom prst="rect">
@@ -6628,26 +6466,26 @@
           <a:p>
             <a:pPr algn="ctr"/>
             <a:r>
-              <a:rPr sz="1400" b="1">
+              <a:rPr sz="1400" b="0">
                 <a:solidFill>
                   <a:srgbClr val="FFFDF7"/>
                 </a:solidFill>
-                <a:latin typeface="Libre Caslon Display"/>
-              </a:rPr>
-              <a:t>1</a:t>
-            </a:r>
-          </a:p>
-        </p:txBody>
-      </p:sp>
-      <p:sp>
-        <p:nvSpPr>
-          <p:cNvPr id="10" name="TextBox 9"/>
-          <p:cNvSpPr txBox="1"/>
-          <p:nvPr/>
-        </p:nvSpPr>
-        <p:spPr>
-          <a:xfrm>
-            <a:off x="1572768" y="1828800"/>
+                <a:latin typeface="Georgia"/>
+              </a:rPr>
+              <a:t>2</a:t>
+            </a:r>
+          </a:p>
+        </p:txBody>
+      </p:sp>
+      <p:sp>
+        <p:nvSpPr>
+          <p:cNvPr id="14" name="TextBox 13"/>
+          <p:cNvSpPr txBox="1"/>
+          <p:nvPr/>
+        </p:nvSpPr>
+        <p:spPr>
+          <a:xfrm>
+            <a:off x="1572768" y="2578608"/>
             <a:ext cx="6583680" cy="457199"/>
           </a:xfrm>
           <a:prstGeom prst="rect">
@@ -6668,26 +6506,26 @@
               </a:lnSpc>
             </a:pPr>
             <a:r>
-              <a:rPr sz="1400" b="1">
+              <a:rPr sz="1400" b="0">
                 <a:solidFill>
                   <a:srgbClr val="B03E72"/>
                 </a:solidFill>
-                <a:latin typeface="Libre Caslon Display"/>
-              </a:rPr>
-              <a:t>Take one moment card between two.</a:t>
-            </a:r>
-          </a:p>
-        </p:txBody>
-      </p:sp>
-      <p:sp>
-        <p:nvSpPr>
-          <p:cNvPr id="11" name="Rounded Rectangle 10"/>
+                <a:latin typeface="Georgia"/>
+              </a:rPr>
+              <a:t>Write which question it fails, and the words for both people.</a:t>
+            </a:r>
+          </a:p>
+        </p:txBody>
+      </p:sp>
+      <p:sp>
+        <p:nvSpPr>
+          <p:cNvPr id="15" name="Rounded Rectangle 14"/>
           <p:cNvSpPr/>
           <p:nvPr/>
         </p:nvSpPr>
         <p:spPr>
           <a:xfrm>
-            <a:off x="685800" y="2487168"/>
+            <a:off x="685800" y="3236976"/>
             <a:ext cx="7772400" cy="640080"/>
           </a:xfrm>
           <a:prstGeom prst="roundRect">
@@ -6727,13 +6565,13 @@
       </p:sp>
       <p:sp>
         <p:nvSpPr>
-          <p:cNvPr id="12" name="Oval 11"/>
+          <p:cNvPr id="16" name="Oval 15"/>
           <p:cNvSpPr/>
           <p:nvPr/>
         </p:nvSpPr>
         <p:spPr>
           <a:xfrm>
-            <a:off x="941832" y="2606039"/>
+            <a:off x="941832" y="3355848"/>
             <a:ext cx="402336" cy="402336"/>
           </a:xfrm>
           <a:prstGeom prst="ellipse">
@@ -6771,13 +6609,13 @@
       </p:sp>
       <p:sp>
         <p:nvSpPr>
-          <p:cNvPr id="13" name="TextBox 12"/>
-          <p:cNvSpPr txBox="1"/>
-          <p:nvPr/>
-        </p:nvSpPr>
-        <p:spPr>
-          <a:xfrm>
-            <a:off x="941832" y="2706623"/>
+          <p:cNvPr id="17" name="TextBox 16"/>
+          <p:cNvSpPr txBox="1"/>
+          <p:nvPr/>
+        </p:nvSpPr>
+        <p:spPr>
+          <a:xfrm>
+            <a:off x="941832" y="3456432"/>
             <a:ext cx="402336" cy="402336"/>
           </a:xfrm>
           <a:prstGeom prst="rect">
@@ -6794,26 +6632,26 @@
           <a:p>
             <a:pPr algn="ctr"/>
             <a:r>
-              <a:rPr sz="1400" b="1">
+              <a:rPr sz="1400" b="0">
                 <a:solidFill>
                   <a:srgbClr val="FFFDF7"/>
                 </a:solidFill>
-                <a:latin typeface="Libre Caslon Display"/>
-              </a:rPr>
-              <a:t>2</a:t>
-            </a:r>
-          </a:p>
-        </p:txBody>
-      </p:sp>
-      <p:sp>
-        <p:nvSpPr>
-          <p:cNvPr id="14" name="TextBox 13"/>
-          <p:cNvSpPr txBox="1"/>
-          <p:nvPr/>
-        </p:nvSpPr>
-        <p:spPr>
-          <a:xfrm>
-            <a:off x="1572768" y="2578608"/>
+                <a:latin typeface="Georgia"/>
+              </a:rPr>
+              <a:t>3</a:t>
+            </a:r>
+          </a:p>
+        </p:txBody>
+      </p:sp>
+      <p:sp>
+        <p:nvSpPr>
+          <p:cNvPr id="18" name="TextBox 17"/>
+          <p:cNvSpPr txBox="1"/>
+          <p:nvPr/>
+        </p:nvSpPr>
+        <p:spPr>
+          <a:xfrm>
+            <a:off x="1572768" y="3328416"/>
             <a:ext cx="6583680" cy="457199"/>
           </a:xfrm>
           <a:prstGeom prst="rect">
@@ -6834,177 +6672,11 @@
               </a:lnSpc>
             </a:pPr>
             <a:r>
-              <a:rPr sz="1400" b="1">
+              <a:rPr sz="1400" b="0">
                 <a:solidFill>
                   <a:srgbClr val="B03E72"/>
                 </a:solidFill>
-                <a:latin typeface="Libre Caslon Display"/>
-              </a:rPr>
-              <a:t>Write which question it fails, and the words for both people.</a:t>
-            </a:r>
-          </a:p>
-        </p:txBody>
-      </p:sp>
-      <p:sp>
-        <p:nvSpPr>
-          <p:cNvPr id="15" name="Rounded Rectangle 14"/>
-          <p:cNvSpPr/>
-          <p:nvPr/>
-        </p:nvSpPr>
-        <p:spPr>
-          <a:xfrm>
-            <a:off x="685800" y="3236976"/>
-            <a:ext cx="7772400" cy="640080"/>
-          </a:xfrm>
-          <a:prstGeom prst="roundRect">
-            <a:avLst>
-              <a:gd name="adj" fmla="val 12857"/>
-            </a:avLst>
-          </a:prstGeom>
-          <a:solidFill>
-            <a:srgbClr val="FBEDF3"/>
-          </a:solidFill>
-          <a:ln>
-            <a:noFill/>
-          </a:ln>
-          <a:effectLst/>
-        </p:spPr>
-        <p:style>
-          <a:lnRef idx="1">
-            <a:schemeClr val="accent1"/>
-          </a:lnRef>
-          <a:fillRef idx="3">
-            <a:schemeClr val="accent1"/>
-          </a:fillRef>
-          <a:effectRef idx="2">
-            <a:schemeClr val="accent1"/>
-          </a:effectRef>
-          <a:fontRef idx="minor">
-            <a:schemeClr val="lt1"/>
-          </a:fontRef>
-        </p:style>
-        <p:txBody>
-          <a:bodyPr rtlCol="0" anchor="ctr"/>
-          <a:lstStyle/>
-          <a:p>
-            <a:pPr algn="ctr"/>
-          </a:p>
-        </p:txBody>
-      </p:sp>
-      <p:sp>
-        <p:nvSpPr>
-          <p:cNvPr id="16" name="Oval 15"/>
-          <p:cNvSpPr/>
-          <p:nvPr/>
-        </p:nvSpPr>
-        <p:spPr>
-          <a:xfrm>
-            <a:off x="941832" y="3355848"/>
-            <a:ext cx="402336" cy="402336"/>
-          </a:xfrm>
-          <a:prstGeom prst="ellipse">
-            <a:avLst/>
-          </a:prstGeom>
-          <a:solidFill>
-            <a:srgbClr val="B03E72"/>
-          </a:solidFill>
-          <a:ln>
-            <a:noFill/>
-          </a:ln>
-          <a:effectLst/>
-        </p:spPr>
-        <p:style>
-          <a:lnRef idx="1">
-            <a:schemeClr val="accent1"/>
-          </a:lnRef>
-          <a:fillRef idx="3">
-            <a:schemeClr val="accent1"/>
-          </a:fillRef>
-          <a:effectRef idx="2">
-            <a:schemeClr val="accent1"/>
-          </a:effectRef>
-          <a:fontRef idx="minor">
-            <a:schemeClr val="lt1"/>
-          </a:fontRef>
-        </p:style>
-        <p:txBody>
-          <a:bodyPr rtlCol="0" anchor="ctr"/>
-          <a:lstStyle/>
-          <a:p>
-            <a:pPr algn="ctr"/>
-          </a:p>
-        </p:txBody>
-      </p:sp>
-      <p:sp>
-        <p:nvSpPr>
-          <p:cNvPr id="17" name="TextBox 16"/>
-          <p:cNvSpPr txBox="1"/>
-          <p:nvPr/>
-        </p:nvSpPr>
-        <p:spPr>
-          <a:xfrm>
-            <a:off x="941832" y="3456432"/>
-            <a:ext cx="402336" cy="402336"/>
-          </a:xfrm>
-          <a:prstGeom prst="rect">
-            <a:avLst/>
-          </a:prstGeom>
-          <a:noFill/>
-          <a:effectLst/>
-        </p:spPr>
-        <p:txBody>
-          <a:bodyPr wrap="square" lIns="0" rIns="0" tIns="0" bIns="0" anchor="t">
-            <a:spAutoFit/>
-          </a:bodyPr>
-          <a:lstStyle/>
-          <a:p>
-            <a:pPr algn="ctr"/>
-            <a:r>
-              <a:rPr sz="1400" b="1">
-                <a:solidFill>
-                  <a:srgbClr val="FFFDF7"/>
-                </a:solidFill>
-                <a:latin typeface="Libre Caslon Display"/>
-              </a:rPr>
-              <a:t>3</a:t>
-            </a:r>
-          </a:p>
-        </p:txBody>
-      </p:sp>
-      <p:sp>
-        <p:nvSpPr>
-          <p:cNvPr id="18" name="TextBox 17"/>
-          <p:cNvSpPr txBox="1"/>
-          <p:nvPr/>
-        </p:nvSpPr>
-        <p:spPr>
-          <a:xfrm>
-            <a:off x="1572768" y="3328416"/>
-            <a:ext cx="6583680" cy="457199"/>
-          </a:xfrm>
-          <a:prstGeom prst="rect">
-            <a:avLst/>
-          </a:prstGeom>
-          <a:noFill/>
-          <a:effectLst/>
-        </p:spPr>
-        <p:txBody>
-          <a:bodyPr wrap="square" lIns="0" rIns="0" tIns="0" bIns="0" anchor="ctr">
-            <a:spAutoFit/>
-          </a:bodyPr>
-          <a:lstStyle/>
-          <a:p>
-            <a:pPr algn="l">
-              <a:lnSpc>
-                <a:spcPct val="110000"/>
-              </a:lnSpc>
-            </a:pPr>
-            <a:r>
-              <a:rPr sz="1400" b="1">
-                <a:solidFill>
-                  <a:srgbClr val="B03E72"/>
-                </a:solidFill>
-                <a:latin typeface="Libre Caslon Display"/>
+                <a:latin typeface="Georgia"/>
               </a:rPr>
               <a:t>Say them to each other. If you would not say it out loud, change it.</a:t>
             </a:r>
@@ -7044,7 +6716,7 @@
                 <a:solidFill>
                   <a:srgbClr val="B03E72"/>
                 </a:solidFill>
-                <a:latin typeface="Karla"/>
+                <a:latin typeface="Calibri"/>
               </a:rPr>
               <a:t>Real words, not the ones that sound good. Nobody is marking you on being nice.</a:t>
             </a:r>
@@ -7104,7 +6776,7 @@
                 <a:solidFill>
                   <a:srgbClr val="A79EA2"/>
                 </a:solidFill>
-                <a:latin typeface="Karla"/>
+                <a:latin typeface="Calibri"/>
               </a:rPr>
               <a:t>The Pastoral Guide</a:t>
             </a:r>
@@ -7140,7 +6812,7 @@
                 <a:solidFill>
                   <a:srgbClr val="A79EA2"/>
                 </a:solidFill>
-                <a:latin typeface="Karla"/>
+                <a:latin typeface="Calibri"/>
               </a:rPr>
               <a:t>13 / 18</a:t>
             </a:r>
@@ -7238,7 +6910,7 @@
                 <a:solidFill>
                   <a:srgbClr val="B1517B"/>
                 </a:solidFill>
-                <a:latin typeface="Karla"/>
+                <a:latin typeface="Calibri"/>
               </a:rPr>
               <a:t>SWAP</a:t>
             </a:r>
@@ -7247,18 +6919,54 @@
       </p:sp>
       <p:sp>
         <p:nvSpPr>
-          <p:cNvPr id="4" name="Rounded Rectangle 3"/>
+          <p:cNvPr id="6" name="TextBox 5"/>
+          <p:cNvSpPr txBox="1"/>
+          <p:nvPr/>
+        </p:nvSpPr>
+        <p:spPr>
+          <a:xfrm>
+            <a:off x="685800" y="841248"/>
+            <a:ext cx="6309360" cy="566928"/>
+          </a:xfrm>
+          <a:prstGeom prst="rect">
+            <a:avLst/>
+          </a:prstGeom>
+          <a:noFill/>
+          <a:effectLst/>
+        </p:spPr>
+        <p:txBody>
+          <a:bodyPr wrap="square" lIns="0" rIns="0" tIns="0" bIns="0" anchor="t">
+            <a:spAutoFit/>
+          </a:bodyPr>
+          <a:lstStyle/>
+          <a:p>
+            <a:pPr algn="l"/>
+            <a:r>
+              <a:rPr sz="3100" b="0">
+                <a:solidFill>
+                  <a:srgbClr val="33292E"/>
+                </a:solidFill>
+                <a:latin typeface="Georgia"/>
+              </a:rPr>
+              <a:t>Mark somebody else’s</a:t>
+            </a:r>
+          </a:p>
+        </p:txBody>
+      </p:sp>
+      <p:sp>
+        <p:nvSpPr>
+          <p:cNvPr id="7" name="Rounded Rectangle 6"/>
           <p:cNvSpPr/>
           <p:nvPr/>
         </p:nvSpPr>
         <p:spPr>
           <a:xfrm>
-            <a:off x="7543800" y="530352"/>
-            <a:ext cx="914400" cy="347472"/>
+            <a:off x="685800" y="1737360"/>
+            <a:ext cx="7772400" cy="640080"/>
           </a:xfrm>
           <a:prstGeom prst="roundRect">
             <a:avLst>
-              <a:gd name="adj" fmla="val 50000"/>
+              <a:gd name="adj" fmla="val 12857"/>
             </a:avLst>
           </a:prstGeom>
           <a:solidFill>
@@ -7293,85 +7001,133 @@
       </p:sp>
       <p:sp>
         <p:nvSpPr>
-          <p:cNvPr id="5" name="TextBox 4"/>
-          <p:cNvSpPr txBox="1"/>
-          <p:nvPr/>
-        </p:nvSpPr>
-        <p:spPr>
-          <a:xfrm>
-            <a:off x="7543800" y="594360"/>
-            <a:ext cx="914400" cy="237744"/>
-          </a:xfrm>
-          <a:prstGeom prst="rect">
-            <a:avLst/>
-          </a:prstGeom>
-          <a:noFill/>
-          <a:effectLst/>
-        </p:spPr>
-        <p:txBody>
-          <a:bodyPr wrap="square" lIns="0" rIns="0" tIns="0" bIns="0" anchor="t">
-            <a:spAutoFit/>
-          </a:bodyPr>
+          <p:cNvPr id="8" name="Oval 7"/>
+          <p:cNvSpPr/>
+          <p:nvPr/>
+        </p:nvSpPr>
+        <p:spPr>
+          <a:xfrm>
+            <a:off x="941832" y="1856231"/>
+            <a:ext cx="402336" cy="402336"/>
+          </a:xfrm>
+          <a:prstGeom prst="ellipse">
+            <a:avLst/>
+          </a:prstGeom>
+          <a:solidFill>
+            <a:srgbClr val="B03E72"/>
+          </a:solidFill>
+          <a:ln>
+            <a:noFill/>
+          </a:ln>
+          <a:effectLst/>
+        </p:spPr>
+        <p:style>
+          <a:lnRef idx="1">
+            <a:schemeClr val="accent1"/>
+          </a:lnRef>
+          <a:fillRef idx="3">
+            <a:schemeClr val="accent1"/>
+          </a:fillRef>
+          <a:effectRef idx="2">
+            <a:schemeClr val="accent1"/>
+          </a:effectRef>
+          <a:fontRef idx="minor">
+            <a:schemeClr val="lt1"/>
+          </a:fontRef>
+        </p:style>
+        <p:txBody>
+          <a:bodyPr rtlCol="0" anchor="ctr"/>
           <a:lstStyle/>
           <a:p>
             <a:pPr algn="ctr"/>
-            <a:r>
-              <a:rPr sz="1000" b="1" spc="100">
+          </a:p>
+        </p:txBody>
+      </p:sp>
+      <p:sp>
+        <p:nvSpPr>
+          <p:cNvPr id="9" name="TextBox 8"/>
+          <p:cNvSpPr txBox="1"/>
+          <p:nvPr/>
+        </p:nvSpPr>
+        <p:spPr>
+          <a:xfrm>
+            <a:off x="941832" y="1956815"/>
+            <a:ext cx="402336" cy="402336"/>
+          </a:xfrm>
+          <a:prstGeom prst="rect">
+            <a:avLst/>
+          </a:prstGeom>
+          <a:noFill/>
+          <a:effectLst/>
+        </p:spPr>
+        <p:txBody>
+          <a:bodyPr wrap="square" lIns="0" rIns="0" tIns="0" bIns="0" anchor="t">
+            <a:spAutoFit/>
+          </a:bodyPr>
+          <a:lstStyle/>
+          <a:p>
+            <a:pPr algn="ctr"/>
+            <a:r>
+              <a:rPr sz="1400" b="0">
+                <a:solidFill>
+                  <a:srgbClr val="FFFDF7"/>
+                </a:solidFill>
+                <a:latin typeface="Georgia"/>
+              </a:rPr>
+              <a:t>1</a:t>
+            </a:r>
+          </a:p>
+        </p:txBody>
+      </p:sp>
+      <p:sp>
+        <p:nvSpPr>
+          <p:cNvPr id="10" name="TextBox 9"/>
+          <p:cNvSpPr txBox="1"/>
+          <p:nvPr/>
+        </p:nvSpPr>
+        <p:spPr>
+          <a:xfrm>
+            <a:off x="1572768" y="1828800"/>
+            <a:ext cx="6583680" cy="457199"/>
+          </a:xfrm>
+          <a:prstGeom prst="rect">
+            <a:avLst/>
+          </a:prstGeom>
+          <a:noFill/>
+          <a:effectLst/>
+        </p:spPr>
+        <p:txBody>
+          <a:bodyPr wrap="square" lIns="0" rIns="0" tIns="0" bIns="0" anchor="ctr">
+            <a:spAutoFit/>
+          </a:bodyPr>
+          <a:lstStyle/>
+          <a:p>
+            <a:pPr algn="l">
+              <a:lnSpc>
+                <a:spcPct val="110000"/>
+              </a:lnSpc>
+            </a:pPr>
+            <a:r>
+              <a:rPr sz="1400" b="0">
                 <a:solidFill>
                   <a:srgbClr val="B03E72"/>
                 </a:solidFill>
-                <a:latin typeface="Karla"/>
-              </a:rPr>
-              <a:t>MARK</a:t>
-            </a:r>
-          </a:p>
-        </p:txBody>
-      </p:sp>
-      <p:sp>
-        <p:nvSpPr>
-          <p:cNvPr id="6" name="TextBox 5"/>
-          <p:cNvSpPr txBox="1"/>
-          <p:nvPr/>
-        </p:nvSpPr>
-        <p:spPr>
-          <a:xfrm>
-            <a:off x="685800" y="841248"/>
-            <a:ext cx="6309360" cy="566928"/>
-          </a:xfrm>
-          <a:prstGeom prst="rect">
-            <a:avLst/>
-          </a:prstGeom>
-          <a:noFill/>
-          <a:effectLst/>
-        </p:spPr>
-        <p:txBody>
-          <a:bodyPr wrap="square" lIns="0" rIns="0" tIns="0" bIns="0" anchor="t">
-            <a:spAutoFit/>
-          </a:bodyPr>
-          <a:lstStyle/>
-          <a:p>
-            <a:pPr algn="l"/>
-            <a:r>
-              <a:rPr sz="3100" b="1">
-                <a:solidFill>
-                  <a:srgbClr val="33292E"/>
-                </a:solidFill>
-                <a:latin typeface="Libre Caslon Display"/>
-              </a:rPr>
-              <a:t>Mark somebody else’s</a:t>
-            </a:r>
-          </a:p>
-        </p:txBody>
-      </p:sp>
-      <p:sp>
-        <p:nvSpPr>
-          <p:cNvPr id="7" name="Rounded Rectangle 6"/>
+                <a:latin typeface="Georgia"/>
+              </a:rPr>
+              <a:t>Could somebody actually say it out loud in this school?</a:t>
+            </a:r>
+          </a:p>
+        </p:txBody>
+      </p:sp>
+      <p:sp>
+        <p:nvSpPr>
+          <p:cNvPr id="11" name="Rounded Rectangle 10"/>
           <p:cNvSpPr/>
           <p:nvPr/>
         </p:nvSpPr>
         <p:spPr>
           <a:xfrm>
-            <a:off x="685800" y="1737360"/>
+            <a:off x="685800" y="2487168"/>
             <a:ext cx="7772400" cy="640080"/>
           </a:xfrm>
           <a:prstGeom prst="roundRect">
@@ -7411,13 +7167,13 @@
       </p:sp>
       <p:sp>
         <p:nvSpPr>
-          <p:cNvPr id="8" name="Oval 7"/>
+          <p:cNvPr id="12" name="Oval 11"/>
           <p:cNvSpPr/>
           <p:nvPr/>
         </p:nvSpPr>
         <p:spPr>
           <a:xfrm>
-            <a:off x="941832" y="1856231"/>
+            <a:off x="941832" y="2606039"/>
             <a:ext cx="402336" cy="402336"/>
           </a:xfrm>
           <a:prstGeom prst="ellipse">
@@ -7455,13 +7211,13 @@
       </p:sp>
       <p:sp>
         <p:nvSpPr>
-          <p:cNvPr id="9" name="TextBox 8"/>
-          <p:cNvSpPr txBox="1"/>
-          <p:nvPr/>
-        </p:nvSpPr>
-        <p:spPr>
-          <a:xfrm>
-            <a:off x="941832" y="1956815"/>
+          <p:cNvPr id="13" name="TextBox 12"/>
+          <p:cNvSpPr txBox="1"/>
+          <p:nvPr/>
+        </p:nvSpPr>
+        <p:spPr>
+          <a:xfrm>
+            <a:off x="941832" y="2706623"/>
             <a:ext cx="402336" cy="402336"/>
           </a:xfrm>
           <a:prstGeom prst="rect">
@@ -7478,26 +7234,26 @@
           <a:p>
             <a:pPr algn="ctr"/>
             <a:r>
-              <a:rPr sz="1400" b="1">
+              <a:rPr sz="1400" b="0">
                 <a:solidFill>
                   <a:srgbClr val="FFFDF7"/>
                 </a:solidFill>
-                <a:latin typeface="Libre Caslon Display"/>
-              </a:rPr>
-              <a:t>1</a:t>
-            </a:r>
-          </a:p>
-        </p:txBody>
-      </p:sp>
-      <p:sp>
-        <p:nvSpPr>
-          <p:cNvPr id="10" name="TextBox 9"/>
-          <p:cNvSpPr txBox="1"/>
-          <p:nvPr/>
-        </p:nvSpPr>
-        <p:spPr>
-          <a:xfrm>
-            <a:off x="1572768" y="1828800"/>
+                <a:latin typeface="Georgia"/>
+              </a:rPr>
+              <a:t>2</a:t>
+            </a:r>
+          </a:p>
+        </p:txBody>
+      </p:sp>
+      <p:sp>
+        <p:nvSpPr>
+          <p:cNvPr id="14" name="TextBox 13"/>
+          <p:cNvSpPr txBox="1"/>
+          <p:nvPr/>
+        </p:nvSpPr>
+        <p:spPr>
+          <a:xfrm>
+            <a:off x="1572768" y="2578608"/>
             <a:ext cx="6583680" cy="457199"/>
           </a:xfrm>
           <a:prstGeom prst="rect">
@@ -7518,26 +7274,26 @@
               </a:lnSpc>
             </a:pPr>
             <a:r>
-              <a:rPr sz="1400" b="1">
+              <a:rPr sz="1400" b="0">
                 <a:solidFill>
                   <a:srgbClr val="B03E72"/>
                 </a:solidFill>
-                <a:latin typeface="Libre Caslon Display"/>
-              </a:rPr>
-              <a:t>Could somebody actually say it out loud in this school?</a:t>
-            </a:r>
-          </a:p>
-        </p:txBody>
-      </p:sp>
-      <p:sp>
-        <p:nvSpPr>
-          <p:cNvPr id="11" name="Rounded Rectangle 10"/>
+                <a:latin typeface="Georgia"/>
+              </a:rPr>
+              <a:t>Does it avoid putting anybody on trial?</a:t>
+            </a:r>
+          </a:p>
+        </p:txBody>
+      </p:sp>
+      <p:sp>
+        <p:nvSpPr>
+          <p:cNvPr id="15" name="Rounded Rectangle 14"/>
           <p:cNvSpPr/>
           <p:nvPr/>
         </p:nvSpPr>
         <p:spPr>
           <a:xfrm>
-            <a:off x="685800" y="2487168"/>
+            <a:off x="685800" y="3236976"/>
             <a:ext cx="7772400" cy="640080"/>
           </a:xfrm>
           <a:prstGeom prst="roundRect">
@@ -7577,13 +7333,13 @@
       </p:sp>
       <p:sp>
         <p:nvSpPr>
-          <p:cNvPr id="12" name="Oval 11"/>
+          <p:cNvPr id="16" name="Oval 15"/>
           <p:cNvSpPr/>
           <p:nvPr/>
         </p:nvSpPr>
         <p:spPr>
           <a:xfrm>
-            <a:off x="941832" y="2606039"/>
+            <a:off x="941832" y="3355848"/>
             <a:ext cx="402336" cy="402336"/>
           </a:xfrm>
           <a:prstGeom prst="ellipse">
@@ -7621,13 +7377,13 @@
       </p:sp>
       <p:sp>
         <p:nvSpPr>
-          <p:cNvPr id="13" name="TextBox 12"/>
-          <p:cNvSpPr txBox="1"/>
-          <p:nvPr/>
-        </p:nvSpPr>
-        <p:spPr>
-          <a:xfrm>
-            <a:off x="941832" y="2706623"/>
+          <p:cNvPr id="17" name="TextBox 16"/>
+          <p:cNvSpPr txBox="1"/>
+          <p:nvPr/>
+        </p:nvSpPr>
+        <p:spPr>
+          <a:xfrm>
+            <a:off x="941832" y="3456432"/>
             <a:ext cx="402336" cy="402336"/>
           </a:xfrm>
           <a:prstGeom prst="rect">
@@ -7644,26 +7400,26 @@
           <a:p>
             <a:pPr algn="ctr"/>
             <a:r>
-              <a:rPr sz="1400" b="1">
+              <a:rPr sz="1400" b="0">
                 <a:solidFill>
                   <a:srgbClr val="FFFDF7"/>
                 </a:solidFill>
-                <a:latin typeface="Libre Caslon Display"/>
-              </a:rPr>
-              <a:t>2</a:t>
-            </a:r>
-          </a:p>
-        </p:txBody>
-      </p:sp>
-      <p:sp>
-        <p:nvSpPr>
-          <p:cNvPr id="14" name="TextBox 13"/>
-          <p:cNvSpPr txBox="1"/>
-          <p:nvPr/>
-        </p:nvSpPr>
-        <p:spPr>
-          <a:xfrm>
-            <a:off x="1572768" y="2578608"/>
+                <a:latin typeface="Georgia"/>
+              </a:rPr>
+              <a:t>3</a:t>
+            </a:r>
+          </a:p>
+        </p:txBody>
+      </p:sp>
+      <p:sp>
+        <p:nvSpPr>
+          <p:cNvPr id="18" name="TextBox 17"/>
+          <p:cNvSpPr txBox="1"/>
+          <p:nvPr/>
+        </p:nvSpPr>
+        <p:spPr>
+          <a:xfrm>
+            <a:off x="1572768" y="3328416"/>
             <a:ext cx="6583680" cy="457199"/>
           </a:xfrm>
           <a:prstGeom prst="rect">
@@ -7684,177 +7440,11 @@
               </a:lnSpc>
             </a:pPr>
             <a:r>
-              <a:rPr sz="1400" b="1">
+              <a:rPr sz="1400" b="0">
                 <a:solidFill>
                   <a:srgbClr val="B03E72"/>
                 </a:solidFill>
-                <a:latin typeface="Libre Caslon Display"/>
-              </a:rPr>
-              <a:t>Does it avoid putting anybody on trial?</a:t>
-            </a:r>
-          </a:p>
-        </p:txBody>
-      </p:sp>
-      <p:sp>
-        <p:nvSpPr>
-          <p:cNvPr id="15" name="Rounded Rectangle 14"/>
-          <p:cNvSpPr/>
-          <p:nvPr/>
-        </p:nvSpPr>
-        <p:spPr>
-          <a:xfrm>
-            <a:off x="685800" y="3236976"/>
-            <a:ext cx="7772400" cy="640080"/>
-          </a:xfrm>
-          <a:prstGeom prst="roundRect">
-            <a:avLst>
-              <a:gd name="adj" fmla="val 12857"/>
-            </a:avLst>
-          </a:prstGeom>
-          <a:solidFill>
-            <a:srgbClr val="FBEDF3"/>
-          </a:solidFill>
-          <a:ln>
-            <a:noFill/>
-          </a:ln>
-          <a:effectLst/>
-        </p:spPr>
-        <p:style>
-          <a:lnRef idx="1">
-            <a:schemeClr val="accent1"/>
-          </a:lnRef>
-          <a:fillRef idx="3">
-            <a:schemeClr val="accent1"/>
-          </a:fillRef>
-          <a:effectRef idx="2">
-            <a:schemeClr val="accent1"/>
-          </a:effectRef>
-          <a:fontRef idx="minor">
-            <a:schemeClr val="lt1"/>
-          </a:fontRef>
-        </p:style>
-        <p:txBody>
-          <a:bodyPr rtlCol="0" anchor="ctr"/>
-          <a:lstStyle/>
-          <a:p>
-            <a:pPr algn="ctr"/>
-          </a:p>
-        </p:txBody>
-      </p:sp>
-      <p:sp>
-        <p:nvSpPr>
-          <p:cNvPr id="16" name="Oval 15"/>
-          <p:cNvSpPr/>
-          <p:nvPr/>
-        </p:nvSpPr>
-        <p:spPr>
-          <a:xfrm>
-            <a:off x="941832" y="3355848"/>
-            <a:ext cx="402336" cy="402336"/>
-          </a:xfrm>
-          <a:prstGeom prst="ellipse">
-            <a:avLst/>
-          </a:prstGeom>
-          <a:solidFill>
-            <a:srgbClr val="B03E72"/>
-          </a:solidFill>
-          <a:ln>
-            <a:noFill/>
-          </a:ln>
-          <a:effectLst/>
-        </p:spPr>
-        <p:style>
-          <a:lnRef idx="1">
-            <a:schemeClr val="accent1"/>
-          </a:lnRef>
-          <a:fillRef idx="3">
-            <a:schemeClr val="accent1"/>
-          </a:fillRef>
-          <a:effectRef idx="2">
-            <a:schemeClr val="accent1"/>
-          </a:effectRef>
-          <a:fontRef idx="minor">
-            <a:schemeClr val="lt1"/>
-          </a:fontRef>
-        </p:style>
-        <p:txBody>
-          <a:bodyPr rtlCol="0" anchor="ctr"/>
-          <a:lstStyle/>
-          <a:p>
-            <a:pPr algn="ctr"/>
-          </a:p>
-        </p:txBody>
-      </p:sp>
-      <p:sp>
-        <p:nvSpPr>
-          <p:cNvPr id="17" name="TextBox 16"/>
-          <p:cNvSpPr txBox="1"/>
-          <p:nvPr/>
-        </p:nvSpPr>
-        <p:spPr>
-          <a:xfrm>
-            <a:off x="941832" y="3456432"/>
-            <a:ext cx="402336" cy="402336"/>
-          </a:xfrm>
-          <a:prstGeom prst="rect">
-            <a:avLst/>
-          </a:prstGeom>
-          <a:noFill/>
-          <a:effectLst/>
-        </p:spPr>
-        <p:txBody>
-          <a:bodyPr wrap="square" lIns="0" rIns="0" tIns="0" bIns="0" anchor="t">
-            <a:spAutoFit/>
-          </a:bodyPr>
-          <a:lstStyle/>
-          <a:p>
-            <a:pPr algn="ctr"/>
-            <a:r>
-              <a:rPr sz="1400" b="1">
-                <a:solidFill>
-                  <a:srgbClr val="FFFDF7"/>
-                </a:solidFill>
-                <a:latin typeface="Libre Caslon Display"/>
-              </a:rPr>
-              <a:t>3</a:t>
-            </a:r>
-          </a:p>
-        </p:txBody>
-      </p:sp>
-      <p:sp>
-        <p:nvSpPr>
-          <p:cNvPr id="18" name="TextBox 17"/>
-          <p:cNvSpPr txBox="1"/>
-          <p:nvPr/>
-        </p:nvSpPr>
-        <p:spPr>
-          <a:xfrm>
-            <a:off x="1572768" y="3328416"/>
-            <a:ext cx="6583680" cy="457199"/>
-          </a:xfrm>
-          <a:prstGeom prst="rect">
-            <a:avLst/>
-          </a:prstGeom>
-          <a:noFill/>
-          <a:effectLst/>
-        </p:spPr>
-        <p:txBody>
-          <a:bodyPr wrap="square" lIns="0" rIns="0" tIns="0" bIns="0" anchor="ctr">
-            <a:spAutoFit/>
-          </a:bodyPr>
-          <a:lstStyle/>
-          <a:p>
-            <a:pPr algn="l">
-              <a:lnSpc>
-                <a:spcPct val="110000"/>
-              </a:lnSpc>
-            </a:pPr>
-            <a:r>
-              <a:rPr sz="1400" b="1">
-                <a:solidFill>
-                  <a:srgbClr val="B03E72"/>
-                </a:solidFill>
-                <a:latin typeface="Libre Caslon Display"/>
+                <a:latin typeface="Georgia"/>
               </a:rPr>
               <a:t>Can both people move on from it?</a:t>
             </a:r>
@@ -7894,7 +7484,7 @@
                 <a:solidFill>
                   <a:srgbClr val="B03E72"/>
                 </a:solidFill>
-                <a:latin typeface="Karla"/>
+                <a:latin typeface="Calibri"/>
               </a:rPr>
               <a:t>Move your sheet two tables along. Tick what it passes, then write one change that would get it said.</a:t>
             </a:r>
@@ -7954,7 +7544,7 @@
                 <a:solidFill>
                   <a:srgbClr val="A79EA2"/>
                 </a:solidFill>
-                <a:latin typeface="Karla"/>
+                <a:latin typeface="Calibri"/>
               </a:rPr>
               <a:t>The Pastoral Guide</a:t>
             </a:r>
@@ -7990,7 +7580,7 @@
                 <a:solidFill>
                   <a:srgbClr val="A79EA2"/>
                 </a:solidFill>
-                <a:latin typeface="Karla"/>
+                <a:latin typeface="Calibri"/>
               </a:rPr>
               <a:t>14 / 18</a:t>
             </a:r>
@@ -8088,91 +7678,9 @@
                 <a:solidFill>
                   <a:srgbClr val="B1517B"/>
                 </a:solidFill>
-                <a:latin typeface="Karla"/>
+                <a:latin typeface="Calibri"/>
               </a:rPr>
               <a:t>NO RIGHT ANSWER</a:t>
-            </a:r>
-          </a:p>
-        </p:txBody>
-      </p:sp>
-      <p:sp>
-        <p:nvSpPr>
-          <p:cNvPr id="4" name="Rounded Rectangle 3"/>
-          <p:cNvSpPr/>
-          <p:nvPr/>
-        </p:nvSpPr>
-        <p:spPr>
-          <a:xfrm>
-            <a:off x="7543800" y="530352"/>
-            <a:ext cx="914400" cy="347472"/>
-          </a:xfrm>
-          <a:prstGeom prst="roundRect">
-            <a:avLst>
-              <a:gd name="adj" fmla="val 50000"/>
-            </a:avLst>
-          </a:prstGeom>
-          <a:solidFill>
-            <a:srgbClr val="FBEDF3"/>
-          </a:solidFill>
-          <a:ln>
-            <a:noFill/>
-          </a:ln>
-          <a:effectLst/>
-        </p:spPr>
-        <p:style>
-          <a:lnRef idx="1">
-            <a:schemeClr val="accent1"/>
-          </a:lnRef>
-          <a:fillRef idx="3">
-            <a:schemeClr val="accent1"/>
-          </a:fillRef>
-          <a:effectRef idx="2">
-            <a:schemeClr val="accent1"/>
-          </a:effectRef>
-          <a:fontRef idx="minor">
-            <a:schemeClr val="lt1"/>
-          </a:fontRef>
-        </p:style>
-        <p:txBody>
-          <a:bodyPr rtlCol="0" anchor="ctr"/>
-          <a:lstStyle/>
-          <a:p>
-            <a:pPr algn="ctr"/>
-          </a:p>
-        </p:txBody>
-      </p:sp>
-      <p:sp>
-        <p:nvSpPr>
-          <p:cNvPr id="5" name="TextBox 4"/>
-          <p:cNvSpPr txBox="1"/>
-          <p:nvPr/>
-        </p:nvSpPr>
-        <p:spPr>
-          <a:xfrm>
-            <a:off x="7543800" y="594360"/>
-            <a:ext cx="914400" cy="237744"/>
-          </a:xfrm>
-          <a:prstGeom prst="rect">
-            <a:avLst/>
-          </a:prstGeom>
-          <a:noFill/>
-          <a:effectLst/>
-        </p:spPr>
-        <p:txBody>
-          <a:bodyPr wrap="square" lIns="0" rIns="0" tIns="0" bIns="0" anchor="t">
-            <a:spAutoFit/>
-          </a:bodyPr>
-          <a:lstStyle/>
-          <a:p>
-            <a:pPr algn="ctr"/>
-            <a:r>
-              <a:rPr sz="1000" b="1" spc="100">
-                <a:solidFill>
-                  <a:srgbClr val="B03E72"/>
-                </a:solidFill>
-                <a:latin typeface="Karla"/>
-              </a:rPr>
-              <a:t>ARGUE</a:t>
             </a:r>
           </a:p>
         </p:txBody>
@@ -8202,11 +7710,11 @@
           <a:p>
             <a:pPr algn="l"/>
             <a:r>
-              <a:rPr sz="3100" b="1">
+              <a:rPr sz="3100" b="0">
                 <a:solidFill>
                   <a:srgbClr val="33292E"/>
                 </a:solidFill>
-                <a:latin typeface="Libre Caslon Display"/>
+                <a:latin typeface="Georgia"/>
               </a:rPr>
               <a:t>A joke, and still wrong?</a:t>
             </a:r>
@@ -8292,7 +7800,7 @@
                 <a:solidFill>
                   <a:srgbClr val="33292E"/>
                 </a:solidFill>
-                <a:latin typeface="Libre Caslon Display"/>
+                <a:latin typeface="Georgia"/>
               </a:rPr>
               <a:t>They meant it kindly.</a:t>
             </a:r>
@@ -8302,7 +7810,7 @@
                 <a:solidFill>
                   <a:srgbClr val="33292E"/>
                 </a:solidFill>
-                <a:latin typeface="Libre Caslon Display"/>
+                <a:latin typeface="Georgia"/>
               </a:rPr>
               <a:t>Everybody laughed, including the person it was about.</a:t>
             </a:r>
@@ -8312,7 +7820,7 @@
                 <a:solidFill>
                   <a:srgbClr val="33292E"/>
                 </a:solidFill>
-                <a:latin typeface="Libre Caslon Display"/>
+                <a:latin typeface="Georgia"/>
               </a:rPr>
               <a:t>They went home and it stayed with them all evening.</a:t>
             </a:r>
@@ -8352,7 +7860,7 @@
                 <a:solidFill>
                   <a:srgbClr val="6B6167"/>
                 </a:solidFill>
-                <a:latin typeface="Karla"/>
+                <a:latin typeface="Calibri"/>
               </a:rPr>
               <a:t>Was it a joke? Both answers can be argued. Four minutes, and see where your form lands.</a:t>
             </a:r>
@@ -8412,7 +7920,7 @@
                 <a:solidFill>
                   <a:srgbClr val="A79EA2"/>
                 </a:solidFill>
-                <a:latin typeface="Karla"/>
+                <a:latin typeface="Calibri"/>
               </a:rPr>
               <a:t>The Pastoral Guide</a:t>
             </a:r>
@@ -8448,7 +7956,7 @@
                 <a:solidFill>
                   <a:srgbClr val="A79EA2"/>
                 </a:solidFill>
-                <a:latin typeface="Karla"/>
+                <a:latin typeface="Calibri"/>
               </a:rPr>
               <a:t>15 / 18</a:t>
             </a:r>
@@ -8546,7 +8054,7 @@
                 <a:solidFill>
                   <a:srgbClr val="B1517B"/>
                 </a:solidFill>
-                <a:latin typeface="Karla"/>
+                <a:latin typeface="Calibri"/>
               </a:rPr>
               <a:t>LAST THREE MINUTES</a:t>
             </a:r>
@@ -8555,18 +8063,54 @@
       </p:sp>
       <p:sp>
         <p:nvSpPr>
-          <p:cNvPr id="4" name="Rounded Rectangle 3"/>
+          <p:cNvPr id="6" name="TextBox 5"/>
+          <p:cNvSpPr txBox="1"/>
+          <p:nvPr/>
+        </p:nvSpPr>
+        <p:spPr>
+          <a:xfrm>
+            <a:off x="685800" y="841248"/>
+            <a:ext cx="6309360" cy="566928"/>
+          </a:xfrm>
+          <a:prstGeom prst="rect">
+            <a:avLst/>
+          </a:prstGeom>
+          <a:noFill/>
+          <a:effectLst/>
+        </p:spPr>
+        <p:txBody>
+          <a:bodyPr wrap="square" lIns="0" rIns="0" tIns="0" bIns="0" anchor="t">
+            <a:spAutoFit/>
+          </a:bodyPr>
+          <a:lstStyle/>
+          <a:p>
+            <a:pPr algn="l"/>
+            <a:r>
+              <a:rPr sz="3100" b="0">
+                <a:solidFill>
+                  <a:srgbClr val="33292E"/>
+                </a:solidFill>
+                <a:latin typeface="Georgia"/>
+              </a:rPr>
+              <a:t>Two questions, for you</a:t>
+            </a:r>
+          </a:p>
+        </p:txBody>
+      </p:sp>
+      <p:sp>
+        <p:nvSpPr>
+          <p:cNvPr id="7" name="Rounded Rectangle 6"/>
           <p:cNvSpPr/>
           <p:nvPr/>
         </p:nvSpPr>
         <p:spPr>
           <a:xfrm>
-            <a:off x="7543800" y="530352"/>
-            <a:ext cx="914400" cy="347472"/>
+            <a:off x="685800" y="1874519"/>
+            <a:ext cx="7772400" cy="640080"/>
           </a:xfrm>
           <a:prstGeom prst="roundRect">
             <a:avLst>
-              <a:gd name="adj" fmla="val 50000"/>
+              <a:gd name="adj" fmla="val 12857"/>
             </a:avLst>
           </a:prstGeom>
           <a:solidFill>
@@ -8601,85 +8145,133 @@
       </p:sp>
       <p:sp>
         <p:nvSpPr>
-          <p:cNvPr id="5" name="TextBox 4"/>
-          <p:cNvSpPr txBox="1"/>
-          <p:nvPr/>
-        </p:nvSpPr>
-        <p:spPr>
-          <a:xfrm>
-            <a:off x="7543800" y="594360"/>
-            <a:ext cx="914400" cy="237744"/>
-          </a:xfrm>
-          <a:prstGeom prst="rect">
-            <a:avLst/>
-          </a:prstGeom>
-          <a:noFill/>
-          <a:effectLst/>
-        </p:spPr>
-        <p:txBody>
-          <a:bodyPr wrap="square" lIns="0" rIns="0" tIns="0" bIns="0" anchor="t">
-            <a:spAutoFit/>
-          </a:bodyPr>
+          <p:cNvPr id="8" name="Oval 7"/>
+          <p:cNvSpPr/>
+          <p:nvPr/>
+        </p:nvSpPr>
+        <p:spPr>
+          <a:xfrm>
+            <a:off x="941832" y="1993391"/>
+            <a:ext cx="402336" cy="402336"/>
+          </a:xfrm>
+          <a:prstGeom prst="ellipse">
+            <a:avLst/>
+          </a:prstGeom>
+          <a:solidFill>
+            <a:srgbClr val="B03E72"/>
+          </a:solidFill>
+          <a:ln>
+            <a:noFill/>
+          </a:ln>
+          <a:effectLst/>
+        </p:spPr>
+        <p:style>
+          <a:lnRef idx="1">
+            <a:schemeClr val="accent1"/>
+          </a:lnRef>
+          <a:fillRef idx="3">
+            <a:schemeClr val="accent1"/>
+          </a:fillRef>
+          <a:effectRef idx="2">
+            <a:schemeClr val="accent1"/>
+          </a:effectRef>
+          <a:fontRef idx="minor">
+            <a:schemeClr val="lt1"/>
+          </a:fontRef>
+        </p:style>
+        <p:txBody>
+          <a:bodyPr rtlCol="0" anchor="ctr"/>
           <a:lstStyle/>
           <a:p>
             <a:pPr algn="ctr"/>
-            <a:r>
-              <a:rPr sz="1000" b="1" spc="100">
+          </a:p>
+        </p:txBody>
+      </p:sp>
+      <p:sp>
+        <p:nvSpPr>
+          <p:cNvPr id="9" name="TextBox 8"/>
+          <p:cNvSpPr txBox="1"/>
+          <p:nvPr/>
+        </p:nvSpPr>
+        <p:spPr>
+          <a:xfrm>
+            <a:off x="941832" y="2093975"/>
+            <a:ext cx="402336" cy="402336"/>
+          </a:xfrm>
+          <a:prstGeom prst="rect">
+            <a:avLst/>
+          </a:prstGeom>
+          <a:noFill/>
+          <a:effectLst/>
+        </p:spPr>
+        <p:txBody>
+          <a:bodyPr wrap="square" lIns="0" rIns="0" tIns="0" bIns="0" anchor="t">
+            <a:spAutoFit/>
+          </a:bodyPr>
+          <a:lstStyle/>
+          <a:p>
+            <a:pPr algn="ctr"/>
+            <a:r>
+              <a:rPr sz="1400" b="0">
+                <a:solidFill>
+                  <a:srgbClr val="FFFDF7"/>
+                </a:solidFill>
+                <a:latin typeface="Georgia"/>
+              </a:rPr>
+              <a:t>1</a:t>
+            </a:r>
+          </a:p>
+        </p:txBody>
+      </p:sp>
+      <p:sp>
+        <p:nvSpPr>
+          <p:cNvPr id="10" name="TextBox 9"/>
+          <p:cNvSpPr txBox="1"/>
+          <p:nvPr/>
+        </p:nvSpPr>
+        <p:spPr>
+          <a:xfrm>
+            <a:off x="1572768" y="1965960"/>
+            <a:ext cx="6583680" cy="457199"/>
+          </a:xfrm>
+          <a:prstGeom prst="rect">
+            <a:avLst/>
+          </a:prstGeom>
+          <a:noFill/>
+          <a:effectLst/>
+        </p:spPr>
+        <p:txBody>
+          <a:bodyPr wrap="square" lIns="0" rIns="0" tIns="0" bIns="0" anchor="ctr">
+            <a:spAutoFit/>
+          </a:bodyPr>
+          <a:lstStyle/>
+          <a:p>
+            <a:pPr algn="l">
+              <a:lnSpc>
+                <a:spcPct val="110000"/>
+              </a:lnSpc>
+            </a:pPr>
+            <a:r>
+              <a:rPr sz="1400" b="0">
                 <a:solidFill>
                   <a:srgbClr val="B03E72"/>
                 </a:solidFill>
-                <a:latin typeface="Karla"/>
-              </a:rPr>
-              <a:t>WRITE</a:t>
-            </a:r>
-          </a:p>
-        </p:txBody>
-      </p:sp>
-      <p:sp>
-        <p:nvSpPr>
-          <p:cNvPr id="6" name="TextBox 5"/>
-          <p:cNvSpPr txBox="1"/>
-          <p:nvPr/>
-        </p:nvSpPr>
-        <p:spPr>
-          <a:xfrm>
-            <a:off x="685800" y="841248"/>
-            <a:ext cx="6309360" cy="566928"/>
-          </a:xfrm>
-          <a:prstGeom prst="rect">
-            <a:avLst/>
-          </a:prstGeom>
-          <a:noFill/>
-          <a:effectLst/>
-        </p:spPr>
-        <p:txBody>
-          <a:bodyPr wrap="square" lIns="0" rIns="0" tIns="0" bIns="0" anchor="t">
-            <a:spAutoFit/>
-          </a:bodyPr>
-          <a:lstStyle/>
-          <a:p>
-            <a:pPr algn="l"/>
-            <a:r>
-              <a:rPr sz="3100" b="1">
-                <a:solidFill>
-                  <a:srgbClr val="33292E"/>
-                </a:solidFill>
-                <a:latin typeface="Libre Caslon Display"/>
-              </a:rPr>
-              <a:t>Two questions, for you</a:t>
-            </a:r>
-          </a:p>
-        </p:txBody>
-      </p:sp>
-      <p:sp>
-        <p:nvSpPr>
-          <p:cNvPr id="7" name="Rounded Rectangle 6"/>
+                <a:latin typeface="Georgia"/>
+              </a:rPr>
+              <a:t>Which of the four questions do you forget most often?</a:t>
+            </a:r>
+          </a:p>
+        </p:txBody>
+      </p:sp>
+      <p:sp>
+        <p:nvSpPr>
+          <p:cNvPr id="11" name="Rounded Rectangle 10"/>
           <p:cNvSpPr/>
           <p:nvPr/>
         </p:nvSpPr>
         <p:spPr>
           <a:xfrm>
-            <a:off x="685800" y="1874519"/>
+            <a:off x="685800" y="2660903"/>
             <a:ext cx="7772400" cy="640080"/>
           </a:xfrm>
           <a:prstGeom prst="roundRect">
@@ -8719,13 +8311,13 @@
       </p:sp>
       <p:sp>
         <p:nvSpPr>
-          <p:cNvPr id="8" name="Oval 7"/>
+          <p:cNvPr id="12" name="Oval 11"/>
           <p:cNvSpPr/>
           <p:nvPr/>
         </p:nvSpPr>
         <p:spPr>
           <a:xfrm>
-            <a:off x="941832" y="1993391"/>
+            <a:off x="941832" y="2779775"/>
             <a:ext cx="402336" cy="402336"/>
           </a:xfrm>
           <a:prstGeom prst="ellipse">
@@ -8763,13 +8355,13 @@
       </p:sp>
       <p:sp>
         <p:nvSpPr>
-          <p:cNvPr id="9" name="TextBox 8"/>
-          <p:cNvSpPr txBox="1"/>
-          <p:nvPr/>
-        </p:nvSpPr>
-        <p:spPr>
-          <a:xfrm>
-            <a:off x="941832" y="2093975"/>
+          <p:cNvPr id="13" name="TextBox 12"/>
+          <p:cNvSpPr txBox="1"/>
+          <p:nvPr/>
+        </p:nvSpPr>
+        <p:spPr>
+          <a:xfrm>
+            <a:off x="941832" y="2880359"/>
             <a:ext cx="402336" cy="402336"/>
           </a:xfrm>
           <a:prstGeom prst="rect">
@@ -8786,26 +8378,26 @@
           <a:p>
             <a:pPr algn="ctr"/>
             <a:r>
-              <a:rPr sz="1400" b="1">
+              <a:rPr sz="1400" b="0">
                 <a:solidFill>
                   <a:srgbClr val="FFFDF7"/>
                 </a:solidFill>
-                <a:latin typeface="Libre Caslon Display"/>
-              </a:rPr>
-              <a:t>1</a:t>
-            </a:r>
-          </a:p>
-        </p:txBody>
-      </p:sp>
-      <p:sp>
-        <p:nvSpPr>
-          <p:cNvPr id="10" name="TextBox 9"/>
-          <p:cNvSpPr txBox="1"/>
-          <p:nvPr/>
-        </p:nvSpPr>
-        <p:spPr>
-          <a:xfrm>
-            <a:off x="1572768" y="1965960"/>
+                <a:latin typeface="Georgia"/>
+              </a:rPr>
+              <a:t>2</a:t>
+            </a:r>
+          </a:p>
+        </p:txBody>
+      </p:sp>
+      <p:sp>
+        <p:nvSpPr>
+          <p:cNvPr id="14" name="TextBox 13"/>
+          <p:cNvSpPr txBox="1"/>
+          <p:nvPr/>
+        </p:nvSpPr>
+        <p:spPr>
+          <a:xfrm>
+            <a:off x="1572768" y="2752344"/>
             <a:ext cx="6583680" cy="457199"/>
           </a:xfrm>
           <a:prstGeom prst="rect">
@@ -8826,177 +8418,11 @@
               </a:lnSpc>
             </a:pPr>
             <a:r>
-              <a:rPr sz="1400" b="1">
+              <a:rPr sz="1400" b="0">
                 <a:solidFill>
                   <a:srgbClr val="B03E72"/>
                 </a:solidFill>
-                <a:latin typeface="Libre Caslon Display"/>
-              </a:rPr>
-              <a:t>Which of the four questions do you forget most often?</a:t>
-            </a:r>
-          </a:p>
-        </p:txBody>
-      </p:sp>
-      <p:sp>
-        <p:nvSpPr>
-          <p:cNvPr id="11" name="Rounded Rectangle 10"/>
-          <p:cNvSpPr/>
-          <p:nvPr/>
-        </p:nvSpPr>
-        <p:spPr>
-          <a:xfrm>
-            <a:off x="685800" y="2660903"/>
-            <a:ext cx="7772400" cy="640080"/>
-          </a:xfrm>
-          <a:prstGeom prst="roundRect">
-            <a:avLst>
-              <a:gd name="adj" fmla="val 12857"/>
-            </a:avLst>
-          </a:prstGeom>
-          <a:solidFill>
-            <a:srgbClr val="FBEDF3"/>
-          </a:solidFill>
-          <a:ln>
-            <a:noFill/>
-          </a:ln>
-          <a:effectLst/>
-        </p:spPr>
-        <p:style>
-          <a:lnRef idx="1">
-            <a:schemeClr val="accent1"/>
-          </a:lnRef>
-          <a:fillRef idx="3">
-            <a:schemeClr val="accent1"/>
-          </a:fillRef>
-          <a:effectRef idx="2">
-            <a:schemeClr val="accent1"/>
-          </a:effectRef>
-          <a:fontRef idx="minor">
-            <a:schemeClr val="lt1"/>
-          </a:fontRef>
-        </p:style>
-        <p:txBody>
-          <a:bodyPr rtlCol="0" anchor="ctr"/>
-          <a:lstStyle/>
-          <a:p>
-            <a:pPr algn="ctr"/>
-          </a:p>
-        </p:txBody>
-      </p:sp>
-      <p:sp>
-        <p:nvSpPr>
-          <p:cNvPr id="12" name="Oval 11"/>
-          <p:cNvSpPr/>
-          <p:nvPr/>
-        </p:nvSpPr>
-        <p:spPr>
-          <a:xfrm>
-            <a:off x="941832" y="2779775"/>
-            <a:ext cx="402336" cy="402336"/>
-          </a:xfrm>
-          <a:prstGeom prst="ellipse">
-            <a:avLst/>
-          </a:prstGeom>
-          <a:solidFill>
-            <a:srgbClr val="B03E72"/>
-          </a:solidFill>
-          <a:ln>
-            <a:noFill/>
-          </a:ln>
-          <a:effectLst/>
-        </p:spPr>
-        <p:style>
-          <a:lnRef idx="1">
-            <a:schemeClr val="accent1"/>
-          </a:lnRef>
-          <a:fillRef idx="3">
-            <a:schemeClr val="accent1"/>
-          </a:fillRef>
-          <a:effectRef idx="2">
-            <a:schemeClr val="accent1"/>
-          </a:effectRef>
-          <a:fontRef idx="minor">
-            <a:schemeClr val="lt1"/>
-          </a:fontRef>
-        </p:style>
-        <p:txBody>
-          <a:bodyPr rtlCol="0" anchor="ctr"/>
-          <a:lstStyle/>
-          <a:p>
-            <a:pPr algn="ctr"/>
-          </a:p>
-        </p:txBody>
-      </p:sp>
-      <p:sp>
-        <p:nvSpPr>
-          <p:cNvPr id="13" name="TextBox 12"/>
-          <p:cNvSpPr txBox="1"/>
-          <p:nvPr/>
-        </p:nvSpPr>
-        <p:spPr>
-          <a:xfrm>
-            <a:off x="941832" y="2880359"/>
-            <a:ext cx="402336" cy="402336"/>
-          </a:xfrm>
-          <a:prstGeom prst="rect">
-            <a:avLst/>
-          </a:prstGeom>
-          <a:noFill/>
-          <a:effectLst/>
-        </p:spPr>
-        <p:txBody>
-          <a:bodyPr wrap="square" lIns="0" rIns="0" tIns="0" bIns="0" anchor="t">
-            <a:spAutoFit/>
-          </a:bodyPr>
-          <a:lstStyle/>
-          <a:p>
-            <a:pPr algn="ctr"/>
-            <a:r>
-              <a:rPr sz="1400" b="1">
-                <a:solidFill>
-                  <a:srgbClr val="FFFDF7"/>
-                </a:solidFill>
-                <a:latin typeface="Libre Caslon Display"/>
-              </a:rPr>
-              <a:t>2</a:t>
-            </a:r>
-          </a:p>
-        </p:txBody>
-      </p:sp>
-      <p:sp>
-        <p:nvSpPr>
-          <p:cNvPr id="14" name="TextBox 13"/>
-          <p:cNvSpPr txBox="1"/>
-          <p:nvPr/>
-        </p:nvSpPr>
-        <p:spPr>
-          <a:xfrm>
-            <a:off x="1572768" y="2752344"/>
-            <a:ext cx="6583680" cy="457199"/>
-          </a:xfrm>
-          <a:prstGeom prst="rect">
-            <a:avLst/>
-          </a:prstGeom>
-          <a:noFill/>
-          <a:effectLst/>
-        </p:spPr>
-        <p:txBody>
-          <a:bodyPr wrap="square" lIns="0" rIns="0" tIns="0" bIns="0" anchor="ctr">
-            <a:spAutoFit/>
-          </a:bodyPr>
-          <a:lstStyle/>
-          <a:p>
-            <a:pPr algn="l">
-              <a:lnSpc>
-                <a:spcPct val="110000"/>
-              </a:lnSpc>
-            </a:pPr>
-            <a:r>
-              <a:rPr sz="1400" b="1">
-                <a:solidFill>
-                  <a:srgbClr val="B03E72"/>
-                </a:solidFill>
-                <a:latin typeface="Libre Caslon Display"/>
+                <a:latin typeface="Georgia"/>
               </a:rPr>
               <a:t>What will you say this week instead of that sentence?</a:t>
             </a:r>
@@ -9036,7 +8462,7 @@
                 <a:solidFill>
                   <a:srgbClr val="B03E72"/>
                 </a:solidFill>
-                <a:latin typeface="Karla"/>
+                <a:latin typeface="Calibri"/>
               </a:rPr>
               <a:t>This is not collected and it is not read out. Fold it, keep it, or bin it on the way out.</a:t>
             </a:r>
@@ -9096,7 +8522,7 @@
                 <a:solidFill>
                   <a:srgbClr val="A79EA2"/>
                 </a:solidFill>
-                <a:latin typeface="Karla"/>
+                <a:latin typeface="Calibri"/>
               </a:rPr>
               <a:t>The Pastoral Guide</a:t>
             </a:r>
@@ -9132,7 +8558,7 @@
                 <a:solidFill>
                   <a:srgbClr val="A79EA2"/>
                 </a:solidFill>
-                <a:latin typeface="Karla"/>
+                <a:latin typeface="Calibri"/>
               </a:rPr>
               <a:t>16 / 18</a:t>
             </a:r>
@@ -9226,11 +8652,11 @@
           <a:p>
             <a:pPr algn="ctr"/>
             <a:r>
-              <a:rPr sz="3400" b="1">
+              <a:rPr sz="3400" b="0">
                 <a:solidFill>
                   <a:srgbClr val="B03E72"/>
                 </a:solidFill>
-                <a:latin typeface="Libre Caslon Display"/>
+                <a:latin typeface="Georgia"/>
               </a:rPr>
               <a:t>Everybody gets one wrong</a:t>
             </a:r>
@@ -9314,7 +8740,7 @@
                 <a:solidFill>
                   <a:srgbClr val="6B6167"/>
                 </a:solidFill>
-                <a:latin typeface="Karla"/>
+                <a:latin typeface="Calibri"/>
               </a:rPr>
               <a:t>What people remember is the sentence you said afterwards.</a:t>
             </a:r>
@@ -9374,7 +8800,7 @@
                 <a:solidFill>
                   <a:srgbClr val="A79EA2"/>
                 </a:solidFill>
-                <a:latin typeface="Karla"/>
+                <a:latin typeface="Calibri"/>
               </a:rPr>
               <a:t>The Pastoral Guide</a:t>
             </a:r>
@@ -9410,7 +8836,7 @@
                 <a:solidFill>
                   <a:srgbClr val="A79EA2"/>
                 </a:solidFill>
-                <a:latin typeface="Karla"/>
+                <a:latin typeface="Calibri"/>
               </a:rPr>
               <a:t>17 / 18</a:t>
             </a:r>
@@ -9508,91 +8934,9 @@
                 <a:solidFill>
                   <a:srgbClr val="B1517B"/>
                 </a:solidFill>
-                <a:latin typeface="Karla"/>
+                <a:latin typeface="Calibri"/>
               </a:rPr>
               <a:t>FOR THE TEACHER</a:t>
-            </a:r>
-          </a:p>
-        </p:txBody>
-      </p:sp>
-      <p:sp>
-        <p:nvSpPr>
-          <p:cNvPr id="4" name="Rounded Rectangle 3"/>
-          <p:cNvSpPr/>
-          <p:nvPr/>
-        </p:nvSpPr>
-        <p:spPr>
-          <a:xfrm>
-            <a:off x="7543800" y="530352"/>
-            <a:ext cx="914400" cy="347472"/>
-          </a:xfrm>
-          <a:prstGeom prst="roundRect">
-            <a:avLst>
-              <a:gd name="adj" fmla="val 50000"/>
-            </a:avLst>
-          </a:prstGeom>
-          <a:solidFill>
-            <a:srgbClr val="FBEDF3"/>
-          </a:solidFill>
-          <a:ln>
-            <a:noFill/>
-          </a:ln>
-          <a:effectLst/>
-        </p:spPr>
-        <p:style>
-          <a:lnRef idx="1">
-            <a:schemeClr val="accent1"/>
-          </a:lnRef>
-          <a:fillRef idx="3">
-            <a:schemeClr val="accent1"/>
-          </a:fillRef>
-          <a:effectRef idx="2">
-            <a:schemeClr val="accent1"/>
-          </a:effectRef>
-          <a:fontRef idx="minor">
-            <a:schemeClr val="lt1"/>
-          </a:fontRef>
-        </p:style>
-        <p:txBody>
-          <a:bodyPr rtlCol="0" anchor="ctr"/>
-          <a:lstStyle/>
-          <a:p>
-            <a:pPr algn="ctr"/>
-          </a:p>
-        </p:txBody>
-      </p:sp>
-      <p:sp>
-        <p:nvSpPr>
-          <p:cNvPr id="5" name="TextBox 4"/>
-          <p:cNvSpPr txBox="1"/>
-          <p:nvPr/>
-        </p:nvSpPr>
-        <p:spPr>
-          <a:xfrm>
-            <a:off x="7543800" y="594360"/>
-            <a:ext cx="914400" cy="237744"/>
-          </a:xfrm>
-          <a:prstGeom prst="rect">
-            <a:avLst/>
-          </a:prstGeom>
-          <a:noFill/>
-          <a:effectLst/>
-        </p:spPr>
-        <p:txBody>
-          <a:bodyPr wrap="square" lIns="0" rIns="0" tIns="0" bIns="0" anchor="t">
-            <a:spAutoFit/>
-          </a:bodyPr>
-          <a:lstStyle/>
-          <a:p>
-            <a:pPr algn="ctr"/>
-            <a:r>
-              <a:rPr sz="1000" b="1" spc="100">
-                <a:solidFill>
-                  <a:srgbClr val="B03E72"/>
-                </a:solidFill>
-                <a:latin typeface="Karla"/>
-              </a:rPr>
-              <a:t>SOURCES</a:t>
             </a:r>
           </a:p>
         </p:txBody>
@@ -9622,11 +8966,11 @@
           <a:p>
             <a:pPr algn="l"/>
             <a:r>
-              <a:rPr sz="3100" b="1">
+              <a:rPr sz="3100" b="0">
                 <a:solidFill>
                   <a:srgbClr val="33292E"/>
                 </a:solidFill>
-                <a:latin typeface="Libre Caslon Display"/>
+                <a:latin typeface="Georgia"/>
               </a:rPr>
               <a:t>Where these came from</a:t>
             </a:r>
@@ -9662,7 +9006,7 @@
                 <a:solidFill>
                   <a:srgbClr val="B03E72"/>
                 </a:solidFill>
-                <a:latin typeface="Karla"/>
+                <a:latin typeface="Calibri"/>
               </a:rPr>
               <a:t>Steer, O., Betts, L. R., Baguley, T. and Binder, J. F. (2020).</a:t>
             </a:r>
@@ -9702,7 +9046,7 @@
                 <a:solidFill>
                   <a:srgbClr val="6B6167"/>
                 </a:solidFill>
-                <a:latin typeface="Karla"/>
+                <a:latin typeface="Calibri"/>
               </a:rPr>
               <a:t>“I feel like everyone does it”: adolescents’ perceptions and awareness of the association between humour, banter, and cyberbullying. Computers in Human Behavior, 108, 106297.</a:t>
             </a:r>
@@ -9742,7 +9086,7 @@
                 <a:solidFill>
                   <a:srgbClr val="6B6167"/>
                 </a:solidFill>
-                <a:latin typeface="Karla"/>
+                <a:latin typeface="Calibri"/>
               </a:rPr>
               <a:t>Focus groups with 28 students aged eleven to fifteen at two secondary schools in the English Midlands. They described a line of acceptability that depends on friendship, trust and who is watching rather than on the words used, and they named much the same subjects as being over it.</a:t>
             </a:r>
@@ -9778,7 +9122,7 @@
                 <a:solidFill>
                   <a:srgbClr val="B03E72"/>
                 </a:solidFill>
-                <a:latin typeface="Karla"/>
+                <a:latin typeface="Calibri"/>
               </a:rPr>
               <a:t>Anti-Bullying Alliance and Nottingham Trent University (2023).</a:t>
             </a:r>
@@ -9818,7 +9162,7 @@
                 <a:solidFill>
                   <a:srgbClr val="6B6167"/>
                 </a:solidFill>
-                <a:latin typeface="Karla"/>
+                <a:latin typeface="Calibri"/>
               </a:rPr>
               <a:t>Banter or Bullying? Navigating the line of acceptability.</a:t>
             </a:r>
@@ -9858,7 +9202,7 @@
                 <a:solidFill>
                   <a:srgbClr val="6B6167"/>
                 </a:solidFill>
-                <a:latin typeface="Karla"/>
+                <a:latin typeface="Calibri"/>
               </a:rPr>
               <a:t>A toolkit for schools, built on a survey of 884 teachers. Nineteen per cent said they felt equipped to deal with banter, against thirty-seven per cent for bullying, and eighty-four per cent had had no training on it at all.</a:t>
             </a:r>
@@ -9918,7 +9262,7 @@
                 <a:solidFill>
                   <a:srgbClr val="A79EA2"/>
                 </a:solidFill>
-                <a:latin typeface="Karla"/>
+                <a:latin typeface="Calibri"/>
               </a:rPr>
               <a:t>The Pastoral Guide</a:t>
             </a:r>
@@ -9954,7 +9298,7 @@
                 <a:solidFill>
                   <a:srgbClr val="A79EA2"/>
                 </a:solidFill>
-                <a:latin typeface="Karla"/>
+                <a:latin typeface="Calibri"/>
               </a:rPr>
               <a:t>18 / 18</a:t>
             </a:r>
@@ -10052,7 +9396,7 @@
                 <a:solidFill>
                   <a:srgbClr val="B1517B"/>
                 </a:solidFill>
-                <a:latin typeface="Karla"/>
+                <a:latin typeface="Calibri"/>
               </a:rPr>
               <a:t>TODAY</a:t>
             </a:r>
@@ -10084,11 +9428,11 @@
           <a:p>
             <a:pPr algn="ctr"/>
             <a:r>
-              <a:rPr sz="3100" b="1">
+              <a:rPr sz="3100" b="0">
                 <a:solidFill>
                   <a:srgbClr val="33292E"/>
                 </a:solidFill>
-                <a:latin typeface="Libre Caslon Display"/>
+                <a:latin typeface="Georgia"/>
               </a:rPr>
               <a:t>Five things, in this order</a:t>
             </a:r>
@@ -10210,11 +9554,11 @@
           <a:p>
             <a:pPr algn="ctr"/>
             <a:r>
-              <a:rPr sz="1800" b="1">
+              <a:rPr sz="1800" b="0">
                 <a:solidFill>
                   <a:srgbClr val="FFFDF7"/>
                 </a:solidFill>
-                <a:latin typeface="Libre Caslon Display"/>
+                <a:latin typeface="Georgia"/>
               </a:rPr>
               <a:t>1</a:t>
             </a:r>
@@ -10250,11 +9594,11 @@
               </a:lnSpc>
             </a:pPr>
             <a:r>
-              <a:rPr sz="1500" b="1">
+              <a:rPr sz="1500" b="0">
                 <a:solidFill>
                   <a:srgbClr val="B03E72"/>
                 </a:solidFill>
-                <a:latin typeface="Libre Caslon Display"/>
+                <a:latin typeface="Georgia"/>
               </a:rPr>
               <a:t>Sort</a:t>
             </a:r>
@@ -10294,7 +9638,7 @@
                 <a:solidFill>
                   <a:srgbClr val="6B6167"/>
                 </a:solidFill>
-                <a:latin typeface="Karla"/>
+                <a:latin typeface="Calibri"/>
               </a:rPr>
               <a:t>Six moments, and whether each one is a joke.</a:t>
             </a:r>
@@ -10416,11 +9760,11 @@
           <a:p>
             <a:pPr algn="ctr"/>
             <a:r>
-              <a:rPr sz="1800" b="1">
+              <a:rPr sz="1800" b="0">
                 <a:solidFill>
                   <a:srgbClr val="FFFDF7"/>
                 </a:solidFill>
-                <a:latin typeface="Libre Caslon Display"/>
+                <a:latin typeface="Georgia"/>
               </a:rPr>
               <a:t>2</a:t>
             </a:r>
@@ -10456,11 +9800,11 @@
               </a:lnSpc>
             </a:pPr>
             <a:r>
-              <a:rPr sz="1500" b="1">
+              <a:rPr sz="1500" b="0">
                 <a:solidFill>
                   <a:srgbClr val="B03E72"/>
                 </a:solidFill>
-                <a:latin typeface="Libre Caslon Display"/>
+                <a:latin typeface="Georgia"/>
               </a:rPr>
               <a:t>Find</a:t>
             </a:r>
@@ -10500,7 +9844,7 @@
                 <a:solidFill>
                   <a:srgbClr val="6B6167"/>
                 </a:solidFill>
-                <a:latin typeface="Karla"/>
+                <a:latin typeface="Calibri"/>
               </a:rPr>
               <a:t>The four questions you were already using.</a:t>
             </a:r>
@@ -10622,11 +9966,11 @@
           <a:p>
             <a:pPr algn="ctr"/>
             <a:r>
-              <a:rPr sz="1800" b="1">
+              <a:rPr sz="1800" b="0">
                 <a:solidFill>
                   <a:srgbClr val="FFFDF7"/>
                 </a:solidFill>
-                <a:latin typeface="Libre Caslon Display"/>
+                <a:latin typeface="Georgia"/>
               </a:rPr>
               <a:t>3</a:t>
             </a:r>
@@ -10662,11 +10006,11 @@
               </a:lnSpc>
             </a:pPr>
             <a:r>
-              <a:rPr sz="1500" b="1">
+              <a:rPr sz="1500" b="0">
                 <a:solidFill>
                   <a:srgbClr val="B03E72"/>
                 </a:solidFill>
-                <a:latin typeface="Libre Caslon Display"/>
+                <a:latin typeface="Georgia"/>
               </a:rPr>
               <a:t>Learn</a:t>
             </a:r>
@@ -10706,7 +10050,7 @@
                 <a:solidFill>
                   <a:srgbClr val="6B6167"/>
                 </a:solidFill>
-                <a:latin typeface="Karla"/>
+                <a:latin typeface="Calibri"/>
               </a:rPr>
               <a:t>What “It was just a joke” is actually doing.</a:t>
             </a:r>
@@ -10828,11 +10172,11 @@
           <a:p>
             <a:pPr algn="ctr"/>
             <a:r>
-              <a:rPr sz="1800" b="1">
+              <a:rPr sz="1800" b="0">
                 <a:solidFill>
                   <a:srgbClr val="FFFDF7"/>
                 </a:solidFill>
-                <a:latin typeface="Libre Caslon Display"/>
+                <a:latin typeface="Georgia"/>
               </a:rPr>
               <a:t>4</a:t>
             </a:r>
@@ -10868,11 +10212,11 @@
               </a:lnSpc>
             </a:pPr>
             <a:r>
-              <a:rPr sz="1500" b="1">
+              <a:rPr sz="1500" b="0">
                 <a:solidFill>
                   <a:srgbClr val="B03E72"/>
                 </a:solidFill>
-                <a:latin typeface="Libre Caslon Display"/>
+                <a:latin typeface="Georgia"/>
               </a:rPr>
               <a:t>Practise</a:t>
             </a:r>
@@ -10912,7 +10256,7 @@
                 <a:solidFill>
                   <a:srgbClr val="6B6167"/>
                 </a:solidFill>
-                <a:latin typeface="Karla"/>
+                <a:latin typeface="Calibri"/>
               </a:rPr>
               <a:t>The words you would actually say instead.</a:t>
             </a:r>
@@ -11034,11 +10378,11 @@
           <a:p>
             <a:pPr algn="ctr"/>
             <a:r>
-              <a:rPr sz="1800" b="1">
+              <a:rPr sz="1800" b="0">
                 <a:solidFill>
                   <a:srgbClr val="FFFDF7"/>
                 </a:solidFill>
-                <a:latin typeface="Libre Caslon Display"/>
+                <a:latin typeface="Georgia"/>
               </a:rPr>
               <a:t>5</a:t>
             </a:r>
@@ -11074,11 +10418,11 @@
               </a:lnSpc>
             </a:pPr>
             <a:r>
-              <a:rPr sz="1500" b="1">
+              <a:rPr sz="1500" b="0">
                 <a:solidFill>
                   <a:srgbClr val="B03E72"/>
                 </a:solidFill>
-                <a:latin typeface="Libre Caslon Display"/>
+                <a:latin typeface="Georgia"/>
               </a:rPr>
               <a:t>Write</a:t>
             </a:r>
@@ -11118,7 +10462,7 @@
                 <a:solidFill>
                   <a:srgbClr val="6B6167"/>
                 </a:solidFill>
-                <a:latin typeface="Karla"/>
+                <a:latin typeface="Calibri"/>
               </a:rPr>
               <a:t>One thing you will say differently.</a:t>
             </a:r>
@@ -11158,7 +10502,7 @@
                 <a:solidFill>
                   <a:srgbClr val="B03E72"/>
                 </a:solidFill>
-                <a:latin typeface="Karla"/>
+                <a:latin typeface="Calibri"/>
               </a:rPr>
               <a:t>Nothing you write today gets read out or handed in.</a:t>
             </a:r>
@@ -11218,7 +10562,7 @@
                 <a:solidFill>
                   <a:srgbClr val="A79EA2"/>
                 </a:solidFill>
-                <a:latin typeface="Karla"/>
+                <a:latin typeface="Calibri"/>
               </a:rPr>
               <a:t>The Pastoral Guide</a:t>
             </a:r>
@@ -11254,7 +10598,7 @@
                 <a:solidFill>
                   <a:srgbClr val="A79EA2"/>
                 </a:solidFill>
-                <a:latin typeface="Karla"/>
+                <a:latin typeface="Calibri"/>
               </a:rPr>
               <a:t>2 / 18</a:t>
             </a:r>
@@ -11352,91 +10696,9 @@
                 <a:solidFill>
                   <a:srgbClr val="B1517B"/>
                 </a:solidFill>
-                <a:latin typeface="Karla"/>
+                <a:latin typeface="Calibri"/>
               </a:rPr>
               <a:t>SIX MOMENTS</a:t>
-            </a:r>
-          </a:p>
-        </p:txBody>
-      </p:sp>
-      <p:sp>
-        <p:nvSpPr>
-          <p:cNvPr id="4" name="Rounded Rectangle 3"/>
-          <p:cNvSpPr/>
-          <p:nvPr/>
-        </p:nvSpPr>
-        <p:spPr>
-          <a:xfrm>
-            <a:off x="7543800" y="530352"/>
-            <a:ext cx="914400" cy="347472"/>
-          </a:xfrm>
-          <a:prstGeom prst="roundRect">
-            <a:avLst>
-              <a:gd name="adj" fmla="val 50000"/>
-            </a:avLst>
-          </a:prstGeom>
-          <a:solidFill>
-            <a:srgbClr val="FBEDF3"/>
-          </a:solidFill>
-          <a:ln>
-            <a:noFill/>
-          </a:ln>
-          <a:effectLst/>
-        </p:spPr>
-        <p:style>
-          <a:lnRef idx="1">
-            <a:schemeClr val="accent1"/>
-          </a:lnRef>
-          <a:fillRef idx="3">
-            <a:schemeClr val="accent1"/>
-          </a:fillRef>
-          <a:effectRef idx="2">
-            <a:schemeClr val="accent1"/>
-          </a:effectRef>
-          <a:fontRef idx="minor">
-            <a:schemeClr val="lt1"/>
-          </a:fontRef>
-        </p:style>
-        <p:txBody>
-          <a:bodyPr rtlCol="0" anchor="ctr"/>
-          <a:lstStyle/>
-          <a:p>
-            <a:pPr algn="ctr"/>
-          </a:p>
-        </p:txBody>
-      </p:sp>
-      <p:sp>
-        <p:nvSpPr>
-          <p:cNvPr id="5" name="TextBox 4"/>
-          <p:cNvSpPr txBox="1"/>
-          <p:nvPr/>
-        </p:nvSpPr>
-        <p:spPr>
-          <a:xfrm>
-            <a:off x="7543800" y="594360"/>
-            <a:ext cx="914400" cy="237744"/>
-          </a:xfrm>
-          <a:prstGeom prst="rect">
-            <a:avLst/>
-          </a:prstGeom>
-          <a:noFill/>
-          <a:effectLst/>
-        </p:spPr>
-        <p:txBody>
-          <a:bodyPr wrap="square" lIns="0" rIns="0" tIns="0" bIns="0" anchor="t">
-            <a:spAutoFit/>
-          </a:bodyPr>
-          <a:lstStyle/>
-          <a:p>
-            <a:pPr algn="ctr"/>
-            <a:r>
-              <a:rPr sz="1000" b="1" spc="100">
-                <a:solidFill>
-                  <a:srgbClr val="B03E72"/>
-                </a:solidFill>
-                <a:latin typeface="Karla"/>
-              </a:rPr>
-              <a:t>STARTER</a:t>
             </a:r>
           </a:p>
         </p:txBody>
@@ -11466,11 +10728,11 @@
           <a:p>
             <a:pPr algn="l"/>
             <a:r>
-              <a:rPr sz="3100" b="1">
+              <a:rPr sz="3100" b="0">
                 <a:solidFill>
                   <a:srgbClr val="33292E"/>
                 </a:solidFill>
-                <a:latin typeface="Libre Caslon Display"/>
+                <a:latin typeface="Georgia"/>
               </a:rPr>
               <a:t>Is this a joke?</a:t>
             </a:r>
@@ -11548,11 +10810,11 @@
           <a:p>
             <a:pPr algn="l"/>
             <a:r>
-              <a:rPr sz="1300" b="1">
+              <a:rPr sz="1300" b="0">
                 <a:solidFill>
                   <a:srgbClr val="B03E72"/>
                 </a:solidFill>
-                <a:latin typeface="Libre Caslon Display"/>
+                <a:latin typeface="Georgia"/>
               </a:rPr>
               <a:t>A</a:t>
             </a:r>
@@ -11592,7 +10854,7 @@
                 <a:solidFill>
                   <a:srgbClr val="33292E"/>
                 </a:solidFill>
-                <a:latin typeface="Karla"/>
+                <a:latin typeface="Calibri"/>
               </a:rPr>
               <a:t>Somebody says your jumper looks like a bin bag. You say something back.</a:t>
             </a:r>
@@ -11624,11 +10886,11 @@
           <a:p>
             <a:pPr algn="l"/>
             <a:r>
-              <a:rPr sz="1300" b="1">
+              <a:rPr sz="1300" b="0">
                 <a:solidFill>
                   <a:srgbClr val="B03E72"/>
                 </a:solidFill>
-                <a:latin typeface="Libre Caslon Display"/>
+                <a:latin typeface="Georgia"/>
               </a:rPr>
               <a:t>B</a:t>
             </a:r>
@@ -11668,7 +10930,7 @@
                 <a:solidFill>
                   <a:srgbClr val="33292E"/>
                 </a:solidFill>
-                <a:latin typeface="Karla"/>
+                <a:latin typeface="Calibri"/>
               </a:rPr>
               <a:t>Somebody does an impression of the way you run, to a group, in the changing rooms.</a:t>
             </a:r>
@@ -11700,11 +10962,11 @@
           <a:p>
             <a:pPr algn="l"/>
             <a:r>
-              <a:rPr sz="1300" b="1">
+              <a:rPr sz="1300" b="0">
                 <a:solidFill>
                   <a:srgbClr val="B03E72"/>
                 </a:solidFill>
-                <a:latin typeface="Libre Caslon Display"/>
+                <a:latin typeface="Georgia"/>
               </a:rPr>
               <a:t>C</a:t>
             </a:r>
@@ -11744,7 +11006,7 @@
                 <a:solidFill>
                   <a:srgbClr val="33292E"/>
                 </a:solidFill>
-                <a:latin typeface="Karla"/>
+                <a:latin typeface="Calibri"/>
               </a:rPr>
               <a:t>A group uses a nickname that the person made up for themselves.</a:t>
             </a:r>
@@ -11776,11 +11038,11 @@
           <a:p>
             <a:pPr algn="l"/>
             <a:r>
-              <a:rPr sz="1300" b="1">
+              <a:rPr sz="1300" b="0">
                 <a:solidFill>
                   <a:srgbClr val="B03E72"/>
                 </a:solidFill>
-                <a:latin typeface="Libre Caslon Display"/>
+                <a:latin typeface="Georgia"/>
               </a:rPr>
               <a:t>D</a:t>
             </a:r>
@@ -11820,7 +11082,7 @@
                 <a:solidFill>
                   <a:srgbClr val="33292E"/>
                 </a:solidFill>
-                <a:latin typeface="Karla"/>
+                <a:latin typeface="Calibri"/>
               </a:rPr>
               <a:t>Somebody says your jumper looks like a bin bag every morning for a week.</a:t>
             </a:r>
@@ -11852,11 +11114,11 @@
           <a:p>
             <a:pPr algn="l"/>
             <a:r>
-              <a:rPr sz="1300" b="1">
+              <a:rPr sz="1300" b="0">
                 <a:solidFill>
                   <a:srgbClr val="B03E72"/>
                 </a:solidFill>
-                <a:latin typeface="Libre Caslon Display"/>
+                <a:latin typeface="Georgia"/>
               </a:rPr>
               <a:t>E</a:t>
             </a:r>
@@ -11896,7 +11158,7 @@
                 <a:solidFill>
                   <a:srgbClr val="33292E"/>
                 </a:solidFill>
-                <a:latin typeface="Karla"/>
+                <a:latin typeface="Calibri"/>
               </a:rPr>
               <a:t>A friend does an impression of the way you run, and you are both laughing.</a:t>
             </a:r>
@@ -11928,11 +11190,11 @@
           <a:p>
             <a:pPr algn="l"/>
             <a:r>
-              <a:rPr sz="1300" b="1">
+              <a:rPr sz="1300" b="0">
                 <a:solidFill>
                   <a:srgbClr val="B03E72"/>
                 </a:solidFill>
-                <a:latin typeface="Libre Caslon Display"/>
+                <a:latin typeface="Georgia"/>
               </a:rPr>
               <a:t>F</a:t>
             </a:r>
@@ -11972,7 +11234,7 @@
                 <a:solidFill>
                   <a:srgbClr val="33292E"/>
                 </a:solidFill>
-                <a:latin typeface="Karla"/>
+                <a:latin typeface="Calibri"/>
               </a:rPr>
               <a:t>A group uses a nickname that somebody else gave the person in Year 7.</a:t>
             </a:r>
@@ -12012,7 +11274,7 @@
                 <a:solidFill>
                   <a:srgbClr val="B03E72"/>
                 </a:solidFill>
-                <a:latin typeface="Karla"/>
+                <a:latin typeface="Calibri"/>
               </a:rPr>
               <a:t>In pairs, four minutes: put each letter under joke, not a joke, or cannot tell.</a:t>
             </a:r>
@@ -12072,7 +11334,7 @@
                 <a:solidFill>
                   <a:srgbClr val="A79EA2"/>
                 </a:solidFill>
-                <a:latin typeface="Karla"/>
+                <a:latin typeface="Calibri"/>
               </a:rPr>
               <a:t>The Pastoral Guide</a:t>
             </a:r>
@@ -12108,7 +11370,7 @@
                 <a:solidFill>
                   <a:srgbClr val="A79EA2"/>
                 </a:solidFill>
-                <a:latin typeface="Karla"/>
+                <a:latin typeface="Calibri"/>
               </a:rPr>
               <a:t>3 / 18</a:t>
             </a:r>
@@ -12206,91 +11468,9 @@
                 <a:solidFill>
                   <a:srgbClr val="B1517B"/>
                 </a:solidFill>
-                <a:latin typeface="Karla"/>
+                <a:latin typeface="Calibri"/>
               </a:rPr>
               <a:t>FEEDBACK</a:t>
-            </a:r>
-          </a:p>
-        </p:txBody>
-      </p:sp>
-      <p:sp>
-        <p:nvSpPr>
-          <p:cNvPr id="4" name="Rounded Rectangle 3"/>
-          <p:cNvSpPr/>
-          <p:nvPr/>
-        </p:nvSpPr>
-        <p:spPr>
-          <a:xfrm>
-            <a:off x="7543800" y="530352"/>
-            <a:ext cx="914400" cy="347472"/>
-          </a:xfrm>
-          <a:prstGeom prst="roundRect">
-            <a:avLst>
-              <a:gd name="adj" fmla="val 50000"/>
-            </a:avLst>
-          </a:prstGeom>
-          <a:solidFill>
-            <a:srgbClr val="FBEDF3"/>
-          </a:solidFill>
-          <a:ln>
-            <a:noFill/>
-          </a:ln>
-          <a:effectLst/>
-        </p:spPr>
-        <p:style>
-          <a:lnRef idx="1">
-            <a:schemeClr val="accent1"/>
-          </a:lnRef>
-          <a:fillRef idx="3">
-            <a:schemeClr val="accent1"/>
-          </a:fillRef>
-          <a:effectRef idx="2">
-            <a:schemeClr val="accent1"/>
-          </a:effectRef>
-          <a:fontRef idx="minor">
-            <a:schemeClr val="lt1"/>
-          </a:fontRef>
-        </p:style>
-        <p:txBody>
-          <a:bodyPr rtlCol="0" anchor="ctr"/>
-          <a:lstStyle/>
-          <a:p>
-            <a:pPr algn="ctr"/>
-          </a:p>
-        </p:txBody>
-      </p:sp>
-      <p:sp>
-        <p:nvSpPr>
-          <p:cNvPr id="5" name="TextBox 4"/>
-          <p:cNvSpPr txBox="1"/>
-          <p:nvPr/>
-        </p:nvSpPr>
-        <p:spPr>
-          <a:xfrm>
-            <a:off x="7543800" y="594360"/>
-            <a:ext cx="914400" cy="237744"/>
-          </a:xfrm>
-          <a:prstGeom prst="rect">
-            <a:avLst/>
-          </a:prstGeom>
-          <a:noFill/>
-          <a:effectLst/>
-        </p:spPr>
-        <p:txBody>
-          <a:bodyPr wrap="square" lIns="0" rIns="0" tIns="0" bIns="0" anchor="t">
-            <a:spAutoFit/>
-          </a:bodyPr>
-          <a:lstStyle/>
-          <a:p>
-            <a:pPr algn="ctr"/>
-            <a:r>
-              <a:rPr sz="1000" b="1" spc="100">
-                <a:solidFill>
-                  <a:srgbClr val="B03E72"/>
-                </a:solidFill>
-                <a:latin typeface="Karla"/>
-              </a:rPr>
-              <a:t>REVEAL</a:t>
             </a:r>
           </a:p>
         </p:txBody>
@@ -12320,11 +11500,11 @@
           <a:p>
             <a:pPr algn="l"/>
             <a:r>
-              <a:rPr sz="3100" b="1">
+              <a:rPr sz="3100" b="0">
                 <a:solidFill>
                   <a:srgbClr val="33292E"/>
                 </a:solidFill>
-                <a:latin typeface="Libre Caslon Display"/>
+                <a:latin typeface="Georgia"/>
               </a:rPr>
               <a:t>They were three pairs</a:t>
             </a:r>
@@ -12452,7 +11632,7 @@
                 <a:solidFill>
                   <a:srgbClr val="FFFDF7"/>
                 </a:solidFill>
-                <a:latin typeface="Karla"/>
+                <a:latin typeface="Calibri"/>
               </a:rPr>
               <a:t>A AND D</a:t>
             </a:r>
@@ -12484,11 +11664,11 @@
           <a:p>
             <a:pPr algn="ctr"/>
             <a:r>
-              <a:rPr sz="1500" b="1">
+              <a:rPr sz="1500" b="0">
                 <a:solidFill>
                   <a:srgbClr val="B03E72"/>
                 </a:solidFill>
-                <a:latin typeface="Libre Caslon Display"/>
+                <a:latin typeface="Georgia"/>
               </a:rPr>
               <a:t>Whether it stopped</a:t>
             </a:r>
@@ -12528,7 +11708,7 @@
                 <a:solidFill>
                   <a:srgbClr val="6B6167"/>
                 </a:solidFill>
-                <a:latin typeface="Karla"/>
+                <a:latin typeface="Calibri"/>
               </a:rPr>
               <a:t>In one, you both had a go and it ended there. The other one carried on all week.</a:t>
             </a:r>
@@ -12656,7 +11836,7 @@
                 <a:solidFill>
                   <a:srgbClr val="FFFDF7"/>
                 </a:solidFill>
-                <a:latin typeface="Karla"/>
+                <a:latin typeface="Calibri"/>
               </a:rPr>
               <a:t>B AND E</a:t>
             </a:r>
@@ -12688,11 +11868,11 @@
           <a:p>
             <a:pPr algn="ctr"/>
             <a:r>
-              <a:rPr sz="1500" b="1">
+              <a:rPr sz="1500" b="0">
                 <a:solidFill>
                   <a:srgbClr val="B03E72"/>
                 </a:solidFill>
-                <a:latin typeface="Libre Caslon Display"/>
+                <a:latin typeface="Georgia"/>
               </a:rPr>
               <a:t>Who was laughing</a:t>
             </a:r>
@@ -12732,7 +11912,7 @@
                 <a:solidFill>
                   <a:srgbClr val="6B6167"/>
                 </a:solidFill>
-                <a:latin typeface="Karla"/>
+                <a:latin typeface="Calibri"/>
               </a:rPr>
               <a:t>One of them has the person laughing too. The other has an audience, and they are not.</a:t>
             </a:r>
@@ -12860,7 +12040,7 @@
                 <a:solidFill>
                   <a:srgbClr val="FFFDF7"/>
                 </a:solidFill>
-                <a:latin typeface="Karla"/>
+                <a:latin typeface="Calibri"/>
               </a:rPr>
               <a:t>C AND F</a:t>
             </a:r>
@@ -12892,11 +12072,11 @@
           <a:p>
             <a:pPr algn="ctr"/>
             <a:r>
-              <a:rPr sz="1500" b="1">
+              <a:rPr sz="1500" b="0">
                 <a:solidFill>
                   <a:srgbClr val="B03E72"/>
                 </a:solidFill>
-                <a:latin typeface="Libre Caslon Display"/>
+                <a:latin typeface="Georgia"/>
               </a:rPr>
               <a:t>Whose it is</a:t>
             </a:r>
@@ -12936,7 +12116,7 @@
                 <a:solidFill>
                   <a:srgbClr val="6B6167"/>
                 </a:solidFill>
-                <a:latin typeface="Karla"/>
+                <a:latin typeface="Calibri"/>
               </a:rPr>
               <a:t>A nickname you made up for yourself is yours. One somebody else gave you is not.</a:t>
             </a:r>
@@ -12976,7 +12156,7 @@
                 <a:solidFill>
                   <a:srgbClr val="B03E72"/>
                 </a:solidFill>
-                <a:latin typeface="Karla"/>
+                <a:latin typeface="Calibri"/>
               </a:rPr>
               <a:t>The words hardly change inside a pair. What changes is everything around them.</a:t>
             </a:r>
@@ -13016,7 +12196,7 @@
                 <a:solidFill>
                   <a:srgbClr val="6B6167"/>
                 </a:solidFill>
-                <a:latin typeface="Karla"/>
+                <a:latin typeface="Calibri"/>
               </a:rPr>
               <a:t>The line is almost never in the words.</a:t>
             </a:r>
@@ -13076,7 +12256,7 @@
                 <a:solidFill>
                   <a:srgbClr val="A79EA2"/>
                 </a:solidFill>
-                <a:latin typeface="Karla"/>
+                <a:latin typeface="Calibri"/>
               </a:rPr>
               <a:t>The Pastoral Guide</a:t>
             </a:r>
@@ -13112,7 +12292,7 @@
                 <a:solidFill>
                   <a:srgbClr val="A79EA2"/>
                 </a:solidFill>
-                <a:latin typeface="Karla"/>
+                <a:latin typeface="Calibri"/>
               </a:rPr>
               <a:t>4 / 18</a:t>
             </a:r>
@@ -13210,7 +12390,7 @@
                 <a:solidFill>
                   <a:srgbClr val="B1517B"/>
                 </a:solidFill>
-                <a:latin typeface="Karla"/>
+                <a:latin typeface="Calibri"/>
               </a:rPr>
               <a:t>SO HERE IS THE TEST</a:t>
             </a:r>
@@ -13219,18 +12399,54 @@
       </p:sp>
       <p:sp>
         <p:nvSpPr>
-          <p:cNvPr id="4" name="Rounded Rectangle 3"/>
+          <p:cNvPr id="6" name="TextBox 5"/>
+          <p:cNvSpPr txBox="1"/>
+          <p:nvPr/>
+        </p:nvSpPr>
+        <p:spPr>
+          <a:xfrm>
+            <a:off x="685800" y="841248"/>
+            <a:ext cx="6309360" cy="566928"/>
+          </a:xfrm>
+          <a:prstGeom prst="rect">
+            <a:avLst/>
+          </a:prstGeom>
+          <a:noFill/>
+          <a:effectLst/>
+        </p:spPr>
+        <p:txBody>
+          <a:bodyPr wrap="square" lIns="0" rIns="0" tIns="0" bIns="0" anchor="t">
+            <a:spAutoFit/>
+          </a:bodyPr>
+          <a:lstStyle/>
+          <a:p>
+            <a:pPr algn="l"/>
+            <a:r>
+              <a:rPr sz="3100" b="0">
+                <a:solidFill>
+                  <a:srgbClr val="33292E"/>
+                </a:solidFill>
+                <a:latin typeface="Georgia"/>
+              </a:rPr>
+              <a:t>Four questions</a:t>
+            </a:r>
+          </a:p>
+        </p:txBody>
+      </p:sp>
+      <p:sp>
+        <p:nvSpPr>
+          <p:cNvPr id="7" name="Rounded Rectangle 6"/>
           <p:cNvSpPr/>
           <p:nvPr/>
         </p:nvSpPr>
         <p:spPr>
           <a:xfrm>
-            <a:off x="7543800" y="530352"/>
-            <a:ext cx="914400" cy="347472"/>
+            <a:off x="685800" y="1481328"/>
+            <a:ext cx="7772400" cy="566928"/>
           </a:xfrm>
           <a:prstGeom prst="roundRect">
             <a:avLst>
-              <a:gd name="adj" fmla="val 50000"/>
+              <a:gd name="adj" fmla="val 14516"/>
             </a:avLst>
           </a:prstGeom>
           <a:solidFill>
@@ -13265,85 +12481,133 @@
       </p:sp>
       <p:sp>
         <p:nvSpPr>
-          <p:cNvPr id="5" name="TextBox 4"/>
-          <p:cNvSpPr txBox="1"/>
-          <p:nvPr/>
-        </p:nvSpPr>
-        <p:spPr>
-          <a:xfrm>
-            <a:off x="7543800" y="594360"/>
-            <a:ext cx="914400" cy="237744"/>
-          </a:xfrm>
-          <a:prstGeom prst="rect">
-            <a:avLst/>
-          </a:prstGeom>
-          <a:noFill/>
-          <a:effectLst/>
-        </p:spPr>
-        <p:txBody>
-          <a:bodyPr wrap="square" lIns="0" rIns="0" tIns="0" bIns="0" anchor="t">
-            <a:spAutoFit/>
-          </a:bodyPr>
+          <p:cNvPr id="8" name="Oval 7"/>
+          <p:cNvSpPr/>
+          <p:nvPr/>
+        </p:nvSpPr>
+        <p:spPr>
+          <a:xfrm>
+            <a:off x="941832" y="1563624"/>
+            <a:ext cx="402336" cy="402336"/>
+          </a:xfrm>
+          <a:prstGeom prst="ellipse">
+            <a:avLst/>
+          </a:prstGeom>
+          <a:solidFill>
+            <a:srgbClr val="B03E72"/>
+          </a:solidFill>
+          <a:ln>
+            <a:noFill/>
+          </a:ln>
+          <a:effectLst/>
+        </p:spPr>
+        <p:style>
+          <a:lnRef idx="1">
+            <a:schemeClr val="accent1"/>
+          </a:lnRef>
+          <a:fillRef idx="3">
+            <a:schemeClr val="accent1"/>
+          </a:fillRef>
+          <a:effectRef idx="2">
+            <a:schemeClr val="accent1"/>
+          </a:effectRef>
+          <a:fontRef idx="minor">
+            <a:schemeClr val="lt1"/>
+          </a:fontRef>
+        </p:style>
+        <p:txBody>
+          <a:bodyPr rtlCol="0" anchor="ctr"/>
           <a:lstStyle/>
           <a:p>
             <a:pPr algn="ctr"/>
-            <a:r>
-              <a:rPr sz="1000" b="1" spc="100">
+          </a:p>
+        </p:txBody>
+      </p:sp>
+      <p:sp>
+        <p:nvSpPr>
+          <p:cNvPr id="9" name="TextBox 8"/>
+          <p:cNvSpPr txBox="1"/>
+          <p:nvPr/>
+        </p:nvSpPr>
+        <p:spPr>
+          <a:xfrm>
+            <a:off x="941832" y="1664208"/>
+            <a:ext cx="402336" cy="402336"/>
+          </a:xfrm>
+          <a:prstGeom prst="rect">
+            <a:avLst/>
+          </a:prstGeom>
+          <a:noFill/>
+          <a:effectLst/>
+        </p:spPr>
+        <p:txBody>
+          <a:bodyPr wrap="square" lIns="0" rIns="0" tIns="0" bIns="0" anchor="t">
+            <a:spAutoFit/>
+          </a:bodyPr>
+          <a:lstStyle/>
+          <a:p>
+            <a:pPr algn="ctr"/>
+            <a:r>
+              <a:rPr sz="1400" b="0">
+                <a:solidFill>
+                  <a:srgbClr val="FFFDF7"/>
+                </a:solidFill>
+                <a:latin typeface="Georgia"/>
+              </a:rPr>
+              <a:t>1</a:t>
+            </a:r>
+          </a:p>
+        </p:txBody>
+      </p:sp>
+      <p:sp>
+        <p:nvSpPr>
+          <p:cNvPr id="10" name="TextBox 9"/>
+          <p:cNvSpPr txBox="1"/>
+          <p:nvPr/>
+        </p:nvSpPr>
+        <p:spPr>
+          <a:xfrm>
+            <a:off x="1572768" y="1572768"/>
+            <a:ext cx="6583680" cy="384048"/>
+          </a:xfrm>
+          <a:prstGeom prst="rect">
+            <a:avLst/>
+          </a:prstGeom>
+          <a:noFill/>
+          <a:effectLst/>
+        </p:spPr>
+        <p:txBody>
+          <a:bodyPr wrap="square" lIns="0" rIns="0" tIns="0" bIns="0" anchor="ctr">
+            <a:spAutoFit/>
+          </a:bodyPr>
+          <a:lstStyle/>
+          <a:p>
+            <a:pPr algn="l">
+              <a:lnSpc>
+                <a:spcPct val="110000"/>
+              </a:lnSpc>
+            </a:pPr>
+            <a:r>
+              <a:rPr sz="1350" b="0">
                 <a:solidFill>
                   <a:srgbClr val="B03E72"/>
                 </a:solidFill>
-                <a:latin typeface="Karla"/>
-              </a:rPr>
-              <a:t>TEACH</a:t>
-            </a:r>
-          </a:p>
-        </p:txBody>
-      </p:sp>
-      <p:sp>
-        <p:nvSpPr>
-          <p:cNvPr id="6" name="TextBox 5"/>
-          <p:cNvSpPr txBox="1"/>
-          <p:nvPr/>
-        </p:nvSpPr>
-        <p:spPr>
-          <a:xfrm>
-            <a:off x="685800" y="841248"/>
-            <a:ext cx="6309360" cy="566928"/>
-          </a:xfrm>
-          <a:prstGeom prst="rect">
-            <a:avLst/>
-          </a:prstGeom>
-          <a:noFill/>
-          <a:effectLst/>
-        </p:spPr>
-        <p:txBody>
-          <a:bodyPr wrap="square" lIns="0" rIns="0" tIns="0" bIns="0" anchor="t">
-            <a:spAutoFit/>
-          </a:bodyPr>
-          <a:lstStyle/>
-          <a:p>
-            <a:pPr algn="l"/>
-            <a:r>
-              <a:rPr sz="3100" b="1">
-                <a:solidFill>
-                  <a:srgbClr val="33292E"/>
-                </a:solidFill>
-                <a:latin typeface="Libre Caslon Display"/>
-              </a:rPr>
-              <a:t>Four questions</a:t>
-            </a:r>
-          </a:p>
-        </p:txBody>
-      </p:sp>
-      <p:sp>
-        <p:nvSpPr>
-          <p:cNvPr id="7" name="Rounded Rectangle 6"/>
+                <a:latin typeface="Georgia"/>
+              </a:rPr>
+              <a:t>Is the person it is about laughing?</a:t>
+            </a:r>
+          </a:p>
+        </p:txBody>
+      </p:sp>
+      <p:sp>
+        <p:nvSpPr>
+          <p:cNvPr id="11" name="Rounded Rectangle 10"/>
           <p:cNvSpPr/>
           <p:nvPr/>
         </p:nvSpPr>
         <p:spPr>
           <a:xfrm>
-            <a:off x="685800" y="1481328"/>
+            <a:off x="685800" y="2139696"/>
             <a:ext cx="7772400" cy="566928"/>
           </a:xfrm>
           <a:prstGeom prst="roundRect">
@@ -13383,13 +12647,13 @@
       </p:sp>
       <p:sp>
         <p:nvSpPr>
-          <p:cNvPr id="8" name="Oval 7"/>
+          <p:cNvPr id="12" name="Oval 11"/>
           <p:cNvSpPr/>
           <p:nvPr/>
         </p:nvSpPr>
         <p:spPr>
           <a:xfrm>
-            <a:off x="941832" y="1563624"/>
+            <a:off x="941832" y="2221991"/>
             <a:ext cx="402336" cy="402336"/>
           </a:xfrm>
           <a:prstGeom prst="ellipse">
@@ -13427,13 +12691,13 @@
       </p:sp>
       <p:sp>
         <p:nvSpPr>
-          <p:cNvPr id="9" name="TextBox 8"/>
-          <p:cNvSpPr txBox="1"/>
-          <p:nvPr/>
-        </p:nvSpPr>
-        <p:spPr>
-          <a:xfrm>
-            <a:off x="941832" y="1664208"/>
+          <p:cNvPr id="13" name="TextBox 12"/>
+          <p:cNvSpPr txBox="1"/>
+          <p:nvPr/>
+        </p:nvSpPr>
+        <p:spPr>
+          <a:xfrm>
+            <a:off x="941832" y="2322575"/>
             <a:ext cx="402336" cy="402336"/>
           </a:xfrm>
           <a:prstGeom prst="rect">
@@ -13450,26 +12714,26 @@
           <a:p>
             <a:pPr algn="ctr"/>
             <a:r>
-              <a:rPr sz="1400" b="1">
+              <a:rPr sz="1400" b="0">
                 <a:solidFill>
                   <a:srgbClr val="FFFDF7"/>
                 </a:solidFill>
-                <a:latin typeface="Libre Caslon Display"/>
-              </a:rPr>
-              <a:t>1</a:t>
-            </a:r>
-          </a:p>
-        </p:txBody>
-      </p:sp>
-      <p:sp>
-        <p:nvSpPr>
-          <p:cNvPr id="10" name="TextBox 9"/>
-          <p:cNvSpPr txBox="1"/>
-          <p:nvPr/>
-        </p:nvSpPr>
-        <p:spPr>
-          <a:xfrm>
-            <a:off x="1572768" y="1572768"/>
+                <a:latin typeface="Georgia"/>
+              </a:rPr>
+              <a:t>2</a:t>
+            </a:r>
+          </a:p>
+        </p:txBody>
+      </p:sp>
+      <p:sp>
+        <p:nvSpPr>
+          <p:cNvPr id="14" name="TextBox 13"/>
+          <p:cNvSpPr txBox="1"/>
+          <p:nvPr/>
+        </p:nvSpPr>
+        <p:spPr>
+          <a:xfrm>
+            <a:off x="1572768" y="2231136"/>
             <a:ext cx="6583680" cy="384048"/>
           </a:xfrm>
           <a:prstGeom prst="rect">
@@ -13490,26 +12754,26 @@
               </a:lnSpc>
             </a:pPr>
             <a:r>
-              <a:rPr sz="1350" b="1">
+              <a:rPr sz="1350" b="0">
                 <a:solidFill>
                   <a:srgbClr val="B03E72"/>
                 </a:solidFill>
-                <a:latin typeface="Libre Caslon Display"/>
-              </a:rPr>
-              <a:t>Is the person it is about laughing?</a:t>
-            </a:r>
-          </a:p>
-        </p:txBody>
-      </p:sp>
-      <p:sp>
-        <p:nvSpPr>
-          <p:cNvPr id="11" name="Rounded Rectangle 10"/>
+                <a:latin typeface="Georgia"/>
+              </a:rPr>
+              <a:t>Would you say it to them with nobody else there?</a:t>
+            </a:r>
+          </a:p>
+        </p:txBody>
+      </p:sp>
+      <p:sp>
+        <p:nvSpPr>
+          <p:cNvPr id="15" name="Rounded Rectangle 14"/>
           <p:cNvSpPr/>
           <p:nvPr/>
         </p:nvSpPr>
         <p:spPr>
           <a:xfrm>
-            <a:off x="685800" y="2139696"/>
+            <a:off x="685800" y="2798064"/>
             <a:ext cx="7772400" cy="566928"/>
           </a:xfrm>
           <a:prstGeom prst="roundRect">
@@ -13549,13 +12813,13 @@
       </p:sp>
       <p:sp>
         <p:nvSpPr>
-          <p:cNvPr id="12" name="Oval 11"/>
+          <p:cNvPr id="16" name="Oval 15"/>
           <p:cNvSpPr/>
           <p:nvPr/>
         </p:nvSpPr>
         <p:spPr>
           <a:xfrm>
-            <a:off x="941832" y="2221991"/>
+            <a:off x="941832" y="2880360"/>
             <a:ext cx="402336" cy="402336"/>
           </a:xfrm>
           <a:prstGeom prst="ellipse">
@@ -13593,13 +12857,13 @@
       </p:sp>
       <p:sp>
         <p:nvSpPr>
-          <p:cNvPr id="13" name="TextBox 12"/>
-          <p:cNvSpPr txBox="1"/>
-          <p:nvPr/>
-        </p:nvSpPr>
-        <p:spPr>
-          <a:xfrm>
-            <a:off x="941832" y="2322575"/>
+          <p:cNvPr id="17" name="TextBox 16"/>
+          <p:cNvSpPr txBox="1"/>
+          <p:nvPr/>
+        </p:nvSpPr>
+        <p:spPr>
+          <a:xfrm>
+            <a:off x="941832" y="2980944"/>
             <a:ext cx="402336" cy="402336"/>
           </a:xfrm>
           <a:prstGeom prst="rect">
@@ -13616,26 +12880,26 @@
           <a:p>
             <a:pPr algn="ctr"/>
             <a:r>
-              <a:rPr sz="1400" b="1">
+              <a:rPr sz="1400" b="0">
                 <a:solidFill>
                   <a:srgbClr val="FFFDF7"/>
                 </a:solidFill>
-                <a:latin typeface="Libre Caslon Display"/>
-              </a:rPr>
-              <a:t>2</a:t>
-            </a:r>
-          </a:p>
-        </p:txBody>
-      </p:sp>
-      <p:sp>
-        <p:nvSpPr>
-          <p:cNvPr id="14" name="TextBox 13"/>
-          <p:cNvSpPr txBox="1"/>
-          <p:nvPr/>
-        </p:nvSpPr>
-        <p:spPr>
-          <a:xfrm>
-            <a:off x="1572768" y="2231136"/>
+                <a:latin typeface="Georgia"/>
+              </a:rPr>
+              <a:t>3</a:t>
+            </a:r>
+          </a:p>
+        </p:txBody>
+      </p:sp>
+      <p:sp>
+        <p:nvSpPr>
+          <p:cNvPr id="18" name="TextBox 17"/>
+          <p:cNvSpPr txBox="1"/>
+          <p:nvPr/>
+        </p:nvSpPr>
+        <p:spPr>
+          <a:xfrm>
+            <a:off x="1572768" y="2889504"/>
             <a:ext cx="6583680" cy="384048"/>
           </a:xfrm>
           <a:prstGeom prst="rect">
@@ -13656,26 +12920,26 @@
               </a:lnSpc>
             </a:pPr>
             <a:r>
-              <a:rPr sz="1350" b="1">
+              <a:rPr sz="1350" b="0">
                 <a:solidFill>
                   <a:srgbClr val="B03E72"/>
                 </a:solidFill>
-                <a:latin typeface="Libre Caslon Display"/>
-              </a:rPr>
-              <a:t>Would you say it to them with nobody else there?</a:t>
-            </a:r>
-          </a:p>
-        </p:txBody>
-      </p:sp>
-      <p:sp>
-        <p:nvSpPr>
-          <p:cNvPr id="15" name="Rounded Rectangle 14"/>
+                <a:latin typeface="Georgia"/>
+              </a:rPr>
+              <a:t>Could they say the same thing back to you?</a:t>
+            </a:r>
+          </a:p>
+        </p:txBody>
+      </p:sp>
+      <p:sp>
+        <p:nvSpPr>
+          <p:cNvPr id="19" name="Rounded Rectangle 18"/>
           <p:cNvSpPr/>
           <p:nvPr/>
         </p:nvSpPr>
         <p:spPr>
           <a:xfrm>
-            <a:off x="685800" y="2798064"/>
+            <a:off x="685800" y="3456432"/>
             <a:ext cx="7772400" cy="566928"/>
           </a:xfrm>
           <a:prstGeom prst="roundRect">
@@ -13715,13 +12979,13 @@
       </p:sp>
       <p:sp>
         <p:nvSpPr>
-          <p:cNvPr id="16" name="Oval 15"/>
+          <p:cNvPr id="20" name="Oval 19"/>
           <p:cNvSpPr/>
           <p:nvPr/>
         </p:nvSpPr>
         <p:spPr>
           <a:xfrm>
-            <a:off x="941832" y="2880360"/>
+            <a:off x="941832" y="3538728"/>
             <a:ext cx="402336" cy="402336"/>
           </a:xfrm>
           <a:prstGeom prst="ellipse">
@@ -13759,13 +13023,13 @@
       </p:sp>
       <p:sp>
         <p:nvSpPr>
-          <p:cNvPr id="17" name="TextBox 16"/>
-          <p:cNvSpPr txBox="1"/>
-          <p:nvPr/>
-        </p:nvSpPr>
-        <p:spPr>
-          <a:xfrm>
-            <a:off x="941832" y="2980944"/>
+          <p:cNvPr id="21" name="TextBox 20"/>
+          <p:cNvSpPr txBox="1"/>
+          <p:nvPr/>
+        </p:nvSpPr>
+        <p:spPr>
+          <a:xfrm>
+            <a:off x="941832" y="3639312"/>
             <a:ext cx="402336" cy="402336"/>
           </a:xfrm>
           <a:prstGeom prst="rect">
@@ -13782,26 +13046,26 @@
           <a:p>
             <a:pPr algn="ctr"/>
             <a:r>
-              <a:rPr sz="1400" b="1">
+              <a:rPr sz="1400" b="0">
                 <a:solidFill>
                   <a:srgbClr val="FFFDF7"/>
                 </a:solidFill>
-                <a:latin typeface="Libre Caslon Display"/>
-              </a:rPr>
-              <a:t>3</a:t>
-            </a:r>
-          </a:p>
-        </p:txBody>
-      </p:sp>
-      <p:sp>
-        <p:nvSpPr>
-          <p:cNvPr id="18" name="TextBox 17"/>
-          <p:cNvSpPr txBox="1"/>
-          <p:nvPr/>
-        </p:nvSpPr>
-        <p:spPr>
-          <a:xfrm>
-            <a:off x="1572768" y="2889504"/>
+                <a:latin typeface="Georgia"/>
+              </a:rPr>
+              <a:t>4</a:t>
+            </a:r>
+          </a:p>
+        </p:txBody>
+      </p:sp>
+      <p:sp>
+        <p:nvSpPr>
+          <p:cNvPr id="22" name="TextBox 21"/>
+          <p:cNvSpPr txBox="1"/>
+          <p:nvPr/>
+        </p:nvSpPr>
+        <p:spPr>
+          <a:xfrm>
+            <a:off x="1572768" y="3547872"/>
             <a:ext cx="6583680" cy="384048"/>
           </a:xfrm>
           <a:prstGeom prst="rect">
@@ -13822,177 +13086,11 @@
               </a:lnSpc>
             </a:pPr>
             <a:r>
-              <a:rPr sz="1350" b="1">
+              <a:rPr sz="1350" b="0">
                 <a:solidFill>
                   <a:srgbClr val="B03E72"/>
                 </a:solidFill>
-                <a:latin typeface="Libre Caslon Display"/>
-              </a:rPr>
-              <a:t>Could they say the same thing back to you?</a:t>
-            </a:r>
-          </a:p>
-        </p:txBody>
-      </p:sp>
-      <p:sp>
-        <p:nvSpPr>
-          <p:cNvPr id="19" name="Rounded Rectangle 18"/>
-          <p:cNvSpPr/>
-          <p:nvPr/>
-        </p:nvSpPr>
-        <p:spPr>
-          <a:xfrm>
-            <a:off x="685800" y="3456432"/>
-            <a:ext cx="7772400" cy="566928"/>
-          </a:xfrm>
-          <a:prstGeom prst="roundRect">
-            <a:avLst>
-              <a:gd name="adj" fmla="val 14516"/>
-            </a:avLst>
-          </a:prstGeom>
-          <a:solidFill>
-            <a:srgbClr val="FBEDF3"/>
-          </a:solidFill>
-          <a:ln>
-            <a:noFill/>
-          </a:ln>
-          <a:effectLst/>
-        </p:spPr>
-        <p:style>
-          <a:lnRef idx="1">
-            <a:schemeClr val="accent1"/>
-          </a:lnRef>
-          <a:fillRef idx="3">
-            <a:schemeClr val="accent1"/>
-          </a:fillRef>
-          <a:effectRef idx="2">
-            <a:schemeClr val="accent1"/>
-          </a:effectRef>
-          <a:fontRef idx="minor">
-            <a:schemeClr val="lt1"/>
-          </a:fontRef>
-        </p:style>
-        <p:txBody>
-          <a:bodyPr rtlCol="0" anchor="ctr"/>
-          <a:lstStyle/>
-          <a:p>
-            <a:pPr algn="ctr"/>
-          </a:p>
-        </p:txBody>
-      </p:sp>
-      <p:sp>
-        <p:nvSpPr>
-          <p:cNvPr id="20" name="Oval 19"/>
-          <p:cNvSpPr/>
-          <p:nvPr/>
-        </p:nvSpPr>
-        <p:spPr>
-          <a:xfrm>
-            <a:off x="941832" y="3538728"/>
-            <a:ext cx="402336" cy="402336"/>
-          </a:xfrm>
-          <a:prstGeom prst="ellipse">
-            <a:avLst/>
-          </a:prstGeom>
-          <a:solidFill>
-            <a:srgbClr val="B03E72"/>
-          </a:solidFill>
-          <a:ln>
-            <a:noFill/>
-          </a:ln>
-          <a:effectLst/>
-        </p:spPr>
-        <p:style>
-          <a:lnRef idx="1">
-            <a:schemeClr val="accent1"/>
-          </a:lnRef>
-          <a:fillRef idx="3">
-            <a:schemeClr val="accent1"/>
-          </a:fillRef>
-          <a:effectRef idx="2">
-            <a:schemeClr val="accent1"/>
-          </a:effectRef>
-          <a:fontRef idx="minor">
-            <a:schemeClr val="lt1"/>
-          </a:fontRef>
-        </p:style>
-        <p:txBody>
-          <a:bodyPr rtlCol="0" anchor="ctr"/>
-          <a:lstStyle/>
-          <a:p>
-            <a:pPr algn="ctr"/>
-          </a:p>
-        </p:txBody>
-      </p:sp>
-      <p:sp>
-        <p:nvSpPr>
-          <p:cNvPr id="21" name="TextBox 20"/>
-          <p:cNvSpPr txBox="1"/>
-          <p:nvPr/>
-        </p:nvSpPr>
-        <p:spPr>
-          <a:xfrm>
-            <a:off x="941832" y="3639312"/>
-            <a:ext cx="402336" cy="402336"/>
-          </a:xfrm>
-          <a:prstGeom prst="rect">
-            <a:avLst/>
-          </a:prstGeom>
-          <a:noFill/>
-          <a:effectLst/>
-        </p:spPr>
-        <p:txBody>
-          <a:bodyPr wrap="square" lIns="0" rIns="0" tIns="0" bIns="0" anchor="t">
-            <a:spAutoFit/>
-          </a:bodyPr>
-          <a:lstStyle/>
-          <a:p>
-            <a:pPr algn="ctr"/>
-            <a:r>
-              <a:rPr sz="1400" b="1">
-                <a:solidFill>
-                  <a:srgbClr val="FFFDF7"/>
-                </a:solidFill>
-                <a:latin typeface="Libre Caslon Display"/>
-              </a:rPr>
-              <a:t>4</a:t>
-            </a:r>
-          </a:p>
-        </p:txBody>
-      </p:sp>
-      <p:sp>
-        <p:nvSpPr>
-          <p:cNvPr id="22" name="TextBox 21"/>
-          <p:cNvSpPr txBox="1"/>
-          <p:nvPr/>
-        </p:nvSpPr>
-        <p:spPr>
-          <a:xfrm>
-            <a:off x="1572768" y="3547872"/>
-            <a:ext cx="6583680" cy="384048"/>
-          </a:xfrm>
-          <a:prstGeom prst="rect">
-            <a:avLst/>
-          </a:prstGeom>
-          <a:noFill/>
-          <a:effectLst/>
-        </p:spPr>
-        <p:txBody>
-          <a:bodyPr wrap="square" lIns="0" rIns="0" tIns="0" bIns="0" anchor="ctr">
-            <a:spAutoFit/>
-          </a:bodyPr>
-          <a:lstStyle/>
-          <a:p>
-            <a:pPr algn="l">
-              <a:lnSpc>
-                <a:spcPct val="110000"/>
-              </a:lnSpc>
-            </a:pPr>
-            <a:r>
-              <a:rPr sz="1350" b="1">
-                <a:solidFill>
-                  <a:srgbClr val="B03E72"/>
-                </a:solidFill>
-                <a:latin typeface="Libre Caslon Display"/>
+                <a:latin typeface="Georgia"/>
               </a:rPr>
               <a:t>Did it stop the first time they asked?</a:t>
             </a:r>
@@ -14032,7 +13130,7 @@
                 <a:solidFill>
                   <a:srgbClr val="B03E72"/>
                 </a:solidFill>
-                <a:latin typeface="Karla"/>
+                <a:latin typeface="Calibri"/>
               </a:rPr>
               <a:t>A joke passes all four. Anything that fails one is worth looking at again.</a:t>
             </a:r>
@@ -14092,7 +13190,7 @@
                 <a:solidFill>
                   <a:srgbClr val="A79EA2"/>
                 </a:solidFill>
-                <a:latin typeface="Karla"/>
+                <a:latin typeface="Calibri"/>
               </a:rPr>
               <a:t>The Pastoral Guide</a:t>
             </a:r>
@@ -14128,7 +13226,7 @@
                 <a:solidFill>
                   <a:srgbClr val="A79EA2"/>
                 </a:solidFill>
-                <a:latin typeface="Karla"/>
+                <a:latin typeface="Calibri"/>
               </a:rPr>
               <a:t>5 / 18</a:t>
             </a:r>
@@ -14226,91 +13324,9 @@
                 <a:solidFill>
                   <a:srgbClr val="B1517B"/>
                 </a:solidFill>
-                <a:latin typeface="Karla"/>
+                <a:latin typeface="Calibri"/>
               </a:rPr>
               <a:t>THE SENTENCE ITSELF</a:t>
-            </a:r>
-          </a:p>
-        </p:txBody>
-      </p:sp>
-      <p:sp>
-        <p:nvSpPr>
-          <p:cNvPr id="4" name="Rounded Rectangle 3"/>
-          <p:cNvSpPr/>
-          <p:nvPr/>
-        </p:nvSpPr>
-        <p:spPr>
-          <a:xfrm>
-            <a:off x="7543800" y="530352"/>
-            <a:ext cx="914400" cy="347472"/>
-          </a:xfrm>
-          <a:prstGeom prst="roundRect">
-            <a:avLst>
-              <a:gd name="adj" fmla="val 50000"/>
-            </a:avLst>
-          </a:prstGeom>
-          <a:solidFill>
-            <a:srgbClr val="FBEDF3"/>
-          </a:solidFill>
-          <a:ln>
-            <a:noFill/>
-          </a:ln>
-          <a:effectLst/>
-        </p:spPr>
-        <p:style>
-          <a:lnRef idx="1">
-            <a:schemeClr val="accent1"/>
-          </a:lnRef>
-          <a:fillRef idx="3">
-            <a:schemeClr val="accent1"/>
-          </a:fillRef>
-          <a:effectRef idx="2">
-            <a:schemeClr val="accent1"/>
-          </a:effectRef>
-          <a:fontRef idx="minor">
-            <a:schemeClr val="lt1"/>
-          </a:fontRef>
-        </p:style>
-        <p:txBody>
-          <a:bodyPr rtlCol="0" anchor="ctr"/>
-          <a:lstStyle/>
-          <a:p>
-            <a:pPr algn="ctr"/>
-          </a:p>
-        </p:txBody>
-      </p:sp>
-      <p:sp>
-        <p:nvSpPr>
-          <p:cNvPr id="5" name="TextBox 4"/>
-          <p:cNvSpPr txBox="1"/>
-          <p:nvPr/>
-        </p:nvSpPr>
-        <p:spPr>
-          <a:xfrm>
-            <a:off x="7543800" y="594360"/>
-            <a:ext cx="914400" cy="237744"/>
-          </a:xfrm>
-          <a:prstGeom prst="rect">
-            <a:avLst/>
-          </a:prstGeom>
-          <a:noFill/>
-          <a:effectLst/>
-        </p:spPr>
-        <p:txBody>
-          <a:bodyPr wrap="square" lIns="0" rIns="0" tIns="0" bIns="0" anchor="t">
-            <a:spAutoFit/>
-          </a:bodyPr>
-          <a:lstStyle/>
-          <a:p>
-            <a:pPr algn="ctr"/>
-            <a:r>
-              <a:rPr sz="1000" b="1" spc="100">
-                <a:solidFill>
-                  <a:srgbClr val="B03E72"/>
-                </a:solidFill>
-                <a:latin typeface="Karla"/>
-              </a:rPr>
-              <a:t>TEACH</a:t>
             </a:r>
           </a:p>
         </p:txBody>
@@ -14340,11 +13356,11 @@
           <a:p>
             <a:pPr algn="l"/>
             <a:r>
-              <a:rPr sz="3100" b="1">
+              <a:rPr sz="3100" b="0">
                 <a:solidFill>
                   <a:srgbClr val="33292E"/>
                 </a:solidFill>
-                <a:latin typeface="Libre Caslon Display"/>
+                <a:latin typeface="Georgia"/>
               </a:rPr>
               <a:t>Two jobs at once</a:t>
             </a:r>
@@ -14430,7 +13446,7 @@
                 <a:solidFill>
                   <a:srgbClr val="33292E"/>
                 </a:solidFill>
-                <a:latin typeface="Libre Caslon Display"/>
+                <a:latin typeface="Georgia"/>
               </a:rPr>
               <a:t>I did not mean to hurt you.</a:t>
             </a:r>
@@ -14470,7 +13486,7 @@
                 <a:solidFill>
                   <a:srgbClr val="6B6167"/>
                 </a:solidFill>
-                <a:latin typeface="Karla"/>
+                <a:latin typeface="Calibri"/>
               </a:rPr>
               <a:t>Most of the time this half is true.</a:t>
             </a:r>
@@ -14556,7 +13572,7 @@
                 <a:solidFill>
                   <a:srgbClr val="33292E"/>
                 </a:solidFill>
-                <a:latin typeface="Libre Caslon Display"/>
+                <a:latin typeface="Georgia"/>
               </a:rPr>
               <a:t>Now stop talking about it.</a:t>
             </a:r>
@@ -14596,7 +13612,7 @@
                 <a:solidFill>
                   <a:srgbClr val="6B6167"/>
                 </a:solidFill>
-                <a:latin typeface="Karla"/>
+                <a:latin typeface="Calibri"/>
               </a:rPr>
               <a:t>This half tells the other person that the subject is closed.</a:t>
             </a:r>
@@ -14636,7 +13652,7 @@
                 <a:solidFill>
                   <a:srgbClr val="B03E72"/>
                 </a:solidFill>
-                <a:latin typeface="Karla"/>
+                <a:latin typeface="Calibri"/>
               </a:rPr>
               <a:t>“It was just a joke” says both of these at once, and the second one is the one people hear.</a:t>
             </a:r>
@@ -14676,7 +13692,7 @@
                 <a:solidFill>
                   <a:srgbClr val="6B6167"/>
                 </a:solidFill>
-                <a:latin typeface="Karla"/>
+                <a:latin typeface="Calibri"/>
               </a:rPr>
               <a:t>On its own, the first half would be an apology.</a:t>
             </a:r>
@@ -14736,7 +13752,7 @@
                 <a:solidFill>
                   <a:srgbClr val="A79EA2"/>
                 </a:solidFill>
-                <a:latin typeface="Karla"/>
+                <a:latin typeface="Calibri"/>
               </a:rPr>
               <a:t>The Pastoral Guide</a:t>
             </a:r>
@@ -14772,7 +13788,7 @@
                 <a:solidFill>
                   <a:srgbClr val="A79EA2"/>
                 </a:solidFill>
-                <a:latin typeface="Karla"/>
+                <a:latin typeface="Calibri"/>
               </a:rPr>
               <a:t>6 / 18</a:t>
             </a:r>
@@ -14870,7 +13886,7 @@
                 <a:solidFill>
                   <a:srgbClr val="B1517B"/>
                 </a:solidFill>
-                <a:latin typeface="Karla"/>
+                <a:latin typeface="Calibri"/>
               </a:rPr>
               <a:t>BEFORE THE ANSWER</a:t>
             </a:r>
@@ -14879,18 +13895,140 @@
       </p:sp>
       <p:sp>
         <p:nvSpPr>
-          <p:cNvPr id="4" name="Rounded Rectangle 3"/>
+          <p:cNvPr id="6" name="TextBox 5"/>
+          <p:cNvSpPr txBox="1"/>
+          <p:nvPr/>
+        </p:nvSpPr>
+        <p:spPr>
+          <a:xfrm>
+            <a:off x="685800" y="841248"/>
+            <a:ext cx="6309360" cy="566928"/>
+          </a:xfrm>
+          <a:prstGeom prst="rect">
+            <a:avLst/>
+          </a:prstGeom>
+          <a:noFill/>
+          <a:effectLst/>
+        </p:spPr>
+        <p:txBody>
+          <a:bodyPr wrap="square" lIns="0" rIns="0" tIns="0" bIns="0" anchor="t">
+            <a:spAutoFit/>
+          </a:bodyPr>
+          <a:lstStyle/>
+          <a:p>
+            <a:pPr algn="l"/>
+            <a:r>
+              <a:rPr sz="3100" b="0">
+                <a:solidFill>
+                  <a:srgbClr val="33292E"/>
+                </a:solidFill>
+                <a:latin typeface="Georgia"/>
+              </a:rPr>
+              <a:t>What is always off limits?</a:t>
+            </a:r>
+          </a:p>
+        </p:txBody>
+      </p:sp>
+      <p:sp>
+        <p:nvSpPr>
+          <p:cNvPr id="7" name="Rounded Rectangle 6"/>
           <p:cNvSpPr/>
           <p:nvPr/>
         </p:nvSpPr>
         <p:spPr>
           <a:xfrm>
-            <a:off x="7543800" y="530352"/>
-            <a:ext cx="914400" cy="347472"/>
+            <a:off x="685800" y="1481328"/>
+            <a:ext cx="7772400" cy="877824"/>
           </a:xfrm>
           <a:prstGeom prst="roundRect">
             <a:avLst>
-              <a:gd name="adj" fmla="val 50000"/>
+              <a:gd name="adj" fmla="val 9375"/>
+            </a:avLst>
+          </a:prstGeom>
+          <a:solidFill>
+            <a:srgbClr val="FFFDF7"/>
+          </a:solidFill>
+          <a:ln>
+            <a:noFill/>
+          </a:ln>
+          <a:effectLst/>
+        </p:spPr>
+        <p:style>
+          <a:lnRef idx="1">
+            <a:schemeClr val="accent1"/>
+          </a:lnRef>
+          <a:fillRef idx="3">
+            <a:schemeClr val="accent1"/>
+          </a:fillRef>
+          <a:effectRef idx="2">
+            <a:schemeClr val="accent1"/>
+          </a:effectRef>
+          <a:fontRef idx="minor">
+            <a:schemeClr val="lt1"/>
+          </a:fontRef>
+        </p:style>
+        <p:txBody>
+          <a:bodyPr rtlCol="0" anchor="ctr"/>
+          <a:lstStyle/>
+          <a:p>
+            <a:pPr algn="ctr"/>
+          </a:p>
+        </p:txBody>
+      </p:sp>
+      <p:sp>
+        <p:nvSpPr>
+          <p:cNvPr id="8" name="TextBox 7"/>
+          <p:cNvSpPr txBox="1"/>
+          <p:nvPr/>
+        </p:nvSpPr>
+        <p:spPr>
+          <a:xfrm>
+            <a:off x="1051560" y="1682496"/>
+            <a:ext cx="7040880" cy="548640"/>
+          </a:xfrm>
+          <a:prstGeom prst="rect">
+            <a:avLst/>
+          </a:prstGeom>
+          <a:noFill/>
+          <a:effectLst/>
+        </p:spPr>
+        <p:txBody>
+          <a:bodyPr wrap="square" lIns="0" rIns="0" tIns="0" bIns="0" anchor="t">
+            <a:spAutoFit/>
+          </a:bodyPr>
+          <a:lstStyle/>
+          <a:p>
+            <a:pPr algn="l">
+              <a:lnSpc>
+                <a:spcPct val="135000"/>
+              </a:lnSpc>
+            </a:pPr>
+            <a:r>
+              <a:rPr sz="1300" b="0">
+                <a:solidFill>
+                  <a:srgbClr val="6B6167"/>
+                </a:solidFill>
+                <a:latin typeface="Calibri"/>
+              </a:rPr>
+              <a:t>Researchers asked 28 students aged eleven to fifteen where their own line was. Every group answered the same way first: it depends on the person.</a:t>
+            </a:r>
+          </a:p>
+        </p:txBody>
+      </p:sp>
+      <p:sp>
+        <p:nvSpPr>
+          <p:cNvPr id="9" name="Rounded Rectangle 8"/>
+          <p:cNvSpPr/>
+          <p:nvPr/>
+        </p:nvSpPr>
+        <p:spPr>
+          <a:xfrm>
+            <a:off x="685800" y="2542032"/>
+            <a:ext cx="7772400" cy="640080"/>
+          </a:xfrm>
+          <a:prstGeom prst="roundRect">
+            <a:avLst>
+              <a:gd name="adj" fmla="val 12857"/>
             </a:avLst>
           </a:prstGeom>
           <a:solidFill>
@@ -14925,94 +14063,20 @@
       </p:sp>
       <p:sp>
         <p:nvSpPr>
-          <p:cNvPr id="5" name="TextBox 4"/>
-          <p:cNvSpPr txBox="1"/>
-          <p:nvPr/>
-        </p:nvSpPr>
-        <p:spPr>
-          <a:xfrm>
-            <a:off x="7543800" y="594360"/>
-            <a:ext cx="914400" cy="237744"/>
-          </a:xfrm>
-          <a:prstGeom prst="rect">
-            <a:avLst/>
-          </a:prstGeom>
-          <a:noFill/>
-          <a:effectLst/>
-        </p:spPr>
-        <p:txBody>
-          <a:bodyPr wrap="square" lIns="0" rIns="0" tIns="0" bIns="0" anchor="t">
-            <a:spAutoFit/>
-          </a:bodyPr>
-          <a:lstStyle/>
-          <a:p>
-            <a:pPr algn="ctr"/>
-            <a:r>
-              <a:rPr sz="1000" b="1" spc="100">
-                <a:solidFill>
-                  <a:srgbClr val="B03E72"/>
-                </a:solidFill>
-                <a:latin typeface="Karla"/>
-              </a:rPr>
-              <a:t>PREDICT</a:t>
-            </a:r>
-          </a:p>
-        </p:txBody>
-      </p:sp>
-      <p:sp>
-        <p:nvSpPr>
-          <p:cNvPr id="6" name="TextBox 5"/>
-          <p:cNvSpPr txBox="1"/>
-          <p:nvPr/>
-        </p:nvSpPr>
-        <p:spPr>
-          <a:xfrm>
-            <a:off x="685800" y="841248"/>
-            <a:ext cx="6309360" cy="566928"/>
-          </a:xfrm>
-          <a:prstGeom prst="rect">
-            <a:avLst/>
-          </a:prstGeom>
-          <a:noFill/>
-          <a:effectLst/>
-        </p:spPr>
-        <p:txBody>
-          <a:bodyPr wrap="square" lIns="0" rIns="0" tIns="0" bIns="0" anchor="t">
-            <a:spAutoFit/>
-          </a:bodyPr>
-          <a:lstStyle/>
-          <a:p>
-            <a:pPr algn="l"/>
-            <a:r>
-              <a:rPr sz="3100" b="1">
-                <a:solidFill>
-                  <a:srgbClr val="33292E"/>
-                </a:solidFill>
-                <a:latin typeface="Libre Caslon Display"/>
-              </a:rPr>
-              <a:t>What is always off limits?</a:t>
-            </a:r>
-          </a:p>
-        </p:txBody>
-      </p:sp>
-      <p:sp>
-        <p:nvSpPr>
-          <p:cNvPr id="7" name="Rounded Rectangle 6"/>
+          <p:cNvPr id="10" name="Oval 9"/>
           <p:cNvSpPr/>
           <p:nvPr/>
         </p:nvSpPr>
         <p:spPr>
           <a:xfrm>
-            <a:off x="685800" y="1481328"/>
-            <a:ext cx="7772400" cy="877824"/>
-          </a:xfrm>
-          <a:prstGeom prst="roundRect">
-            <a:avLst>
-              <a:gd name="adj" fmla="val 9375"/>
-            </a:avLst>
+            <a:off x="941832" y="2660903"/>
+            <a:ext cx="402336" cy="402336"/>
+          </a:xfrm>
+          <a:prstGeom prst="ellipse">
+            <a:avLst/>
           </a:prstGeom>
           <a:solidFill>
-            <a:srgbClr val="FFFDF7"/>
+            <a:srgbClr val="B03E72"/>
           </a:solidFill>
           <a:ln>
             <a:noFill/>
@@ -15043,53 +14107,89 @@
       </p:sp>
       <p:sp>
         <p:nvSpPr>
-          <p:cNvPr id="8" name="TextBox 7"/>
-          <p:cNvSpPr txBox="1"/>
-          <p:nvPr/>
-        </p:nvSpPr>
-        <p:spPr>
-          <a:xfrm>
-            <a:off x="1051560" y="1682496"/>
-            <a:ext cx="7040880" cy="548640"/>
-          </a:xfrm>
-          <a:prstGeom prst="rect">
-            <a:avLst/>
-          </a:prstGeom>
-          <a:noFill/>
-          <a:effectLst/>
-        </p:spPr>
-        <p:txBody>
-          <a:bodyPr wrap="square" lIns="0" rIns="0" tIns="0" bIns="0" anchor="t">
+          <p:cNvPr id="11" name="TextBox 10"/>
+          <p:cNvSpPr txBox="1"/>
+          <p:nvPr/>
+        </p:nvSpPr>
+        <p:spPr>
+          <a:xfrm>
+            <a:off x="941832" y="2761487"/>
+            <a:ext cx="402336" cy="402336"/>
+          </a:xfrm>
+          <a:prstGeom prst="rect">
+            <a:avLst/>
+          </a:prstGeom>
+          <a:noFill/>
+          <a:effectLst/>
+        </p:spPr>
+        <p:txBody>
+          <a:bodyPr wrap="square" lIns="0" rIns="0" tIns="0" bIns="0" anchor="t">
+            <a:spAutoFit/>
+          </a:bodyPr>
+          <a:lstStyle/>
+          <a:p>
+            <a:pPr algn="ctr"/>
+            <a:r>
+              <a:rPr sz="1400" b="0">
+                <a:solidFill>
+                  <a:srgbClr val="FFFDF7"/>
+                </a:solidFill>
+                <a:latin typeface="Georgia"/>
+              </a:rPr>
+              <a:t>1</a:t>
+            </a:r>
+          </a:p>
+        </p:txBody>
+      </p:sp>
+      <p:sp>
+        <p:nvSpPr>
+          <p:cNvPr id="12" name="TextBox 11"/>
+          <p:cNvSpPr txBox="1"/>
+          <p:nvPr/>
+        </p:nvSpPr>
+        <p:spPr>
+          <a:xfrm>
+            <a:off x="1572768" y="2633472"/>
+            <a:ext cx="6583680" cy="457199"/>
+          </a:xfrm>
+          <a:prstGeom prst="rect">
+            <a:avLst/>
+          </a:prstGeom>
+          <a:noFill/>
+          <a:effectLst/>
+        </p:spPr>
+        <p:txBody>
+          <a:bodyPr wrap="square" lIns="0" rIns="0" tIns="0" bIns="0" anchor="ctr">
             <a:spAutoFit/>
           </a:bodyPr>
           <a:lstStyle/>
           <a:p>
             <a:pPr algn="l">
               <a:lnSpc>
-                <a:spcPct val="135000"/>
+                <a:spcPct val="110000"/>
               </a:lnSpc>
             </a:pPr>
             <a:r>
-              <a:rPr sz="1300" b="0">
-                <a:solidFill>
-                  <a:srgbClr val="6B6167"/>
-                </a:solidFill>
-                <a:latin typeface="Karla"/>
-              </a:rPr>
-              <a:t>Researchers asked 28 students aged eleven to fifteen where their own line was. Every group answered the same way first: it depends on the person.</a:t>
-            </a:r>
-          </a:p>
-        </p:txBody>
-      </p:sp>
-      <p:sp>
-        <p:nvSpPr>
-          <p:cNvPr id="9" name="Rounded Rectangle 8"/>
+              <a:rPr sz="1350" b="0">
+                <a:solidFill>
+                  <a:srgbClr val="B03E72"/>
+                </a:solidFill>
+                <a:latin typeface="Georgia"/>
+              </a:rPr>
+              <a:t>Write down three subjects that are off limits whoever is saying them.</a:t>
+            </a:r>
+          </a:p>
+        </p:txBody>
+      </p:sp>
+      <p:sp>
+        <p:nvSpPr>
+          <p:cNvPr id="13" name="Rounded Rectangle 12"/>
           <p:cNvSpPr/>
           <p:nvPr/>
         </p:nvSpPr>
         <p:spPr>
           <a:xfrm>
-            <a:off x="685800" y="2542032"/>
+            <a:off x="685800" y="3291839"/>
             <a:ext cx="7772400" cy="640080"/>
           </a:xfrm>
           <a:prstGeom prst="roundRect">
@@ -15129,13 +14229,13 @@
       </p:sp>
       <p:sp>
         <p:nvSpPr>
-          <p:cNvPr id="10" name="Oval 9"/>
+          <p:cNvPr id="14" name="Oval 13"/>
           <p:cNvSpPr/>
           <p:nvPr/>
         </p:nvSpPr>
         <p:spPr>
           <a:xfrm>
-            <a:off x="941832" y="2660903"/>
+            <a:off x="941832" y="3410711"/>
             <a:ext cx="402336" cy="402336"/>
           </a:xfrm>
           <a:prstGeom prst="ellipse">
@@ -15173,13 +14273,13 @@
       </p:sp>
       <p:sp>
         <p:nvSpPr>
-          <p:cNvPr id="11" name="TextBox 10"/>
-          <p:cNvSpPr txBox="1"/>
-          <p:nvPr/>
-        </p:nvSpPr>
-        <p:spPr>
-          <a:xfrm>
-            <a:off x="941832" y="2761487"/>
+          <p:cNvPr id="15" name="TextBox 14"/>
+          <p:cNvSpPr txBox="1"/>
+          <p:nvPr/>
+        </p:nvSpPr>
+        <p:spPr>
+          <a:xfrm>
+            <a:off x="941832" y="3511295"/>
             <a:ext cx="402336" cy="402336"/>
           </a:xfrm>
           <a:prstGeom prst="rect">
@@ -15196,26 +14296,26 @@
           <a:p>
             <a:pPr algn="ctr"/>
             <a:r>
-              <a:rPr sz="1400" b="1">
+              <a:rPr sz="1400" b="0">
                 <a:solidFill>
                   <a:srgbClr val="FFFDF7"/>
                 </a:solidFill>
-                <a:latin typeface="Libre Caslon Display"/>
-              </a:rPr>
-              <a:t>1</a:t>
-            </a:r>
-          </a:p>
-        </p:txBody>
-      </p:sp>
-      <p:sp>
-        <p:nvSpPr>
-          <p:cNvPr id="12" name="TextBox 11"/>
-          <p:cNvSpPr txBox="1"/>
-          <p:nvPr/>
-        </p:nvSpPr>
-        <p:spPr>
-          <a:xfrm>
-            <a:off x="1572768" y="2633472"/>
+                <a:latin typeface="Georgia"/>
+              </a:rPr>
+              <a:t>2</a:t>
+            </a:r>
+          </a:p>
+        </p:txBody>
+      </p:sp>
+      <p:sp>
+        <p:nvSpPr>
+          <p:cNvPr id="16" name="TextBox 15"/>
+          <p:cNvSpPr txBox="1"/>
+          <p:nvPr/>
+        </p:nvSpPr>
+        <p:spPr>
+          <a:xfrm>
+            <a:off x="1572768" y="3383279"/>
             <a:ext cx="6583680" cy="457199"/>
           </a:xfrm>
           <a:prstGeom prst="rect">
@@ -15236,177 +14336,11 @@
               </a:lnSpc>
             </a:pPr>
             <a:r>
-              <a:rPr sz="1350" b="1">
+              <a:rPr sz="1350" b="0">
                 <a:solidFill>
                   <a:srgbClr val="B03E72"/>
                 </a:solidFill>
-                <a:latin typeface="Libre Caslon Display"/>
-              </a:rPr>
-              <a:t>Write down three subjects that are off limits whoever is saying them.</a:t>
-            </a:r>
-          </a:p>
-        </p:txBody>
-      </p:sp>
-      <p:sp>
-        <p:nvSpPr>
-          <p:cNvPr id="13" name="Rounded Rectangle 12"/>
-          <p:cNvSpPr/>
-          <p:nvPr/>
-        </p:nvSpPr>
-        <p:spPr>
-          <a:xfrm>
-            <a:off x="685800" y="3291839"/>
-            <a:ext cx="7772400" cy="640080"/>
-          </a:xfrm>
-          <a:prstGeom prst="roundRect">
-            <a:avLst>
-              <a:gd name="adj" fmla="val 12857"/>
-            </a:avLst>
-          </a:prstGeom>
-          <a:solidFill>
-            <a:srgbClr val="FBEDF3"/>
-          </a:solidFill>
-          <a:ln>
-            <a:noFill/>
-          </a:ln>
-          <a:effectLst/>
-        </p:spPr>
-        <p:style>
-          <a:lnRef idx="1">
-            <a:schemeClr val="accent1"/>
-          </a:lnRef>
-          <a:fillRef idx="3">
-            <a:schemeClr val="accent1"/>
-          </a:fillRef>
-          <a:effectRef idx="2">
-            <a:schemeClr val="accent1"/>
-          </a:effectRef>
-          <a:fontRef idx="minor">
-            <a:schemeClr val="lt1"/>
-          </a:fontRef>
-        </p:style>
-        <p:txBody>
-          <a:bodyPr rtlCol="0" anchor="ctr"/>
-          <a:lstStyle/>
-          <a:p>
-            <a:pPr algn="ctr"/>
-          </a:p>
-        </p:txBody>
-      </p:sp>
-      <p:sp>
-        <p:nvSpPr>
-          <p:cNvPr id="14" name="Oval 13"/>
-          <p:cNvSpPr/>
-          <p:nvPr/>
-        </p:nvSpPr>
-        <p:spPr>
-          <a:xfrm>
-            <a:off x="941832" y="3410711"/>
-            <a:ext cx="402336" cy="402336"/>
-          </a:xfrm>
-          <a:prstGeom prst="ellipse">
-            <a:avLst/>
-          </a:prstGeom>
-          <a:solidFill>
-            <a:srgbClr val="B03E72"/>
-          </a:solidFill>
-          <a:ln>
-            <a:noFill/>
-          </a:ln>
-          <a:effectLst/>
-        </p:spPr>
-        <p:style>
-          <a:lnRef idx="1">
-            <a:schemeClr val="accent1"/>
-          </a:lnRef>
-          <a:fillRef idx="3">
-            <a:schemeClr val="accent1"/>
-          </a:fillRef>
-          <a:effectRef idx="2">
-            <a:schemeClr val="accent1"/>
-          </a:effectRef>
-          <a:fontRef idx="minor">
-            <a:schemeClr val="lt1"/>
-          </a:fontRef>
-        </p:style>
-        <p:txBody>
-          <a:bodyPr rtlCol="0" anchor="ctr"/>
-          <a:lstStyle/>
-          <a:p>
-            <a:pPr algn="ctr"/>
-          </a:p>
-        </p:txBody>
-      </p:sp>
-      <p:sp>
-        <p:nvSpPr>
-          <p:cNvPr id="15" name="TextBox 14"/>
-          <p:cNvSpPr txBox="1"/>
-          <p:nvPr/>
-        </p:nvSpPr>
-        <p:spPr>
-          <a:xfrm>
-            <a:off x="941832" y="3511295"/>
-            <a:ext cx="402336" cy="402336"/>
-          </a:xfrm>
-          <a:prstGeom prst="rect">
-            <a:avLst/>
-          </a:prstGeom>
-          <a:noFill/>
-          <a:effectLst/>
-        </p:spPr>
-        <p:txBody>
-          <a:bodyPr wrap="square" lIns="0" rIns="0" tIns="0" bIns="0" anchor="t">
-            <a:spAutoFit/>
-          </a:bodyPr>
-          <a:lstStyle/>
-          <a:p>
-            <a:pPr algn="ctr"/>
-            <a:r>
-              <a:rPr sz="1400" b="1">
-                <a:solidFill>
-                  <a:srgbClr val="FFFDF7"/>
-                </a:solidFill>
-                <a:latin typeface="Libre Caslon Display"/>
-              </a:rPr>
-              <a:t>2</a:t>
-            </a:r>
-          </a:p>
-        </p:txBody>
-      </p:sp>
-      <p:sp>
-        <p:nvSpPr>
-          <p:cNvPr id="16" name="TextBox 15"/>
-          <p:cNvSpPr txBox="1"/>
-          <p:nvPr/>
-        </p:nvSpPr>
-        <p:spPr>
-          <a:xfrm>
-            <a:off x="1572768" y="3383279"/>
-            <a:ext cx="6583680" cy="457199"/>
-          </a:xfrm>
-          <a:prstGeom prst="rect">
-            <a:avLst/>
-          </a:prstGeom>
-          <a:noFill/>
-          <a:effectLst/>
-        </p:spPr>
-        <p:txBody>
-          <a:bodyPr wrap="square" lIns="0" rIns="0" tIns="0" bIns="0" anchor="ctr">
-            <a:spAutoFit/>
-          </a:bodyPr>
-          <a:lstStyle/>
-          <a:p>
-            <a:pPr algn="l">
-              <a:lnSpc>
-                <a:spcPct val="110000"/>
-              </a:lnSpc>
-            </a:pPr>
-            <a:r>
-              <a:rPr sz="1350" b="1">
-                <a:solidFill>
-                  <a:srgbClr val="B03E72"/>
-                </a:solidFill>
-                <a:latin typeface="Libre Caslon Display"/>
+                <a:latin typeface="Georgia"/>
               </a:rPr>
               <a:t>Then one subject that depends on who is saying it.</a:t>
             </a:r>
@@ -15446,7 +14380,7 @@
                 <a:solidFill>
                   <a:srgbClr val="B03E72"/>
                 </a:solidFill>
-                <a:latin typeface="Karla"/>
+                <a:latin typeface="Calibri"/>
               </a:rPr>
               <a:t>Two minutes, in pairs.</a:t>
             </a:r>
@@ -15506,7 +14440,7 @@
                 <a:solidFill>
                   <a:srgbClr val="A79EA2"/>
                 </a:solidFill>
-                <a:latin typeface="Karla"/>
+                <a:latin typeface="Calibri"/>
               </a:rPr>
               <a:t>The Pastoral Guide</a:t>
             </a:r>
@@ -15542,7 +14476,7 @@
                 <a:solidFill>
                   <a:srgbClr val="A79EA2"/>
                 </a:solidFill>
-                <a:latin typeface="Karla"/>
+                <a:latin typeface="Calibri"/>
               </a:rPr>
               <a:t>7 / 18</a:t>
             </a:r>
@@ -15640,91 +14574,9 @@
                 <a:solidFill>
                   <a:srgbClr val="B1517B"/>
                 </a:solidFill>
-                <a:latin typeface="Karla"/>
+                <a:latin typeface="Calibri"/>
               </a:rPr>
               <a:t>THE ANSWER</a:t>
-            </a:r>
-          </a:p>
-        </p:txBody>
-      </p:sp>
-      <p:sp>
-        <p:nvSpPr>
-          <p:cNvPr id="4" name="Rounded Rectangle 3"/>
-          <p:cNvSpPr/>
-          <p:nvPr/>
-        </p:nvSpPr>
-        <p:spPr>
-          <a:xfrm>
-            <a:off x="7543800" y="530352"/>
-            <a:ext cx="914400" cy="347472"/>
-          </a:xfrm>
-          <a:prstGeom prst="roundRect">
-            <a:avLst>
-              <a:gd name="adj" fmla="val 50000"/>
-            </a:avLst>
-          </a:prstGeom>
-          <a:solidFill>
-            <a:srgbClr val="FBEDF3"/>
-          </a:solidFill>
-          <a:ln>
-            <a:noFill/>
-          </a:ln>
-          <a:effectLst/>
-        </p:spPr>
-        <p:style>
-          <a:lnRef idx="1">
-            <a:schemeClr val="accent1"/>
-          </a:lnRef>
-          <a:fillRef idx="3">
-            <a:schemeClr val="accent1"/>
-          </a:fillRef>
-          <a:effectRef idx="2">
-            <a:schemeClr val="accent1"/>
-          </a:effectRef>
-          <a:fontRef idx="minor">
-            <a:schemeClr val="lt1"/>
-          </a:fontRef>
-        </p:style>
-        <p:txBody>
-          <a:bodyPr rtlCol="0" anchor="ctr"/>
-          <a:lstStyle/>
-          <a:p>
-            <a:pPr algn="ctr"/>
-          </a:p>
-        </p:txBody>
-      </p:sp>
-      <p:sp>
-        <p:nvSpPr>
-          <p:cNvPr id="5" name="TextBox 4"/>
-          <p:cNvSpPr txBox="1"/>
-          <p:nvPr/>
-        </p:nvSpPr>
-        <p:spPr>
-          <a:xfrm>
-            <a:off x="7543800" y="594360"/>
-            <a:ext cx="914400" cy="237744"/>
-          </a:xfrm>
-          <a:prstGeom prst="rect">
-            <a:avLst/>
-          </a:prstGeom>
-          <a:noFill/>
-          <a:effectLst/>
-        </p:spPr>
-        <p:txBody>
-          <a:bodyPr wrap="square" lIns="0" rIns="0" tIns="0" bIns="0" anchor="t">
-            <a:spAutoFit/>
-          </a:bodyPr>
-          <a:lstStyle/>
-          <a:p>
-            <a:pPr algn="ctr"/>
-            <a:r>
-              <a:rPr sz="1000" b="1" spc="100">
-                <a:solidFill>
-                  <a:srgbClr val="B03E72"/>
-                </a:solidFill>
-                <a:latin typeface="Karla"/>
-              </a:rPr>
-              <a:t>REVEAL</a:t>
             </a:r>
           </a:p>
         </p:txBody>
@@ -15754,11 +14606,11 @@
           <a:p>
             <a:pPr algn="l"/>
             <a:r>
-              <a:rPr sz="3100" b="1">
+              <a:rPr sz="3100" b="0">
                 <a:solidFill>
                   <a:srgbClr val="33292E"/>
                 </a:solidFill>
-                <a:latin typeface="Libre Caslon Display"/>
+                <a:latin typeface="Georgia"/>
               </a:rPr>
               <a:t>What they named</a:t>
             </a:r>
@@ -15844,7 +14696,7 @@
                 <a:solidFill>
                   <a:srgbClr val="33292E"/>
                 </a:solidFill>
-                <a:latin typeface="Libre Caslon Display"/>
+                <a:latin typeface="Georgia"/>
               </a:rPr>
               <a:t>Somebody’s family</a:t>
             </a:r>
@@ -15854,7 +14706,7 @@
                 <a:solidFill>
                   <a:srgbClr val="33292E"/>
                 </a:solidFill>
-                <a:latin typeface="Libre Caslon Display"/>
+                <a:latin typeface="Georgia"/>
               </a:rPr>
               <a:t>The way somebody looks</a:t>
             </a:r>
@@ -15864,7 +14716,7 @@
                 <a:solidFill>
                   <a:srgbClr val="33292E"/>
                 </a:solidFill>
-                <a:latin typeface="Libre Caslon Display"/>
+                <a:latin typeface="Georgia"/>
               </a:rPr>
               <a:t>Somebody who has died</a:t>
             </a:r>
@@ -15874,7 +14726,7 @@
                 <a:solidFill>
                   <a:srgbClr val="33292E"/>
                 </a:solidFill>
-                <a:latin typeface="Libre Caslon Display"/>
+                <a:latin typeface="Georgia"/>
               </a:rPr>
               <a:t>Anything racist or homophobic</a:t>
             </a:r>
@@ -15914,7 +14766,7 @@
                 <a:solidFill>
                   <a:srgbClr val="B03E72"/>
                 </a:solidFill>
-                <a:latin typeface="Karla"/>
+                <a:latin typeface="Calibri"/>
               </a:rPr>
               <a:t>Your list is probably close. Everybody says the line is personal, then draws it in the same place.</a:t>
             </a:r>
@@ -15954,7 +14806,7 @@
                 <a:solidFill>
                   <a:srgbClr val="6B6167"/>
                 </a:solidFill>
-                <a:latin typeface="Karla"/>
+                <a:latin typeface="Calibri"/>
               </a:rPr>
               <a:t>Steer and others, 2020, two secondary schools in the Midlands. Worth arguing with if your list was different.</a:t>
             </a:r>
@@ -16014,7 +14866,7 @@
                 <a:solidFill>
                   <a:srgbClr val="A79EA2"/>
                 </a:solidFill>
-                <a:latin typeface="Karla"/>
+                <a:latin typeface="Calibri"/>
               </a:rPr>
               <a:t>The Pastoral Guide</a:t>
             </a:r>
@@ -16050,7 +14902,7 @@
                 <a:solidFill>
                   <a:srgbClr val="A79EA2"/>
                 </a:solidFill>
-                <a:latin typeface="Karla"/>
+                <a:latin typeface="Calibri"/>
               </a:rPr>
               <a:t>8 / 18</a:t>
             </a:r>
@@ -16148,91 +15000,9 @@
                 <a:solidFill>
                   <a:srgbClr val="B1517B"/>
                 </a:solidFill>
-                <a:latin typeface="Karla"/>
+                <a:latin typeface="Calibri"/>
               </a:rPr>
               <a:t>WATCH THIS FIRST</a:t>
-            </a:r>
-          </a:p>
-        </p:txBody>
-      </p:sp>
-      <p:sp>
-        <p:nvSpPr>
-          <p:cNvPr id="4" name="Rounded Rectangle 3"/>
-          <p:cNvSpPr/>
-          <p:nvPr/>
-        </p:nvSpPr>
-        <p:spPr>
-          <a:xfrm>
-            <a:off x="7543800" y="530352"/>
-            <a:ext cx="914400" cy="347472"/>
-          </a:xfrm>
-          <a:prstGeom prst="roundRect">
-            <a:avLst>
-              <a:gd name="adj" fmla="val 50000"/>
-            </a:avLst>
-          </a:prstGeom>
-          <a:solidFill>
-            <a:srgbClr val="FBEDF3"/>
-          </a:solidFill>
-          <a:ln>
-            <a:noFill/>
-          </a:ln>
-          <a:effectLst/>
-        </p:spPr>
-        <p:style>
-          <a:lnRef idx="1">
-            <a:schemeClr val="accent1"/>
-          </a:lnRef>
-          <a:fillRef idx="3">
-            <a:schemeClr val="accent1"/>
-          </a:fillRef>
-          <a:effectRef idx="2">
-            <a:schemeClr val="accent1"/>
-          </a:effectRef>
-          <a:fontRef idx="minor">
-            <a:schemeClr val="lt1"/>
-          </a:fontRef>
-        </p:style>
-        <p:txBody>
-          <a:bodyPr rtlCol="0" anchor="ctr"/>
-          <a:lstStyle/>
-          <a:p>
-            <a:pPr algn="ctr"/>
-          </a:p>
-        </p:txBody>
-      </p:sp>
-      <p:sp>
-        <p:nvSpPr>
-          <p:cNvPr id="5" name="TextBox 4"/>
-          <p:cNvSpPr txBox="1"/>
-          <p:nvPr/>
-        </p:nvSpPr>
-        <p:spPr>
-          <a:xfrm>
-            <a:off x="7543800" y="594360"/>
-            <a:ext cx="914400" cy="237744"/>
-          </a:xfrm>
-          <a:prstGeom prst="rect">
-            <a:avLst/>
-          </a:prstGeom>
-          <a:noFill/>
-          <a:effectLst/>
-        </p:spPr>
-        <p:txBody>
-          <a:bodyPr wrap="square" lIns="0" rIns="0" tIns="0" bIns="0" anchor="t">
-            <a:spAutoFit/>
-          </a:bodyPr>
-          <a:lstStyle/>
-          <a:p>
-            <a:pPr algn="ctr"/>
-            <a:r>
-              <a:rPr sz="1000" b="1" spc="100">
-                <a:solidFill>
-                  <a:srgbClr val="B03E72"/>
-                </a:solidFill>
-                <a:latin typeface="Karla"/>
-              </a:rPr>
-              <a:t>MODEL</a:t>
             </a:r>
           </a:p>
         </p:txBody>
@@ -16262,11 +15032,11 @@
           <a:p>
             <a:pPr algn="l"/>
             <a:r>
-              <a:rPr sz="3100" b="1">
+              <a:rPr sz="3100" b="0">
                 <a:solidFill>
                   <a:srgbClr val="33292E"/>
                 </a:solidFill>
-                <a:latin typeface="Libre Caslon Display"/>
+                <a:latin typeface="Georgia"/>
               </a:rPr>
               <a:t>Two ways of answering</a:t>
             </a:r>
@@ -16344,11 +15114,11 @@
           <a:p>
             <a:pPr algn="ctr"/>
             <a:r>
-              <a:rPr sz="1600" b="1">
+              <a:rPr sz="1600" b="0">
                 <a:solidFill>
                   <a:srgbClr val="B03E72"/>
                 </a:solidFill>
-                <a:latin typeface="Libre Caslon Display"/>
+                <a:latin typeface="Georgia"/>
               </a:rPr>
               <a:t>This one works</a:t>
             </a:r>
@@ -16388,7 +15158,7 @@
                 <a:solidFill>
                   <a:srgbClr val="33292E"/>
                 </a:solidFill>
-                <a:latin typeface="Libre Caslon Display"/>
+                <a:latin typeface="Georgia"/>
               </a:rPr>
               <a:t>“That came out worse than I meant it to. Sorry.”</a:t>
             </a:r>
@@ -16428,7 +15198,7 @@
                 <a:solidFill>
                   <a:srgbClr val="6B6167"/>
                 </a:solidFill>
-                <a:latin typeface="Karla"/>
+                <a:latin typeface="Calibri"/>
               </a:rPr>
               <a:t>The other person can accept it and put it down. Nothing is owed.</a:t>
             </a:r>
@@ -16506,11 +15276,11 @@
           <a:p>
             <a:pPr algn="ctr"/>
             <a:r>
-              <a:rPr sz="1600" b="1">
+              <a:rPr sz="1600" b="0">
                 <a:solidFill>
                   <a:srgbClr val="B03E72"/>
                 </a:solidFill>
-                <a:latin typeface="Libre Caslon Display"/>
+                <a:latin typeface="Georgia"/>
               </a:rPr>
               <a:t>This one backfires</a:t>
             </a:r>
@@ -16550,7 +15320,7 @@
                 <a:solidFill>
                   <a:srgbClr val="33292E"/>
                 </a:solidFill>
-                <a:latin typeface="Libre Caslon Display"/>
+                <a:latin typeface="Georgia"/>
               </a:rPr>
               <a:t>“It was just a joke.”</a:t>
             </a:r>
@@ -16590,7 +15360,7 @@
                 <a:solidFill>
                   <a:srgbClr val="6B6167"/>
                 </a:solidFill>
-                <a:latin typeface="Karla"/>
+                <a:latin typeface="Calibri"/>
               </a:rPr>
               <a:t>The other person has to agree it was funny or make a scene.</a:t>
             </a:r>
@@ -16630,7 +15400,7 @@
                 <a:solidFill>
                   <a:srgbClr val="B03E72"/>
                 </a:solidFill>
-                <a:latin typeface="Karla"/>
+                <a:latin typeface="Calibri"/>
               </a:rPr>
               <a:t>Both of them mean the same thing. Only one of them lets the other person put it down.</a:t>
             </a:r>
@@ -16670,7 +15440,7 @@
                 <a:solidFill>
                   <a:srgbClr val="6B6167"/>
                 </a:solidFill>
-                <a:latin typeface="Karla"/>
+                <a:latin typeface="Calibri"/>
               </a:rPr>
               <a:t>You are not admitting you meant it. You are saying you would rather not have said it.</a:t>
             </a:r>
@@ -16730,7 +15500,7 @@
                 <a:solidFill>
                   <a:srgbClr val="A79EA2"/>
                 </a:solidFill>
-                <a:latin typeface="Karla"/>
+                <a:latin typeface="Calibri"/>
               </a:rPr>
               <a:t>The Pastoral Guide</a:t>
             </a:r>
@@ -16766,7 +15536,7 @@
                 <a:solidFill>
                   <a:srgbClr val="A79EA2"/>
                 </a:solidFill>
-                <a:latin typeface="Karla"/>
+                <a:latin typeface="Calibri"/>
               </a:rPr>
               <a:t>9 / 18</a:t>
             </a:r>

--- a/tutor-time/it-was-just-a-joke/downloads/It_Was_Just_a_Joke.pptx
+++ b/tutor-time/it-was-just-a-joke/downloads/It_Was_Just_a_Joke.pptx
@@ -3288,7 +3288,7 @@
                 </a:solidFill>
                 <a:latin typeface="Calibri"/>
               </a:rPr>
-              <a:t>The words are the same in each pair. Something else changes.</a:t>
+              <a:t>When is it a joke, and when is it not?</a:t>
             </a:r>
           </a:p>
         </p:txBody>
@@ -4172,7 +4172,7 @@
                 </a:solidFill>
                 <a:latin typeface="Calibri"/>
               </a:rPr>
-              <a:t>It answers the only question that matters at the time, which is whether it carries on.</a:t>
+              <a:t>It tells them the one thing they want to know: that it will stop.</a:t>
             </a:r>
           </a:p>
         </p:txBody>
